--- a/tik4_sunum.pptx
+++ b/tik4_sunum.pptx
@@ -5,42 +5,47 @@
     <p:sldMasterId id="2147483672" r:id="rId1"/>
   </p:sldMasterIdLst>
   <p:notesMasterIdLst>
-    <p:notesMasterId r:id="rId35"/>
+    <p:notesMasterId r:id="rId40"/>
   </p:notesMasterIdLst>
   <p:sldIdLst>
     <p:sldId id="256" r:id="rId2"/>
-    <p:sldId id="309" r:id="rId3"/>
-    <p:sldId id="357" r:id="rId4"/>
-    <p:sldId id="390" r:id="rId5"/>
-    <p:sldId id="310" r:id="rId6"/>
-    <p:sldId id="392" r:id="rId7"/>
-    <p:sldId id="391" r:id="rId8"/>
-    <p:sldId id="393" r:id="rId9"/>
-    <p:sldId id="375" r:id="rId10"/>
-    <p:sldId id="389" r:id="rId11"/>
-    <p:sldId id="383" r:id="rId12"/>
-    <p:sldId id="358" r:id="rId13"/>
-    <p:sldId id="395" r:id="rId14"/>
-    <p:sldId id="396" r:id="rId15"/>
-    <p:sldId id="397" r:id="rId16"/>
-    <p:sldId id="398" r:id="rId17"/>
-    <p:sldId id="415" r:id="rId18"/>
-    <p:sldId id="400" r:id="rId19"/>
-    <p:sldId id="401" r:id="rId20"/>
-    <p:sldId id="402" r:id="rId21"/>
-    <p:sldId id="403" r:id="rId22"/>
-    <p:sldId id="404" r:id="rId23"/>
-    <p:sldId id="405" r:id="rId24"/>
-    <p:sldId id="406" r:id="rId25"/>
-    <p:sldId id="407" r:id="rId26"/>
-    <p:sldId id="408" r:id="rId27"/>
-    <p:sldId id="409" r:id="rId28"/>
-    <p:sldId id="411" r:id="rId29"/>
-    <p:sldId id="412" r:id="rId30"/>
-    <p:sldId id="413" r:id="rId31"/>
-    <p:sldId id="414" r:id="rId32"/>
-    <p:sldId id="410" r:id="rId33"/>
-    <p:sldId id="293" r:id="rId34"/>
+    <p:sldId id="357" r:id="rId3"/>
+    <p:sldId id="390" r:id="rId4"/>
+    <p:sldId id="310" r:id="rId5"/>
+    <p:sldId id="392" r:id="rId6"/>
+    <p:sldId id="391" r:id="rId7"/>
+    <p:sldId id="393" r:id="rId8"/>
+    <p:sldId id="375" r:id="rId9"/>
+    <p:sldId id="389" r:id="rId10"/>
+    <p:sldId id="383" r:id="rId11"/>
+    <p:sldId id="358" r:id="rId12"/>
+    <p:sldId id="395" r:id="rId13"/>
+    <p:sldId id="396" r:id="rId14"/>
+    <p:sldId id="397" r:id="rId15"/>
+    <p:sldId id="398" r:id="rId16"/>
+    <p:sldId id="415" r:id="rId17"/>
+    <p:sldId id="416" r:id="rId18"/>
+    <p:sldId id="417" r:id="rId19"/>
+    <p:sldId id="418" r:id="rId20"/>
+    <p:sldId id="419" r:id="rId21"/>
+    <p:sldId id="420" r:id="rId22"/>
+    <p:sldId id="421" r:id="rId23"/>
+    <p:sldId id="401" r:id="rId24"/>
+    <p:sldId id="422" r:id="rId25"/>
+    <p:sldId id="423" r:id="rId26"/>
+    <p:sldId id="424" r:id="rId27"/>
+    <p:sldId id="425" r:id="rId28"/>
+    <p:sldId id="400" r:id="rId29"/>
+    <p:sldId id="402" r:id="rId30"/>
+    <p:sldId id="403" r:id="rId31"/>
+    <p:sldId id="404" r:id="rId32"/>
+    <p:sldId id="406" r:id="rId33"/>
+    <p:sldId id="405" r:id="rId34"/>
+    <p:sldId id="407" r:id="rId35"/>
+    <p:sldId id="408" r:id="rId36"/>
+    <p:sldId id="426" r:id="rId37"/>
+    <p:sldId id="427" r:id="rId38"/>
+    <p:sldId id="293" r:id="rId39"/>
   </p:sldIdLst>
   <p:sldSz cx="12192000" cy="6858000"/>
   <p:notesSz cx="6858000" cy="9144000"/>
@@ -241,7 +246,7 @@
           <a:p>
             <a:fld id="{12806725-A5C6-4D97-BAB5-97495DA97B1D}" type="datetimeFigureOut">
               <a:rPr lang="en-US" smtClean="0"/>
-              <a:t>12/24/2025</a:t>
+              <a:t>12/25/2025</a:t>
             </a:fld>
             <a:endParaRPr lang="en-US"/>
           </a:p>
@@ -1230,7 +1235,7 @@
           <a:p>
             <a:fld id="{A96287EC-2D8B-4839-853F-448EC8EF3B82}" type="datetimeFigureOut">
               <a:rPr lang="en-US" smtClean="0"/>
-              <a:t>12/24/2025</a:t>
+              <a:t>12/25/2025</a:t>
             </a:fld>
             <a:endParaRPr lang="en-US"/>
           </a:p>
@@ -1481,7 +1486,7 @@
           <a:p>
             <a:fld id="{A96287EC-2D8B-4839-853F-448EC8EF3B82}" type="datetimeFigureOut">
               <a:rPr lang="en-US" smtClean="0"/>
-              <a:t>12/24/2025</a:t>
+              <a:t>12/25/2025</a:t>
             </a:fld>
             <a:endParaRPr lang="en-US"/>
           </a:p>
@@ -1795,7 +1800,7 @@
           <a:p>
             <a:fld id="{A96287EC-2D8B-4839-853F-448EC8EF3B82}" type="datetimeFigureOut">
               <a:rPr lang="en-US" smtClean="0"/>
-              <a:t>12/24/2025</a:t>
+              <a:t>12/25/2025</a:t>
             </a:fld>
             <a:endParaRPr lang="en-US"/>
           </a:p>
@@ -2136,7 +2141,7 @@
           <a:p>
             <a:fld id="{A96287EC-2D8B-4839-853F-448EC8EF3B82}" type="datetimeFigureOut">
               <a:rPr lang="en-US" smtClean="0"/>
-              <a:t>12/24/2025</a:t>
+              <a:t>12/25/2025</a:t>
             </a:fld>
             <a:endParaRPr lang="en-US"/>
           </a:p>
@@ -2450,7 +2455,7 @@
           <a:p>
             <a:fld id="{A96287EC-2D8B-4839-853F-448EC8EF3B82}" type="datetimeFigureOut">
               <a:rPr lang="en-US" smtClean="0"/>
-              <a:t>12/24/2025</a:t>
+              <a:t>12/25/2025</a:t>
             </a:fld>
             <a:endParaRPr lang="en-US"/>
           </a:p>
@@ -2843,7 +2848,7 @@
           <a:p>
             <a:fld id="{A96287EC-2D8B-4839-853F-448EC8EF3B82}" type="datetimeFigureOut">
               <a:rPr lang="en-US" smtClean="0"/>
-              <a:t>12/24/2025</a:t>
+              <a:t>12/25/2025</a:t>
             </a:fld>
             <a:endParaRPr lang="en-US"/>
           </a:p>
@@ -3013,7 +3018,7 @@
           <a:p>
             <a:fld id="{A96287EC-2D8B-4839-853F-448EC8EF3B82}" type="datetimeFigureOut">
               <a:rPr lang="en-US" smtClean="0"/>
-              <a:t>12/24/2025</a:t>
+              <a:t>12/25/2025</a:t>
             </a:fld>
             <a:endParaRPr lang="en-US"/>
           </a:p>
@@ -3193,7 +3198,7 @@
           <a:p>
             <a:fld id="{A96287EC-2D8B-4839-853F-448EC8EF3B82}" type="datetimeFigureOut">
               <a:rPr lang="en-US" smtClean="0"/>
-              <a:t>12/24/2025</a:t>
+              <a:t>12/25/2025</a:t>
             </a:fld>
             <a:endParaRPr lang="en-US"/>
           </a:p>
@@ -3369,7 +3374,7 @@
           <a:p>
             <a:fld id="{A96287EC-2D8B-4839-853F-448EC8EF3B82}" type="datetimeFigureOut">
               <a:rPr lang="en-US" smtClean="0"/>
-              <a:t>12/24/2025</a:t>
+              <a:t>12/25/2025</a:t>
             </a:fld>
             <a:endParaRPr lang="en-US"/>
           </a:p>
@@ -3616,7 +3621,7 @@
           <a:p>
             <a:fld id="{A96287EC-2D8B-4839-853F-448EC8EF3B82}" type="datetimeFigureOut">
               <a:rPr lang="en-US" smtClean="0"/>
-              <a:t>12/24/2025</a:t>
+              <a:t>12/25/2025</a:t>
             </a:fld>
             <a:endParaRPr lang="en-US"/>
           </a:p>
@@ -3848,7 +3853,7 @@
           <a:p>
             <a:fld id="{A96287EC-2D8B-4839-853F-448EC8EF3B82}" type="datetimeFigureOut">
               <a:rPr lang="en-US" smtClean="0"/>
-              <a:t>12/24/2025</a:t>
+              <a:t>12/25/2025</a:t>
             </a:fld>
             <a:endParaRPr lang="en-US"/>
           </a:p>
@@ -4222,7 +4227,7 @@
           <a:p>
             <a:fld id="{A96287EC-2D8B-4839-853F-448EC8EF3B82}" type="datetimeFigureOut">
               <a:rPr lang="en-US" smtClean="0"/>
-              <a:t>12/24/2025</a:t>
+              <a:t>12/25/2025</a:t>
             </a:fld>
             <a:endParaRPr lang="en-US"/>
           </a:p>
@@ -4345,7 +4350,7 @@
           <a:p>
             <a:fld id="{A96287EC-2D8B-4839-853F-448EC8EF3B82}" type="datetimeFigureOut">
               <a:rPr lang="en-US" smtClean="0"/>
-              <a:t>12/24/2025</a:t>
+              <a:t>12/25/2025</a:t>
             </a:fld>
             <a:endParaRPr lang="en-US"/>
           </a:p>
@@ -4440,7 +4445,7 @@
           <a:p>
             <a:fld id="{A96287EC-2D8B-4839-853F-448EC8EF3B82}" type="datetimeFigureOut">
               <a:rPr lang="en-US" smtClean="0"/>
-              <a:t>12/24/2025</a:t>
+              <a:t>12/25/2025</a:t>
             </a:fld>
             <a:endParaRPr lang="en-US"/>
           </a:p>
@@ -4695,7 +4700,7 @@
           <a:p>
             <a:fld id="{A96287EC-2D8B-4839-853F-448EC8EF3B82}" type="datetimeFigureOut">
               <a:rPr lang="en-US" smtClean="0"/>
-              <a:t>12/24/2025</a:t>
+              <a:t>12/25/2025</a:t>
             </a:fld>
             <a:endParaRPr lang="en-US"/>
           </a:p>
@@ -4958,7 +4963,7 @@
           <a:p>
             <a:fld id="{A96287EC-2D8B-4839-853F-448EC8EF3B82}" type="datetimeFigureOut">
               <a:rPr lang="en-US" smtClean="0"/>
-              <a:t>12/24/2025</a:t>
+              <a:t>12/25/2025</a:t>
             </a:fld>
             <a:endParaRPr lang="en-US"/>
           </a:p>
@@ -5701,7 +5706,7 @@
           <a:p>
             <a:fld id="{A96287EC-2D8B-4839-853F-448EC8EF3B82}" type="datetimeFigureOut">
               <a:rPr lang="en-US" smtClean="0"/>
-              <a:t>12/24/2025</a:t>
+              <a:t>12/25/2025</a:t>
             </a:fld>
             <a:endParaRPr lang="en-US"/>
           </a:p>
@@ -6557,107 +6562,6 @@
         <p:cNvPr id="1" name="">
           <a:extLst>
             <a:ext uri="{FF2B5EF4-FFF2-40B4-BE49-F238E27FC236}">
-              <a16:creationId xmlns:a16="http://schemas.microsoft.com/office/drawing/2014/main" id="{F2349E41-300E-119D-6B49-64DB882FCABB}"/>
-            </a:ext>
-          </a:extLst>
-        </p:cNvPr>
-        <p:cNvGrpSpPr/>
-        <p:nvPr/>
-      </p:nvGrpSpPr>
-      <p:grpSpPr>
-        <a:xfrm>
-          <a:off x="0" y="0"/>
-          <a:ext cx="0" cy="0"/>
-          <a:chOff x="0" y="0"/>
-          <a:chExt cx="0" cy="0"/>
-        </a:xfrm>
-      </p:grpSpPr>
-      <p:sp>
-        <p:nvSpPr>
-          <p:cNvPr id="2" name="Title 1">
-            <a:extLst>
-              <a:ext uri="{FF2B5EF4-FFF2-40B4-BE49-F238E27FC236}">
-                <a16:creationId xmlns:a16="http://schemas.microsoft.com/office/drawing/2014/main" id="{50738DB7-786A-B9FF-10B9-D74C93C02EDB}"/>
-              </a:ext>
-            </a:extLst>
-          </p:cNvPr>
-          <p:cNvSpPr>
-            <a:spLocks noGrp="1"/>
-          </p:cNvSpPr>
-          <p:nvPr>
-            <p:ph type="title"/>
-          </p:nvPr>
-        </p:nvSpPr>
-        <p:spPr>
-          <a:xfrm>
-            <a:off x="677334" y="609599"/>
-            <a:ext cx="4333937" cy="4410635"/>
-          </a:xfrm>
-        </p:spPr>
-        <p:txBody>
-          <a:bodyPr>
-            <a:normAutofit/>
-          </a:bodyPr>
-          <a:lstStyle/>
-          <a:p>
-            <a:pPr>
-              <a:lnSpc>
-                <a:spcPct val="150000"/>
-              </a:lnSpc>
-            </a:pPr>
-            <a:r>
-              <a:rPr lang="en-US" sz="4000" dirty="0" err="1"/>
-              <a:t>Dönem</a:t>
-            </a:r>
-            <a:r>
-              <a:rPr lang="en-US" sz="4000" dirty="0"/>
-              <a:t> </a:t>
-            </a:r>
-            <a:r>
-              <a:rPr lang="en-US" sz="4000" dirty="0" err="1"/>
-              <a:t>İçinde</a:t>
-            </a:r>
-            <a:r>
-              <a:rPr lang="en-US" sz="4000" dirty="0"/>
-              <a:t> </a:t>
-            </a:r>
-            <a:r>
-              <a:rPr lang="en-US" sz="4000" dirty="0" err="1"/>
-              <a:t>Yapılan</a:t>
-            </a:r>
-            <a:r>
-              <a:rPr lang="en-US" sz="4000" dirty="0"/>
-              <a:t> </a:t>
-            </a:r>
-            <a:r>
-              <a:rPr lang="en-US" sz="4000" dirty="0" err="1"/>
-              <a:t>Çalışmalar</a:t>
-            </a:r>
-            <a:endParaRPr lang="en-US" sz="4000" dirty="0"/>
-          </a:p>
-        </p:txBody>
-      </p:sp>
-    </p:spTree>
-    <p:extLst>
-      <p:ext uri="{BB962C8B-B14F-4D97-AF65-F5344CB8AC3E}">
-        <p14:creationId xmlns:p14="http://schemas.microsoft.com/office/powerpoint/2010/main" val="1140966695"/>
-      </p:ext>
-    </p:extLst>
-  </p:cSld>
-  <p:clrMapOvr>
-    <a:masterClrMapping/>
-  </p:clrMapOvr>
-</p:sld>
-</file>
-
-<file path=ppt/slides/slide11.xml><?xml version="1.0" encoding="utf-8"?>
-<p:sld xmlns:a="http://schemas.openxmlformats.org/drawingml/2006/main" xmlns:r="http://schemas.openxmlformats.org/officeDocument/2006/relationships" xmlns:p="http://schemas.openxmlformats.org/presentationml/2006/main">
-  <p:cSld>
-    <p:spTree>
-      <p:nvGrpSpPr>
-        <p:cNvPr id="1" name="">
-          <a:extLst>
-            <a:ext uri="{FF2B5EF4-FFF2-40B4-BE49-F238E27FC236}">
               <a16:creationId xmlns:a16="http://schemas.microsoft.com/office/drawing/2014/main" id="{C4E2D1DA-7924-61C2-27ED-BC84211DF303}"/>
             </a:ext>
           </a:extLst>
@@ -7031,7 +6935,7 @@
 </p:sld>
 </file>
 
-<file path=ppt/slides/slide12.xml><?xml version="1.0" encoding="utf-8"?>
+<file path=ppt/slides/slide11.xml><?xml version="1.0" encoding="utf-8"?>
 <p:sld xmlns:a="http://schemas.openxmlformats.org/drawingml/2006/main" xmlns:r="http://schemas.openxmlformats.org/officeDocument/2006/relationships" xmlns:p="http://schemas.openxmlformats.org/presentationml/2006/main">
   <p:cSld>
     <p:spTree>
@@ -7081,24 +6985,12 @@
           <a:lstStyle/>
           <a:p>
             <a:r>
-              <a:rPr lang="en-US" dirty="0" err="1"/>
-              <a:t>Piroliz</a:t>
-            </a:r>
-            <a:r>
-              <a:rPr lang="en-US" dirty="0"/>
-              <a:t> </a:t>
-            </a:r>
-            <a:r>
-              <a:rPr lang="en-US" dirty="0" err="1"/>
-              <a:t>Verisi</a:t>
-            </a:r>
-            <a:r>
-              <a:rPr lang="en-US" dirty="0"/>
-              <a:t> </a:t>
-            </a:r>
-            <a:r>
-              <a:rPr lang="en-US" dirty="0" err="1"/>
-              <a:t>Toplama</a:t>
+              <a:rPr lang="en-US" dirty="0"/>
+              <a:t>Yeni </a:t>
+            </a:r>
+            <a:r>
+              <a:rPr lang="en-US" dirty="0" err="1"/>
+              <a:t>yaklaşım</a:t>
             </a:r>
             <a:endParaRPr lang="en-US" dirty="0"/>
           </a:p>
@@ -7399,11 +7291,19 @@
             </a:r>
             <a:r>
               <a:rPr lang="en-US" dirty="0" err="1"/>
-              <a:t>Figür</a:t>
-            </a:r>
-            <a:r>
-              <a:rPr lang="en-US" dirty="0"/>
-              <a:t> 1'de </a:t>
+              <a:t>yandaki</a:t>
+            </a:r>
+            <a:r>
+              <a:rPr lang="en-US" dirty="0"/>
+              <a:t> </a:t>
+            </a:r>
+            <a:r>
+              <a:rPr lang="en-US" dirty="0" err="1"/>
+              <a:t>figür'de</a:t>
+            </a:r>
+            <a:r>
+              <a:rPr lang="en-US" dirty="0"/>
+              <a:t> </a:t>
             </a:r>
             <a:r>
               <a:rPr lang="en-US" dirty="0" err="1"/>
@@ -7460,7 +7360,7 @@
 </p:sld>
 </file>
 
-<file path=ppt/slides/slide13.xml><?xml version="1.0" encoding="utf-8"?>
+<file path=ppt/slides/slide12.xml><?xml version="1.0" encoding="utf-8"?>
 <p:sld xmlns:a="http://schemas.openxmlformats.org/drawingml/2006/main" xmlns:r="http://schemas.openxmlformats.org/officeDocument/2006/relationships" xmlns:p="http://schemas.openxmlformats.org/presentationml/2006/main">
   <p:cSld>
     <p:spTree>
@@ -7511,23 +7411,23 @@
           <a:p>
             <a:r>
               <a:rPr lang="en-US" dirty="0" err="1"/>
-              <a:t>Piroliz</a:t>
-            </a:r>
-            <a:r>
-              <a:rPr lang="en-US" dirty="0"/>
-              <a:t> </a:t>
-            </a:r>
-            <a:r>
-              <a:rPr lang="en-US" dirty="0" err="1"/>
-              <a:t>Verisi</a:t>
-            </a:r>
-            <a:r>
-              <a:rPr lang="en-US" dirty="0"/>
-              <a:t> </a:t>
-            </a:r>
-            <a:r>
-              <a:rPr lang="en-US" dirty="0" err="1"/>
-              <a:t>Toplama</a:t>
+              <a:t>Ters</a:t>
+            </a:r>
+            <a:r>
+              <a:rPr lang="en-US" dirty="0"/>
+              <a:t> </a:t>
+            </a:r>
+            <a:r>
+              <a:rPr lang="en-US" dirty="0" err="1"/>
+              <a:t>makine</a:t>
+            </a:r>
+            <a:r>
+              <a:rPr lang="en-US" dirty="0"/>
+              <a:t> </a:t>
+            </a:r>
+            <a:r>
+              <a:rPr lang="en-US" dirty="0" err="1"/>
+              <a:t>öğrenmesi</a:t>
             </a:r>
             <a:endParaRPr lang="en-US" dirty="0"/>
           </a:p>
@@ -8057,7 +7957,7 @@
 </p:sld>
 </file>
 
-<file path=ppt/slides/slide14.xml><?xml version="1.0" encoding="utf-8"?>
+<file path=ppt/slides/slide13.xml><?xml version="1.0" encoding="utf-8"?>
 <p:sld xmlns:a="http://schemas.openxmlformats.org/drawingml/2006/main" xmlns:r="http://schemas.openxmlformats.org/officeDocument/2006/relationships" xmlns:p="http://schemas.openxmlformats.org/presentationml/2006/main">
   <p:cSld>
     <p:spTree>
@@ -8420,7 +8320,7 @@
 </p:sld>
 </file>
 
-<file path=ppt/slides/slide15.xml><?xml version="1.0" encoding="utf-8"?>
+<file path=ppt/slides/slide14.xml><?xml version="1.0" encoding="utf-8"?>
 <p:sld xmlns:a="http://schemas.openxmlformats.org/drawingml/2006/main" xmlns:r="http://schemas.openxmlformats.org/officeDocument/2006/relationships" xmlns:p="http://schemas.openxmlformats.org/presentationml/2006/main">
   <p:cSld>
     <p:spTree>
@@ -8470,26 +8370,9 @@
           <a:lstStyle/>
           <a:p>
             <a:r>
-              <a:rPr lang="en-US" dirty="0" err="1"/>
-              <a:t>Piroliz</a:t>
-            </a:r>
-            <a:r>
-              <a:rPr lang="en-US" dirty="0"/>
-              <a:t> </a:t>
-            </a:r>
-            <a:r>
-              <a:rPr lang="en-US" dirty="0" err="1"/>
-              <a:t>Verisi</a:t>
-            </a:r>
-            <a:r>
-              <a:rPr lang="en-US" dirty="0"/>
-              <a:t> </a:t>
-            </a:r>
-            <a:r>
-              <a:rPr lang="en-US" dirty="0" err="1"/>
-              <a:t>Toplama</a:t>
-            </a:r>
-            <a:endParaRPr lang="en-US" dirty="0"/>
+              <a:rPr lang="en-US" dirty="0"/>
+              <a:t>Cantera</a:t>
+            </a:r>
           </a:p>
         </p:txBody>
       </p:sp>
@@ -8512,7 +8395,7 @@
         <p:spPr>
           <a:xfrm>
             <a:off x="677334" y="1676399"/>
-            <a:ext cx="8596668" cy="5072131"/>
+            <a:ext cx="9121090" cy="5072131"/>
           </a:xfrm>
         </p:spPr>
         <p:txBody>
@@ -8521,6 +8404,11 @@
           </a:bodyPr>
           <a:lstStyle/>
           <a:p>
+            <a:pPr>
+              <a:lnSpc>
+                <a:spcPct val="150000"/>
+              </a:lnSpc>
+            </a:pPr>
             <a:r>
               <a:rPr lang="en-US" dirty="0" err="1"/>
               <a:t>Sistemdeki</a:t>
@@ -8587,6 +8475,11 @@
             </a:r>
           </a:p>
           <a:p>
+            <a:pPr>
+              <a:lnSpc>
+                <a:spcPct val="150000"/>
+              </a:lnSpc>
+            </a:pPr>
             <a:r>
               <a:rPr lang="en-US" dirty="0" err="1"/>
               <a:t>Ardından</a:t>
@@ -8733,6 +8626,11 @@
             </a:r>
           </a:p>
           <a:p>
+            <a:pPr>
+              <a:lnSpc>
+                <a:spcPct val="150000"/>
+              </a:lnSpc>
+            </a:pPr>
             <a:r>
               <a:rPr lang="en-US" dirty="0" err="1"/>
               <a:t>Sistem</a:t>
@@ -8847,6 +8745,11 @@
             </a:r>
           </a:p>
           <a:p>
+            <a:pPr>
+              <a:lnSpc>
+                <a:spcPct val="150000"/>
+              </a:lnSpc>
+            </a:pPr>
             <a:r>
               <a:rPr lang="en-US" dirty="0"/>
               <a:t>Bu </a:t>
@@ -8973,6 +8876,11 @@
             </a:r>
           </a:p>
           <a:p>
+            <a:pPr>
+              <a:lnSpc>
+                <a:spcPct val="150000"/>
+              </a:lnSpc>
+            </a:pPr>
             <a:r>
               <a:rPr lang="en-US" dirty="0"/>
               <a:t>Cantera, Gibbs </a:t>
@@ -9050,7 +8958,7 @@
 </p:sld>
 </file>
 
-<file path=ppt/slides/slide16.xml><?xml version="1.0" encoding="utf-8"?>
+<file path=ppt/slides/slide15.xml><?xml version="1.0" encoding="utf-8"?>
 <p:sld xmlns:a="http://schemas.openxmlformats.org/drawingml/2006/main" xmlns:r="http://schemas.openxmlformats.org/officeDocument/2006/relationships" xmlns:p="http://schemas.openxmlformats.org/presentationml/2006/main">
   <p:cSld>
     <p:spTree>
@@ -9100,26 +9008,9 @@
           <a:lstStyle/>
           <a:p>
             <a:r>
-              <a:rPr lang="en-US" dirty="0" err="1"/>
-              <a:t>Piroliz</a:t>
-            </a:r>
-            <a:r>
-              <a:rPr lang="en-US" dirty="0"/>
-              <a:t> </a:t>
-            </a:r>
-            <a:r>
-              <a:rPr lang="en-US" dirty="0" err="1"/>
-              <a:t>Verisi</a:t>
-            </a:r>
-            <a:r>
-              <a:rPr lang="en-US" dirty="0"/>
-              <a:t> </a:t>
-            </a:r>
-            <a:r>
-              <a:rPr lang="en-US" dirty="0" err="1"/>
-              <a:t>Toplama</a:t>
-            </a:r>
-            <a:endParaRPr lang="en-US" dirty="0"/>
+              <a:rPr lang="en-US" dirty="0"/>
+              <a:t>Cantera</a:t>
+            </a:r>
           </a:p>
         </p:txBody>
       </p:sp>
@@ -9218,6 +9109,11 @@
             </a:r>
           </a:p>
           <a:p>
+            <a:pPr>
+              <a:lnSpc>
+                <a:spcPct val="150000"/>
+              </a:lnSpc>
+            </a:pPr>
             <a:r>
               <a:rPr lang="en-US" dirty="0"/>
               <a:t>2. Jacobian </a:t>
@@ -9304,6 +9200,11 @@
             </a:r>
           </a:p>
           <a:p>
+            <a:pPr>
+              <a:lnSpc>
+                <a:spcPct val="150000"/>
+              </a:lnSpc>
+            </a:pPr>
             <a:r>
               <a:rPr lang="en-US" dirty="0"/>
               <a:t>3. </a:t>
@@ -9430,7 +9331,11 @@
             </a:r>
           </a:p>
           <a:p>
-            <a:pPr lvl="1"/>
+            <a:pPr lvl="1">
+              <a:lnSpc>
+                <a:spcPct val="150000"/>
+              </a:lnSpc>
+            </a:pPr>
             <a:r>
               <a:rPr lang="en-US" dirty="0"/>
               <a:t>- J × </a:t>
@@ -9445,7 +9350,11 @@
             </a:r>
           </a:p>
           <a:p>
-            <a:pPr lvl="1"/>
+            <a:pPr lvl="1">
+              <a:lnSpc>
+                <a:spcPct val="150000"/>
+              </a:lnSpc>
+            </a:pPr>
             <a:r>
               <a:rPr lang="en-US" dirty="0"/>
               <a:t>- </a:t>
@@ -9484,213 +9393,137 @@
             </a:r>
           </a:p>
           <a:p>
+            <a:pPr>
+              <a:lnSpc>
+                <a:spcPct val="150000"/>
+              </a:lnSpc>
+            </a:pPr>
             <a:r>
               <a:rPr lang="en-US" dirty="0"/>
               <a:t>4. </a:t>
             </a:r>
             <a:r>
               <a:rPr lang="en-US" dirty="0" err="1"/>
-              <a:t>Satır</a:t>
-            </a:r>
-            <a:r>
-              <a:rPr lang="en-US" dirty="0"/>
-              <a:t> </a:t>
-            </a:r>
-            <a:r>
-              <a:rPr lang="en-US" dirty="0" err="1"/>
-              <a:t>arama</a:t>
-            </a:r>
-            <a:r>
-              <a:rPr lang="en-US" dirty="0"/>
-              <a:t> (line search): </a:t>
-            </a:r>
-            <a:r>
-              <a:rPr lang="en-US" dirty="0" err="1"/>
-              <a:t>Hesaplanan</a:t>
-            </a:r>
-            <a:r>
-              <a:rPr lang="en-US" dirty="0"/>
-              <a:t> </a:t>
-            </a:r>
-            <a:r>
-              <a:rPr lang="en-US" dirty="0" err="1"/>
-              <a:t>düzeltmelerin</a:t>
-            </a:r>
-            <a:r>
-              <a:rPr lang="en-US" dirty="0"/>
-              <a:t> </a:t>
-            </a:r>
-            <a:r>
-              <a:rPr lang="en-US" dirty="0" err="1"/>
-              <a:t>uygulanma</a:t>
-            </a:r>
-            <a:r>
-              <a:rPr lang="en-US" dirty="0"/>
-              <a:t> </a:t>
-            </a:r>
-            <a:r>
-              <a:rPr lang="en-US" dirty="0" err="1"/>
-              <a:t>oranı</a:t>
-            </a:r>
-            <a:r>
-              <a:rPr lang="en-US" dirty="0"/>
-              <a:t>, </a:t>
-            </a:r>
-            <a:r>
-              <a:rPr lang="en-US" dirty="0" err="1"/>
-              <a:t>yakınsamayı</a:t>
-            </a:r>
-            <a:r>
-              <a:rPr lang="en-US" dirty="0"/>
-              <a:t> </a:t>
-            </a:r>
-            <a:r>
-              <a:rPr lang="en-US" dirty="0" err="1"/>
-              <a:t>garantilemek</a:t>
-            </a:r>
-            <a:r>
-              <a:rPr lang="en-US" dirty="0"/>
-              <a:t> </a:t>
-            </a:r>
-            <a:r>
-              <a:rPr lang="en-US" dirty="0" err="1"/>
-              <a:t>için</a:t>
-            </a:r>
-            <a:r>
-              <a:rPr lang="en-US" dirty="0"/>
-              <a:t> optimize </a:t>
-            </a:r>
-            <a:r>
-              <a:rPr lang="en-US" dirty="0" err="1"/>
-              <a:t>edilir</a:t>
-            </a:r>
-            <a:r>
-              <a:rPr lang="en-US" dirty="0"/>
-              <a:t> </a:t>
-            </a:r>
-          </a:p>
-          <a:p>
+              <a:t>Yakınsama</a:t>
+            </a:r>
+            <a:r>
+              <a:rPr lang="en-US" dirty="0"/>
+              <a:t> </a:t>
+            </a:r>
+            <a:r>
+              <a:rPr lang="en-US" dirty="0" err="1"/>
+              <a:t>kontrolü</a:t>
+            </a:r>
+            <a:r>
+              <a:rPr lang="en-US" dirty="0"/>
+              <a:t>: </a:t>
+            </a:r>
+            <a:r>
+              <a:rPr lang="en-US" dirty="0" err="1"/>
+              <a:t>Düzeltmeler</a:t>
+            </a:r>
+            <a:r>
+              <a:rPr lang="en-US" dirty="0"/>
+              <a:t> </a:t>
+            </a:r>
+            <a:r>
+              <a:rPr lang="en-US" dirty="0" err="1"/>
+              <a:t>belirli</a:t>
+            </a:r>
+            <a:r>
+              <a:rPr lang="en-US" dirty="0"/>
+              <a:t> </a:t>
+            </a:r>
+            <a:r>
+              <a:rPr lang="en-US" dirty="0" err="1"/>
+              <a:t>bir</a:t>
+            </a:r>
+            <a:r>
+              <a:rPr lang="en-US" dirty="0"/>
+              <a:t> </a:t>
+            </a:r>
+            <a:r>
+              <a:rPr lang="en-US" dirty="0" err="1"/>
+              <a:t>tolerans</a:t>
+            </a:r>
+            <a:r>
+              <a:rPr lang="en-US" dirty="0"/>
+              <a:t> </a:t>
+            </a:r>
+            <a:r>
+              <a:rPr lang="en-US" dirty="0" err="1"/>
+              <a:t>değerinin</a:t>
+            </a:r>
+            <a:r>
+              <a:rPr lang="en-US" dirty="0"/>
+              <a:t> (</a:t>
+            </a:r>
+            <a:r>
+              <a:rPr lang="en-US" dirty="0" err="1"/>
+              <a:t>örneğin</a:t>
+            </a:r>
+            <a:r>
+              <a:rPr lang="en-US" dirty="0"/>
+              <a:t> 10⁻⁸) </a:t>
+            </a:r>
+            <a:r>
+              <a:rPr lang="en-US" dirty="0" err="1"/>
+              <a:t>altına</a:t>
+            </a:r>
+            <a:r>
+              <a:rPr lang="en-US" dirty="0"/>
+              <a:t> </a:t>
+            </a:r>
+            <a:r>
+              <a:rPr lang="en-US" dirty="0" err="1"/>
+              <a:t>düşene</a:t>
+            </a:r>
+            <a:r>
+              <a:rPr lang="en-US" dirty="0"/>
+              <a:t> </a:t>
+            </a:r>
+            <a:r>
+              <a:rPr lang="en-US" dirty="0" err="1"/>
+              <a:t>kadar</a:t>
+            </a:r>
+            <a:r>
+              <a:rPr lang="en-US" dirty="0"/>
+              <a:t> </a:t>
+            </a:r>
+            <a:r>
+              <a:rPr lang="en-US" dirty="0" err="1"/>
+              <a:t>iterasyonlar</a:t>
+            </a:r>
+            <a:r>
+              <a:rPr lang="en-US" dirty="0"/>
+              <a:t> </a:t>
+            </a:r>
+            <a:r>
+              <a:rPr lang="en-US" dirty="0" err="1"/>
+              <a:t>devam</a:t>
+            </a:r>
+            <a:r>
+              <a:rPr lang="en-US" dirty="0"/>
+              <a:t> </a:t>
+            </a:r>
+            <a:r>
+              <a:rPr lang="en-US" dirty="0" err="1"/>
+              <a:t>eder</a:t>
+            </a:r>
+            <a:r>
+              <a:rPr lang="en-US" dirty="0"/>
+              <a:t> </a:t>
+            </a:r>
+          </a:p>
+          <a:p>
+            <a:pPr>
+              <a:lnSpc>
+                <a:spcPct val="150000"/>
+              </a:lnSpc>
+            </a:pPr>
             <a:r>
               <a:rPr lang="en-US" dirty="0"/>
               <a:t>5. </a:t>
-            </a:r>
-            <a:r>
-              <a:rPr lang="en-US" dirty="0" err="1"/>
-              <a:t>Yakınsama</a:t>
-            </a:r>
-            <a:r>
-              <a:rPr lang="en-US" dirty="0"/>
-              <a:t> </a:t>
-            </a:r>
-            <a:r>
-              <a:rPr lang="en-US" dirty="0" err="1"/>
-              <a:t>kontrolü</a:t>
-            </a:r>
-            <a:r>
-              <a:rPr lang="en-US" dirty="0"/>
-              <a:t>: </a:t>
-            </a:r>
-            <a:r>
-              <a:rPr lang="en-US" dirty="0" err="1"/>
-              <a:t>Düzeltmeler</a:t>
-            </a:r>
-            <a:r>
-              <a:rPr lang="en-US" dirty="0"/>
-              <a:t> </a:t>
-            </a:r>
-            <a:r>
-              <a:rPr lang="en-US" dirty="0" err="1"/>
-              <a:t>belirli</a:t>
-            </a:r>
-            <a:r>
-              <a:rPr lang="en-US" dirty="0"/>
-              <a:t> </a:t>
-            </a:r>
-            <a:r>
-              <a:rPr lang="en-US" dirty="0" err="1"/>
-              <a:t>bir</a:t>
-            </a:r>
-            <a:r>
-              <a:rPr lang="en-US" dirty="0"/>
-              <a:t> </a:t>
-            </a:r>
-            <a:r>
-              <a:rPr lang="en-US" dirty="0" err="1"/>
-              <a:t>tolerans</a:t>
-            </a:r>
-            <a:r>
-              <a:rPr lang="en-US" dirty="0"/>
-              <a:t> </a:t>
-            </a:r>
-            <a:r>
-              <a:rPr lang="en-US" dirty="0" err="1"/>
-              <a:t>değerinin</a:t>
-            </a:r>
-            <a:r>
-              <a:rPr lang="en-US" dirty="0"/>
-              <a:t> (</a:t>
-            </a:r>
-            <a:r>
-              <a:rPr lang="en-US" dirty="0" err="1"/>
-              <a:t>örneğin</a:t>
-            </a:r>
-            <a:r>
-              <a:rPr lang="en-US" dirty="0"/>
-              <a:t> 10⁻⁸) </a:t>
-            </a:r>
-            <a:r>
-              <a:rPr lang="en-US" dirty="0" err="1"/>
-              <a:t>altına</a:t>
-            </a:r>
-            <a:r>
-              <a:rPr lang="en-US" dirty="0"/>
-              <a:t> </a:t>
-            </a:r>
-            <a:r>
-              <a:rPr lang="en-US" dirty="0" err="1"/>
-              <a:t>düşene</a:t>
-            </a:r>
-            <a:r>
-              <a:rPr lang="en-US" dirty="0"/>
-              <a:t> </a:t>
-            </a:r>
-            <a:r>
-              <a:rPr lang="en-US" dirty="0" err="1"/>
-              <a:t>kadar</a:t>
-            </a:r>
-            <a:r>
-              <a:rPr lang="en-US" dirty="0"/>
-              <a:t> </a:t>
-            </a:r>
-            <a:r>
-              <a:rPr lang="en-US" dirty="0" err="1"/>
-              <a:t>iterasyonlar</a:t>
-            </a:r>
-            <a:r>
-              <a:rPr lang="en-US" dirty="0"/>
-              <a:t> </a:t>
-            </a:r>
-            <a:r>
-              <a:rPr lang="en-US" dirty="0" err="1"/>
-              <a:t>devam</a:t>
-            </a:r>
-            <a:r>
-              <a:rPr lang="en-US" dirty="0"/>
-              <a:t> </a:t>
-            </a:r>
-            <a:r>
-              <a:rPr lang="en-US" dirty="0" err="1"/>
-              <a:t>eder</a:t>
-            </a:r>
-            <a:r>
-              <a:rPr lang="en-US" dirty="0"/>
-              <a:t> </a:t>
-            </a:r>
-          </a:p>
-          <a:p>
-            <a:r>
-              <a:rPr lang="en-US" dirty="0"/>
-              <a:t>6. </a:t>
             </a:r>
             <a:r>
               <a:rPr lang="en-US" dirty="0" err="1"/>
@@ -9805,7 +9638,7 @@
 </p:sld>
 </file>
 
-<file path=ppt/slides/slide17.xml><?xml version="1.0" encoding="utf-8"?>
+<file path=ppt/slides/slide16.xml><?xml version="1.0" encoding="utf-8"?>
 <p:sld xmlns:a="http://schemas.openxmlformats.org/drawingml/2006/main" xmlns:r="http://schemas.openxmlformats.org/officeDocument/2006/relationships" xmlns:p="http://schemas.openxmlformats.org/presentationml/2006/main">
   <p:cSld>
     <p:spTree>
@@ -9843,7 +9676,10 @@
           <a:bodyPr/>
           <a:lstStyle/>
           <a:p>
-            <a:endParaRPr lang="en-US"/>
+            <a:r>
+              <a:rPr lang="en-US" dirty="0"/>
+              <a:t>Cantera</a:t>
+            </a:r>
           </a:p>
         </p:txBody>
       </p:sp>
@@ -9869,8 +9705,8 @@
         </p:blipFill>
         <p:spPr>
           <a:xfrm>
-            <a:off x="338081" y="2046184"/>
-            <a:ext cx="8862658" cy="4811816"/>
+            <a:off x="338081" y="1461247"/>
+            <a:ext cx="9940026" cy="5396753"/>
           </a:xfrm>
           <a:prstGeom prst="rect">
             <a:avLst/>
@@ -9890,7 +9726,3762 @@
 </p:sld>
 </file>
 
+<file path=ppt/slides/slide17.xml><?xml version="1.0" encoding="utf-8"?>
+<p:sld xmlns:a="http://schemas.openxmlformats.org/drawingml/2006/main" xmlns:r="http://schemas.openxmlformats.org/officeDocument/2006/relationships" xmlns:p="http://schemas.openxmlformats.org/presentationml/2006/main">
+  <p:cSld>
+    <p:spTree>
+      <p:nvGrpSpPr>
+        <p:cNvPr id="1" name=""/>
+        <p:cNvGrpSpPr/>
+        <p:nvPr/>
+      </p:nvGrpSpPr>
+      <p:grpSpPr>
+        <a:xfrm>
+          <a:off x="0" y="0"/>
+          <a:ext cx="0" cy="0"/>
+          <a:chOff x="0" y="0"/>
+          <a:chExt cx="0" cy="0"/>
+        </a:xfrm>
+      </p:grpSpPr>
+      <p:sp>
+        <p:nvSpPr>
+          <p:cNvPr id="2" name="Başlık 1">
+            <a:extLst>
+              <a:ext uri="{FF2B5EF4-FFF2-40B4-BE49-F238E27FC236}">
+                <a16:creationId xmlns:a16="http://schemas.microsoft.com/office/drawing/2014/main" id="{0EA3B7A4-C0C9-BB79-A1EF-329FBB8D1578}"/>
+              </a:ext>
+            </a:extLst>
+          </p:cNvPr>
+          <p:cNvSpPr>
+            <a:spLocks noGrp="1"/>
+          </p:cNvSpPr>
+          <p:nvPr>
+            <p:ph type="title"/>
+          </p:nvPr>
+        </p:nvSpPr>
+        <p:spPr/>
+        <p:txBody>
+          <a:bodyPr/>
+          <a:lstStyle/>
+          <a:p>
+            <a:r>
+              <a:rPr lang="en-US" dirty="0"/>
+              <a:t>Ana </a:t>
+            </a:r>
+            <a:r>
+              <a:rPr lang="en-US" dirty="0" err="1"/>
+              <a:t>kontrolcü</a:t>
+            </a:r>
+            <a:r>
+              <a:rPr lang="en-US" dirty="0"/>
+              <a:t> </a:t>
+            </a:r>
+            <a:r>
+              <a:rPr lang="en-US" dirty="0" err="1"/>
+              <a:t>kod</a:t>
+            </a:r>
+            <a:r>
+              <a:rPr lang="en-US" dirty="0"/>
+              <a:t> (generate_data_cantera.py)</a:t>
+            </a:r>
+          </a:p>
+        </p:txBody>
+      </p:sp>
+      <p:sp>
+        <p:nvSpPr>
+          <p:cNvPr id="3" name="İçerik Yer Tutucusu 2">
+            <a:extLst>
+              <a:ext uri="{FF2B5EF4-FFF2-40B4-BE49-F238E27FC236}">
+                <a16:creationId xmlns:a16="http://schemas.microsoft.com/office/drawing/2014/main" id="{99352E57-ED02-F7B0-127E-A59527749A85}"/>
+              </a:ext>
+            </a:extLst>
+          </p:cNvPr>
+          <p:cNvSpPr>
+            <a:spLocks noGrp="1"/>
+          </p:cNvSpPr>
+          <p:nvPr>
+            <p:ph idx="1"/>
+          </p:nvPr>
+        </p:nvSpPr>
+        <p:spPr>
+          <a:xfrm>
+            <a:off x="677335" y="2160589"/>
+            <a:ext cx="4683560" cy="3880773"/>
+          </a:xfrm>
+        </p:spPr>
+        <p:txBody>
+          <a:bodyPr/>
+          <a:lstStyle/>
+          <a:p>
+            <a:r>
+              <a:rPr lang="en-US" dirty="0"/>
+              <a:t>Bu script </a:t>
+            </a:r>
+            <a:r>
+              <a:rPr lang="en-US" dirty="0" err="1"/>
+              <a:t>tüm</a:t>
+            </a:r>
+            <a:r>
+              <a:rPr lang="en-US" dirty="0"/>
+              <a:t> </a:t>
+            </a:r>
+            <a:r>
+              <a:rPr lang="en-US" dirty="0" err="1"/>
+              <a:t>iş</a:t>
+            </a:r>
+            <a:r>
+              <a:rPr lang="en-US" dirty="0"/>
+              <a:t> </a:t>
+            </a:r>
+            <a:r>
+              <a:rPr lang="en-US" dirty="0" err="1"/>
+              <a:t>akışını</a:t>
+            </a:r>
+            <a:r>
+              <a:rPr lang="en-US" dirty="0"/>
+              <a:t> </a:t>
+            </a:r>
+            <a:r>
+              <a:rPr lang="en-US" dirty="0" err="1"/>
+              <a:t>yönetir</a:t>
+            </a:r>
+            <a:r>
+              <a:rPr lang="en-US" dirty="0"/>
+              <a:t>:</a:t>
+            </a:r>
+          </a:p>
+          <a:p>
+            <a:pPr lvl="1"/>
+            <a:r>
+              <a:rPr lang="en-US" dirty="0" err="1"/>
+              <a:t>Simülasyon</a:t>
+            </a:r>
+            <a:r>
+              <a:rPr lang="en-US" dirty="0"/>
+              <a:t> </a:t>
+            </a:r>
+            <a:r>
+              <a:rPr lang="en-US" dirty="0" err="1"/>
+              <a:t>matrisini</a:t>
+            </a:r>
+            <a:r>
+              <a:rPr lang="en-US" dirty="0"/>
+              <a:t> </a:t>
+            </a:r>
+            <a:r>
+              <a:rPr lang="en-US" dirty="0" err="1"/>
+              <a:t>yükler</a:t>
+            </a:r>
+            <a:r>
+              <a:rPr lang="en-US" dirty="0"/>
+              <a:t> (1350 </a:t>
+            </a:r>
+            <a:r>
+              <a:rPr lang="en-US" dirty="0" err="1"/>
+              <a:t>senaryo</a:t>
+            </a:r>
+            <a:r>
+              <a:rPr lang="en-US" dirty="0"/>
+              <a:t>)</a:t>
+            </a:r>
+          </a:p>
+          <a:p>
+            <a:pPr lvl="1"/>
+            <a:r>
+              <a:rPr lang="en-US" dirty="0"/>
+              <a:t>Her </a:t>
+            </a:r>
+            <a:r>
+              <a:rPr lang="en-US" dirty="0" err="1"/>
+              <a:t>senaryo</a:t>
+            </a:r>
+            <a:r>
+              <a:rPr lang="en-US" dirty="0"/>
+              <a:t> </a:t>
+            </a:r>
+            <a:r>
+              <a:rPr lang="en-US" dirty="0" err="1"/>
+              <a:t>için</a:t>
+            </a:r>
+            <a:r>
+              <a:rPr lang="en-US" dirty="0"/>
+              <a:t> ‘</a:t>
+            </a:r>
+            <a:r>
+              <a:rPr lang="en-US" dirty="0" err="1"/>
+              <a:t>run_single_simulation</a:t>
+            </a:r>
+            <a:r>
+              <a:rPr lang="en-US" dirty="0"/>
+              <a:t>’ </a:t>
+            </a:r>
+            <a:r>
+              <a:rPr lang="en-US" dirty="0" err="1"/>
+              <a:t>fonksiyonunu</a:t>
+            </a:r>
+            <a:r>
+              <a:rPr lang="en-US" dirty="0"/>
+              <a:t> </a:t>
+            </a:r>
+            <a:r>
+              <a:rPr lang="en-US" dirty="0" err="1"/>
+              <a:t>çağırır</a:t>
+            </a:r>
+            <a:endParaRPr lang="en-US" dirty="0"/>
+          </a:p>
+          <a:p>
+            <a:pPr lvl="1"/>
+            <a:r>
+              <a:rPr lang="en-US" dirty="0" err="1"/>
+              <a:t>Denge</a:t>
+            </a:r>
+            <a:r>
+              <a:rPr lang="en-US" dirty="0"/>
+              <a:t>, WGS </a:t>
+            </a:r>
+            <a:r>
+              <a:rPr lang="en-US" dirty="0" err="1"/>
+              <a:t>ve</a:t>
+            </a:r>
+            <a:r>
+              <a:rPr lang="en-US" dirty="0"/>
+              <a:t> </a:t>
+            </a:r>
+            <a:r>
+              <a:rPr lang="en-US" dirty="0" err="1"/>
+              <a:t>ayırma</a:t>
+            </a:r>
+            <a:r>
+              <a:rPr lang="en-US" dirty="0"/>
+              <a:t> </a:t>
+            </a:r>
+            <a:r>
+              <a:rPr lang="en-US" dirty="0" err="1"/>
+              <a:t>süreçlerini</a:t>
+            </a:r>
+            <a:r>
+              <a:rPr lang="en-US" dirty="0"/>
+              <a:t> </a:t>
+            </a:r>
+            <a:r>
+              <a:rPr lang="en-US" dirty="0" err="1"/>
+              <a:t>sırayla</a:t>
+            </a:r>
+            <a:r>
+              <a:rPr lang="en-US" dirty="0"/>
+              <a:t> </a:t>
+            </a:r>
+            <a:r>
+              <a:rPr lang="en-US" dirty="0" err="1"/>
+              <a:t>yürütür</a:t>
+            </a:r>
+            <a:endParaRPr lang="en-US" dirty="0"/>
+          </a:p>
+          <a:p>
+            <a:pPr lvl="1"/>
+            <a:r>
+              <a:rPr lang="en-US" dirty="0" err="1"/>
+              <a:t>Sonuçları</a:t>
+            </a:r>
+            <a:r>
+              <a:rPr lang="en-US" dirty="0"/>
+              <a:t> </a:t>
+            </a:r>
+            <a:r>
+              <a:rPr lang="en-US" dirty="0" err="1"/>
+              <a:t>doğrular</a:t>
+            </a:r>
+            <a:r>
+              <a:rPr lang="en-US" dirty="0"/>
+              <a:t> </a:t>
+            </a:r>
+            <a:r>
+              <a:rPr lang="en-US" dirty="0" err="1"/>
+              <a:t>ve</a:t>
+            </a:r>
+            <a:r>
+              <a:rPr lang="en-US" dirty="0"/>
+              <a:t> SQL </a:t>
+            </a:r>
+            <a:r>
+              <a:rPr lang="en-US" dirty="0" err="1"/>
+              <a:t>veritabanına</a:t>
+            </a:r>
+            <a:r>
+              <a:rPr lang="en-US" dirty="0"/>
+              <a:t> </a:t>
+            </a:r>
+            <a:r>
+              <a:rPr lang="en-US" dirty="0" err="1"/>
+              <a:t>yazar</a:t>
+            </a:r>
+            <a:endParaRPr lang="en-US" dirty="0"/>
+          </a:p>
+        </p:txBody>
+      </p:sp>
+      <p:pic>
+        <p:nvPicPr>
+          <p:cNvPr id="5" name="Resim 4">
+            <a:extLst>
+              <a:ext uri="{FF2B5EF4-FFF2-40B4-BE49-F238E27FC236}">
+                <a16:creationId xmlns:a16="http://schemas.microsoft.com/office/drawing/2014/main" id="{8E484B73-7D0A-F24C-2B66-91CF04F4A79B}"/>
+              </a:ext>
+            </a:extLst>
+          </p:cNvPr>
+          <p:cNvPicPr>
+            <a:picLocks noChangeAspect="1"/>
+          </p:cNvPicPr>
+          <p:nvPr/>
+        </p:nvPicPr>
+        <p:blipFill>
+          <a:blip r:embed="rId2"/>
+          <a:stretch>
+            <a:fillRect/>
+          </a:stretch>
+        </p:blipFill>
+        <p:spPr>
+          <a:xfrm>
+            <a:off x="5760510" y="2367183"/>
+            <a:ext cx="6211167" cy="3467584"/>
+          </a:xfrm>
+          <a:prstGeom prst="rect">
+            <a:avLst/>
+          </a:prstGeom>
+        </p:spPr>
+      </p:pic>
+    </p:spTree>
+    <p:extLst>
+      <p:ext uri="{BB962C8B-B14F-4D97-AF65-F5344CB8AC3E}">
+        <p14:creationId xmlns:p14="http://schemas.microsoft.com/office/powerpoint/2010/main" val="2664831948"/>
+      </p:ext>
+    </p:extLst>
+  </p:cSld>
+  <p:clrMapOvr>
+    <a:masterClrMapping/>
+  </p:clrMapOvr>
+</p:sld>
+</file>
+
 <file path=ppt/slides/slide18.xml><?xml version="1.0" encoding="utf-8"?>
+<p:sld xmlns:a="http://schemas.openxmlformats.org/drawingml/2006/main" xmlns:r="http://schemas.openxmlformats.org/officeDocument/2006/relationships" xmlns:p="http://schemas.openxmlformats.org/presentationml/2006/main">
+  <p:cSld>
+    <p:spTree>
+      <p:nvGrpSpPr>
+        <p:cNvPr id="1" name="">
+          <a:extLst>
+            <a:ext uri="{FF2B5EF4-FFF2-40B4-BE49-F238E27FC236}">
+              <a16:creationId xmlns:a16="http://schemas.microsoft.com/office/drawing/2014/main" id="{A530F991-8E99-ACAB-1A98-0AD7D1F643CE}"/>
+            </a:ext>
+          </a:extLst>
+        </p:cNvPr>
+        <p:cNvGrpSpPr/>
+        <p:nvPr/>
+      </p:nvGrpSpPr>
+      <p:grpSpPr>
+        <a:xfrm>
+          <a:off x="0" y="0"/>
+          <a:ext cx="0" cy="0"/>
+          <a:chOff x="0" y="0"/>
+          <a:chExt cx="0" cy="0"/>
+        </a:xfrm>
+      </p:grpSpPr>
+      <p:sp>
+        <p:nvSpPr>
+          <p:cNvPr id="2" name="Başlık 1">
+            <a:extLst>
+              <a:ext uri="{FF2B5EF4-FFF2-40B4-BE49-F238E27FC236}">
+                <a16:creationId xmlns:a16="http://schemas.microsoft.com/office/drawing/2014/main" id="{D615C76F-D336-F9DE-545A-88E88C731A5F}"/>
+              </a:ext>
+            </a:extLst>
+          </p:cNvPr>
+          <p:cNvSpPr>
+            <a:spLocks noGrp="1"/>
+          </p:cNvSpPr>
+          <p:nvPr>
+            <p:ph type="title"/>
+          </p:nvPr>
+        </p:nvSpPr>
+        <p:spPr/>
+        <p:txBody>
+          <a:bodyPr/>
+          <a:lstStyle/>
+          <a:p>
+            <a:r>
+              <a:rPr lang="en-US" dirty="0" err="1"/>
+              <a:t>Denge</a:t>
+            </a:r>
+            <a:r>
+              <a:rPr lang="en-US" dirty="0"/>
+              <a:t> </a:t>
+            </a:r>
+            <a:r>
+              <a:rPr lang="en-US" dirty="0" err="1"/>
+              <a:t>hesaplayıcı</a:t>
+            </a:r>
+            <a:r>
+              <a:rPr lang="en-US" dirty="0"/>
+              <a:t> (cantera_equilibrium.py)</a:t>
+            </a:r>
+          </a:p>
+        </p:txBody>
+      </p:sp>
+      <p:sp>
+        <p:nvSpPr>
+          <p:cNvPr id="3" name="İçerik Yer Tutucusu 2">
+            <a:extLst>
+              <a:ext uri="{FF2B5EF4-FFF2-40B4-BE49-F238E27FC236}">
+                <a16:creationId xmlns:a16="http://schemas.microsoft.com/office/drawing/2014/main" id="{3AC21E6E-E429-BFE6-9F57-19DD10F14409}"/>
+              </a:ext>
+            </a:extLst>
+          </p:cNvPr>
+          <p:cNvSpPr>
+            <a:spLocks noGrp="1"/>
+          </p:cNvSpPr>
+          <p:nvPr>
+            <p:ph idx="1"/>
+          </p:nvPr>
+        </p:nvSpPr>
+        <p:spPr>
+          <a:xfrm>
+            <a:off x="677334" y="2160589"/>
+            <a:ext cx="4665631" cy="3880773"/>
+          </a:xfrm>
+        </p:spPr>
+        <p:txBody>
+          <a:bodyPr/>
+          <a:lstStyle/>
+          <a:p>
+            <a:r>
+              <a:rPr lang="en-US" dirty="0"/>
+              <a:t>Gibbs </a:t>
+            </a:r>
+            <a:r>
+              <a:rPr lang="en-US" dirty="0" err="1"/>
+              <a:t>serbest</a:t>
+            </a:r>
+            <a:r>
+              <a:rPr lang="en-US" dirty="0"/>
+              <a:t> </a:t>
+            </a:r>
+            <a:r>
+              <a:rPr lang="en-US" dirty="0" err="1"/>
+              <a:t>enerji</a:t>
+            </a:r>
+            <a:r>
+              <a:rPr lang="en-US" dirty="0"/>
+              <a:t> </a:t>
+            </a:r>
+            <a:r>
+              <a:rPr lang="en-US" dirty="0" err="1"/>
+              <a:t>minimizasyonu</a:t>
+            </a:r>
+            <a:r>
+              <a:rPr lang="en-US" dirty="0"/>
+              <a:t> </a:t>
+            </a:r>
+            <a:r>
+              <a:rPr lang="en-US" dirty="0" err="1"/>
+              <a:t>kullanarak</a:t>
+            </a:r>
+            <a:r>
+              <a:rPr lang="en-US" dirty="0"/>
+              <a:t> </a:t>
+            </a:r>
+            <a:r>
+              <a:rPr lang="en-US" dirty="0" err="1"/>
+              <a:t>kimyasal</a:t>
+            </a:r>
+            <a:r>
+              <a:rPr lang="en-US" dirty="0"/>
+              <a:t> </a:t>
+            </a:r>
+            <a:r>
+              <a:rPr lang="en-US" dirty="0" err="1"/>
+              <a:t>dengeyi</a:t>
+            </a:r>
+            <a:r>
+              <a:rPr lang="en-US" dirty="0"/>
+              <a:t> </a:t>
+            </a:r>
+            <a:r>
+              <a:rPr lang="en-US" dirty="0" err="1"/>
+              <a:t>hesaplar</a:t>
+            </a:r>
+            <a:endParaRPr lang="en-US" dirty="0"/>
+          </a:p>
+          <a:p>
+            <a:pPr lvl="1"/>
+            <a:r>
+              <a:rPr lang="en-US" dirty="0"/>
+              <a:t>GRI-Mech 3.0 </a:t>
+            </a:r>
+            <a:r>
+              <a:rPr lang="en-US" dirty="0" err="1"/>
+              <a:t>mekanizmasını</a:t>
+            </a:r>
+            <a:r>
+              <a:rPr lang="en-US" dirty="0"/>
+              <a:t> </a:t>
+            </a:r>
+            <a:r>
+              <a:rPr lang="en-US" dirty="0" err="1"/>
+              <a:t>kullanır</a:t>
+            </a:r>
+            <a:endParaRPr lang="en-US" dirty="0"/>
+          </a:p>
+          <a:p>
+            <a:pPr lvl="1"/>
+            <a:r>
+              <a:rPr lang="en-US" dirty="0"/>
+              <a:t>Newton-Raphson </a:t>
+            </a:r>
+            <a:r>
+              <a:rPr lang="en-US" dirty="0" err="1"/>
+              <a:t>yöntemi</a:t>
+            </a:r>
+            <a:r>
+              <a:rPr lang="en-US" dirty="0"/>
+              <a:t> </a:t>
+            </a:r>
+            <a:r>
+              <a:rPr lang="en-US" dirty="0" err="1"/>
+              <a:t>ile</a:t>
+            </a:r>
+            <a:r>
+              <a:rPr lang="en-US" dirty="0"/>
+              <a:t> Gibbs </a:t>
+            </a:r>
+            <a:r>
+              <a:rPr lang="en-US" dirty="0" err="1"/>
+              <a:t>enerjisini</a:t>
+            </a:r>
+            <a:r>
+              <a:rPr lang="en-US" dirty="0"/>
+              <a:t> minimize </a:t>
+            </a:r>
+            <a:r>
+              <a:rPr lang="en-US" dirty="0" err="1"/>
+              <a:t>eder</a:t>
+            </a:r>
+            <a:endParaRPr lang="en-US" dirty="0"/>
+          </a:p>
+          <a:p>
+            <a:pPr lvl="1"/>
+            <a:r>
+              <a:rPr lang="en-US" dirty="0" err="1"/>
+              <a:t>Entalpi</a:t>
+            </a:r>
+            <a:r>
+              <a:rPr lang="en-US" dirty="0"/>
+              <a:t>, </a:t>
+            </a:r>
+            <a:r>
+              <a:rPr lang="en-US" dirty="0" err="1"/>
+              <a:t>entropi</a:t>
+            </a:r>
+            <a:r>
+              <a:rPr lang="en-US" dirty="0"/>
+              <a:t> </a:t>
+            </a:r>
+            <a:r>
+              <a:rPr lang="en-US" dirty="0" err="1"/>
+              <a:t>ve</a:t>
+            </a:r>
+            <a:r>
+              <a:rPr lang="en-US" dirty="0"/>
+              <a:t> </a:t>
+            </a:r>
+            <a:r>
+              <a:rPr lang="en-US" dirty="0" err="1"/>
+              <a:t>yoğunluk</a:t>
+            </a:r>
+            <a:r>
+              <a:rPr lang="en-US" dirty="0"/>
+              <a:t> </a:t>
+            </a:r>
+            <a:r>
+              <a:rPr lang="en-US" dirty="0" err="1"/>
+              <a:t>gibi</a:t>
+            </a:r>
+            <a:r>
+              <a:rPr lang="en-US" dirty="0"/>
+              <a:t> </a:t>
+            </a:r>
+            <a:r>
+              <a:rPr lang="en-US" dirty="0" err="1"/>
+              <a:t>özellikleri</a:t>
+            </a:r>
+            <a:r>
+              <a:rPr lang="en-US" dirty="0"/>
+              <a:t> </a:t>
+            </a:r>
+            <a:r>
+              <a:rPr lang="en-US" dirty="0" err="1"/>
+              <a:t>döndürür</a:t>
+            </a:r>
+            <a:endParaRPr lang="en-US" dirty="0"/>
+          </a:p>
+        </p:txBody>
+      </p:sp>
+      <p:pic>
+        <p:nvPicPr>
+          <p:cNvPr id="5" name="Resim 4">
+            <a:extLst>
+              <a:ext uri="{FF2B5EF4-FFF2-40B4-BE49-F238E27FC236}">
+                <a16:creationId xmlns:a16="http://schemas.microsoft.com/office/drawing/2014/main" id="{9381F7AC-46C8-3EB7-89BD-1B457577C56F}"/>
+              </a:ext>
+            </a:extLst>
+          </p:cNvPr>
+          <p:cNvPicPr>
+            <a:picLocks noChangeAspect="1"/>
+          </p:cNvPicPr>
+          <p:nvPr/>
+        </p:nvPicPr>
+        <p:blipFill>
+          <a:blip r:embed="rId2"/>
+          <a:stretch>
+            <a:fillRect/>
+          </a:stretch>
+        </p:blipFill>
+        <p:spPr>
+          <a:xfrm>
+            <a:off x="5629182" y="2444042"/>
+            <a:ext cx="5344271" cy="3458058"/>
+          </a:xfrm>
+          <a:prstGeom prst="rect">
+            <a:avLst/>
+          </a:prstGeom>
+        </p:spPr>
+      </p:pic>
+    </p:spTree>
+    <p:extLst>
+      <p:ext uri="{BB962C8B-B14F-4D97-AF65-F5344CB8AC3E}">
+        <p14:creationId xmlns:p14="http://schemas.microsoft.com/office/powerpoint/2010/main" val="2683922161"/>
+      </p:ext>
+    </p:extLst>
+  </p:cSld>
+  <p:clrMapOvr>
+    <a:masterClrMapping/>
+  </p:clrMapOvr>
+</p:sld>
+</file>
+
+<file path=ppt/slides/slide19.xml><?xml version="1.0" encoding="utf-8"?>
+<p:sld xmlns:a="http://schemas.openxmlformats.org/drawingml/2006/main" xmlns:r="http://schemas.openxmlformats.org/officeDocument/2006/relationships" xmlns:p="http://schemas.openxmlformats.org/presentationml/2006/main">
+  <p:cSld>
+    <p:spTree>
+      <p:nvGrpSpPr>
+        <p:cNvPr id="1" name="">
+          <a:extLst>
+            <a:ext uri="{FF2B5EF4-FFF2-40B4-BE49-F238E27FC236}">
+              <a16:creationId xmlns:a16="http://schemas.microsoft.com/office/drawing/2014/main" id="{1F2DA3DB-551E-0F0B-4D11-BB6C35F9B92F}"/>
+            </a:ext>
+          </a:extLst>
+        </p:cNvPr>
+        <p:cNvGrpSpPr/>
+        <p:nvPr/>
+      </p:nvGrpSpPr>
+      <p:grpSpPr>
+        <a:xfrm>
+          <a:off x="0" y="0"/>
+          <a:ext cx="0" cy="0"/>
+          <a:chOff x="0" y="0"/>
+          <a:chExt cx="0" cy="0"/>
+        </a:xfrm>
+      </p:grpSpPr>
+      <p:sp>
+        <p:nvSpPr>
+          <p:cNvPr id="2" name="Başlık 1">
+            <a:extLst>
+              <a:ext uri="{FF2B5EF4-FFF2-40B4-BE49-F238E27FC236}">
+                <a16:creationId xmlns:a16="http://schemas.microsoft.com/office/drawing/2014/main" id="{E4827195-FC86-3E0F-5C49-6C616294B146}"/>
+              </a:ext>
+            </a:extLst>
+          </p:cNvPr>
+          <p:cNvSpPr>
+            <a:spLocks noGrp="1"/>
+          </p:cNvSpPr>
+          <p:nvPr>
+            <p:ph type="title"/>
+          </p:nvPr>
+        </p:nvSpPr>
+        <p:spPr/>
+        <p:txBody>
+          <a:bodyPr/>
+          <a:lstStyle/>
+          <a:p>
+            <a:r>
+              <a:rPr lang="en-US" dirty="0"/>
+              <a:t>Veri </a:t>
+            </a:r>
+            <a:r>
+              <a:rPr lang="en-US" dirty="0" err="1"/>
+              <a:t>yükleme</a:t>
+            </a:r>
+            <a:r>
+              <a:rPr lang="en-US" dirty="0"/>
+              <a:t> (data_loader.py)</a:t>
+            </a:r>
+          </a:p>
+        </p:txBody>
+      </p:sp>
+      <p:sp>
+        <p:nvSpPr>
+          <p:cNvPr id="3" name="İçerik Yer Tutucusu 2">
+            <a:extLst>
+              <a:ext uri="{FF2B5EF4-FFF2-40B4-BE49-F238E27FC236}">
+                <a16:creationId xmlns:a16="http://schemas.microsoft.com/office/drawing/2014/main" id="{2748919D-A8D0-B387-7508-FF1510F4C008}"/>
+              </a:ext>
+            </a:extLst>
+          </p:cNvPr>
+          <p:cNvSpPr>
+            <a:spLocks noGrp="1"/>
+          </p:cNvSpPr>
+          <p:nvPr>
+            <p:ph idx="1"/>
+          </p:nvPr>
+        </p:nvSpPr>
+        <p:spPr>
+          <a:xfrm>
+            <a:off x="677334" y="2160589"/>
+            <a:ext cx="4665631" cy="3880773"/>
+          </a:xfrm>
+        </p:spPr>
+        <p:txBody>
+          <a:bodyPr/>
+          <a:lstStyle/>
+          <a:p>
+            <a:r>
+              <a:rPr lang="en-US" dirty="0" err="1"/>
+              <a:t>Veritabanından</a:t>
+            </a:r>
+            <a:r>
+              <a:rPr lang="en-US" dirty="0"/>
+              <a:t> </a:t>
+            </a:r>
+            <a:r>
+              <a:rPr lang="en-US" dirty="0" err="1"/>
+              <a:t>simülasyon</a:t>
+            </a:r>
+            <a:r>
+              <a:rPr lang="en-US" dirty="0"/>
+              <a:t> </a:t>
+            </a:r>
+            <a:r>
+              <a:rPr lang="en-US" dirty="0" err="1"/>
+              <a:t>sonuçlarını</a:t>
+            </a:r>
+            <a:r>
+              <a:rPr lang="en-US" dirty="0"/>
+              <a:t> </a:t>
+            </a:r>
+            <a:r>
+              <a:rPr lang="en-US" dirty="0" err="1"/>
+              <a:t>çeker</a:t>
+            </a:r>
+            <a:r>
+              <a:rPr lang="en-US" dirty="0"/>
+              <a:t> </a:t>
+            </a:r>
+            <a:r>
+              <a:rPr lang="en-US" dirty="0" err="1"/>
+              <a:t>ve</a:t>
+            </a:r>
+            <a:r>
+              <a:rPr lang="en-US" dirty="0"/>
+              <a:t> </a:t>
+            </a:r>
+            <a:r>
+              <a:rPr lang="en-US" dirty="0" err="1"/>
+              <a:t>temizler</a:t>
+            </a:r>
+            <a:endParaRPr lang="en-US" dirty="0"/>
+          </a:p>
+          <a:p>
+            <a:pPr lvl="1"/>
+            <a:r>
+              <a:rPr lang="en-US" dirty="0" err="1"/>
+              <a:t>Girişler</a:t>
+            </a:r>
+            <a:r>
+              <a:rPr lang="en-US" dirty="0"/>
+              <a:t>: Proses </a:t>
+            </a:r>
+            <a:r>
+              <a:rPr lang="en-US" dirty="0" err="1"/>
+              <a:t>koşulları</a:t>
+            </a:r>
+            <a:r>
+              <a:rPr lang="en-US" dirty="0"/>
+              <a:t> + </a:t>
+            </a:r>
+            <a:r>
+              <a:rPr lang="en-US" dirty="0" err="1"/>
+              <a:t>Singaz</a:t>
+            </a:r>
+            <a:r>
+              <a:rPr lang="en-US" dirty="0"/>
+              <a:t> </a:t>
+            </a:r>
+            <a:r>
+              <a:rPr lang="en-US" dirty="0" err="1"/>
+              <a:t>kompozisyonu</a:t>
+            </a:r>
+            <a:endParaRPr lang="en-US" dirty="0"/>
+          </a:p>
+          <a:p>
+            <a:pPr lvl="1"/>
+            <a:r>
+              <a:rPr lang="en-US" dirty="0" err="1"/>
+              <a:t>Hedefler</a:t>
+            </a:r>
+            <a:r>
+              <a:rPr lang="en-US" dirty="0"/>
+              <a:t>: 6 </a:t>
+            </a:r>
+            <a:r>
+              <a:rPr lang="en-US" dirty="0" err="1"/>
+              <a:t>adet</a:t>
+            </a:r>
+            <a:r>
+              <a:rPr lang="en-US" dirty="0"/>
+              <a:t> </a:t>
+            </a:r>
+            <a:r>
+              <a:rPr lang="en-US" dirty="0" err="1"/>
+              <a:t>biyo-yağ</a:t>
+            </a:r>
+            <a:r>
+              <a:rPr lang="en-US" dirty="0"/>
+              <a:t> </a:t>
+            </a:r>
+            <a:r>
+              <a:rPr lang="en-US" dirty="0" err="1"/>
+              <a:t>bileşeni</a:t>
+            </a:r>
+            <a:r>
+              <a:rPr lang="en-US" dirty="0"/>
+              <a:t> </a:t>
+            </a:r>
+            <a:r>
+              <a:rPr lang="en-US" dirty="0" err="1"/>
+              <a:t>yüzdesi</a:t>
+            </a:r>
+            <a:endParaRPr lang="en-US" dirty="0"/>
+          </a:p>
+          <a:p>
+            <a:pPr lvl="1"/>
+            <a:r>
+              <a:rPr lang="en-US" dirty="0" err="1"/>
+              <a:t>Eksik</a:t>
+            </a:r>
+            <a:r>
+              <a:rPr lang="en-US" dirty="0"/>
+              <a:t> </a:t>
+            </a:r>
+            <a:r>
+              <a:rPr lang="en-US" dirty="0" err="1"/>
+              <a:t>verileri</a:t>
+            </a:r>
+            <a:r>
+              <a:rPr lang="en-US" dirty="0"/>
+              <a:t> </a:t>
+            </a:r>
+            <a:r>
+              <a:rPr lang="en-US" dirty="0" err="1"/>
+              <a:t>temizler</a:t>
+            </a:r>
+            <a:r>
+              <a:rPr lang="en-US" dirty="0"/>
+              <a:t> </a:t>
+            </a:r>
+            <a:r>
+              <a:rPr lang="en-US" dirty="0" err="1"/>
+              <a:t>ve</a:t>
+            </a:r>
+            <a:r>
+              <a:rPr lang="en-US" dirty="0"/>
+              <a:t> </a:t>
+            </a:r>
+            <a:r>
+              <a:rPr lang="en-US" dirty="0" err="1"/>
+              <a:t>kompozisyon</a:t>
+            </a:r>
+            <a:r>
+              <a:rPr lang="en-US" dirty="0"/>
+              <a:t> </a:t>
+            </a:r>
+            <a:r>
+              <a:rPr lang="en-US" dirty="0" err="1"/>
+              <a:t>toplamlarını</a:t>
+            </a:r>
+            <a:r>
+              <a:rPr lang="en-US" dirty="0"/>
+              <a:t> </a:t>
+            </a:r>
+            <a:r>
+              <a:rPr lang="en-US" dirty="0" err="1"/>
+              <a:t>doğrular</a:t>
+            </a:r>
+            <a:endParaRPr lang="en-US" dirty="0"/>
+          </a:p>
+        </p:txBody>
+      </p:sp>
+      <p:pic>
+        <p:nvPicPr>
+          <p:cNvPr id="5" name="Resim 4">
+            <a:extLst>
+              <a:ext uri="{FF2B5EF4-FFF2-40B4-BE49-F238E27FC236}">
+                <a16:creationId xmlns:a16="http://schemas.microsoft.com/office/drawing/2014/main" id="{2261BA2B-1656-9A36-0811-AAB3EC5E1093}"/>
+              </a:ext>
+            </a:extLst>
+          </p:cNvPr>
+          <p:cNvPicPr>
+            <a:picLocks noChangeAspect="1"/>
+          </p:cNvPicPr>
+          <p:nvPr/>
+        </p:nvPicPr>
+        <p:blipFill>
+          <a:blip r:embed="rId2"/>
+          <a:stretch>
+            <a:fillRect/>
+          </a:stretch>
+        </p:blipFill>
+        <p:spPr>
+          <a:xfrm>
+            <a:off x="5634194" y="2710131"/>
+            <a:ext cx="5782482" cy="2781688"/>
+          </a:xfrm>
+          <a:prstGeom prst="rect">
+            <a:avLst/>
+          </a:prstGeom>
+        </p:spPr>
+      </p:pic>
+    </p:spTree>
+    <p:extLst>
+      <p:ext uri="{BB962C8B-B14F-4D97-AF65-F5344CB8AC3E}">
+        <p14:creationId xmlns:p14="http://schemas.microsoft.com/office/powerpoint/2010/main" val="2081598849"/>
+      </p:ext>
+    </p:extLst>
+  </p:cSld>
+  <p:clrMapOvr>
+    <a:masterClrMapping/>
+  </p:clrMapOvr>
+</p:sld>
+</file>
+
+<file path=ppt/slides/slide2.xml><?xml version="1.0" encoding="utf-8"?>
+<p:sld xmlns:a="http://schemas.openxmlformats.org/drawingml/2006/main" xmlns:r="http://schemas.openxmlformats.org/officeDocument/2006/relationships" xmlns:p="http://schemas.openxmlformats.org/presentationml/2006/main">
+  <p:cSld>
+    <p:spTree>
+      <p:nvGrpSpPr>
+        <p:cNvPr id="1" name="">
+          <a:extLst>
+            <a:ext uri="{FF2B5EF4-FFF2-40B4-BE49-F238E27FC236}">
+              <a16:creationId xmlns:a16="http://schemas.microsoft.com/office/drawing/2014/main" id="{33AA0CB0-F31B-F127-3659-7960E1FE20F6}"/>
+            </a:ext>
+          </a:extLst>
+        </p:cNvPr>
+        <p:cNvGrpSpPr/>
+        <p:nvPr/>
+      </p:nvGrpSpPr>
+      <p:grpSpPr>
+        <a:xfrm>
+          <a:off x="0" y="0"/>
+          <a:ext cx="0" cy="0"/>
+          <a:chOff x="0" y="0"/>
+          <a:chExt cx="0" cy="0"/>
+        </a:xfrm>
+      </p:grpSpPr>
+      <p:sp>
+        <p:nvSpPr>
+          <p:cNvPr id="2" name="Title 1">
+            <a:extLst>
+              <a:ext uri="{FF2B5EF4-FFF2-40B4-BE49-F238E27FC236}">
+                <a16:creationId xmlns:a16="http://schemas.microsoft.com/office/drawing/2014/main" id="{198854F4-E224-1FF5-0E6C-675A1C453031}"/>
+              </a:ext>
+            </a:extLst>
+          </p:cNvPr>
+          <p:cNvSpPr>
+            <a:spLocks noGrp="1"/>
+          </p:cNvSpPr>
+          <p:nvPr>
+            <p:ph type="title"/>
+          </p:nvPr>
+        </p:nvSpPr>
+        <p:spPr>
+          <a:xfrm>
+            <a:off x="677333" y="609600"/>
+            <a:ext cx="9694832" cy="1320800"/>
+          </a:xfrm>
+        </p:spPr>
+        <p:txBody>
+          <a:bodyPr/>
+          <a:lstStyle/>
+          <a:p>
+            <a:r>
+              <a:rPr lang="en-US" dirty="0" err="1"/>
+              <a:t>Tezin</a:t>
+            </a:r>
+            <a:r>
+              <a:rPr lang="en-US" dirty="0"/>
+              <a:t> </a:t>
+            </a:r>
+            <a:r>
+              <a:rPr lang="en-US" dirty="0" err="1"/>
+              <a:t>amacı</a:t>
+            </a:r>
+            <a:endParaRPr lang="en-US" dirty="0"/>
+          </a:p>
+        </p:txBody>
+      </p:sp>
+      <p:sp>
+        <p:nvSpPr>
+          <p:cNvPr id="3" name="Content Placeholder 2">
+            <a:extLst>
+              <a:ext uri="{FF2B5EF4-FFF2-40B4-BE49-F238E27FC236}">
+                <a16:creationId xmlns:a16="http://schemas.microsoft.com/office/drawing/2014/main" id="{17DDAEDE-3349-3791-2191-2F72762DF5CE}"/>
+              </a:ext>
+            </a:extLst>
+          </p:cNvPr>
+          <p:cNvSpPr>
+            <a:spLocks noGrp="1"/>
+          </p:cNvSpPr>
+          <p:nvPr>
+            <p:ph idx="1"/>
+          </p:nvPr>
+        </p:nvSpPr>
+        <p:spPr>
+          <a:xfrm>
+            <a:off x="677334" y="1676399"/>
+            <a:ext cx="8596668" cy="5072131"/>
+          </a:xfrm>
+        </p:spPr>
+        <p:txBody>
+          <a:bodyPr>
+            <a:normAutofit/>
+          </a:bodyPr>
+          <a:lstStyle/>
+          <a:p>
+            <a:pPr>
+              <a:lnSpc>
+                <a:spcPct val="150000"/>
+              </a:lnSpc>
+            </a:pPr>
+            <a:r>
+              <a:rPr lang="en-US" dirty="0" err="1"/>
+              <a:t>Biyoktüleden</a:t>
+            </a:r>
+            <a:r>
+              <a:rPr lang="en-US" dirty="0"/>
+              <a:t> </a:t>
+            </a:r>
+            <a:r>
+              <a:rPr lang="en-US" dirty="0" err="1"/>
+              <a:t>elde</a:t>
+            </a:r>
+            <a:r>
+              <a:rPr lang="en-US" dirty="0"/>
+              <a:t> </a:t>
+            </a:r>
+            <a:r>
+              <a:rPr lang="en-US" dirty="0" err="1"/>
+              <a:t>edilen</a:t>
+            </a:r>
+            <a:r>
+              <a:rPr lang="en-US" dirty="0"/>
+              <a:t> (</a:t>
+            </a:r>
+            <a:r>
+              <a:rPr lang="en-US" dirty="0" err="1"/>
+              <a:t>piroliz</a:t>
+            </a:r>
+            <a:r>
+              <a:rPr lang="en-US" dirty="0"/>
+              <a:t>) </a:t>
+            </a:r>
+            <a:r>
+              <a:rPr lang="en-US" dirty="0" err="1"/>
+              <a:t>biyoyağın</a:t>
+            </a:r>
+            <a:r>
+              <a:rPr lang="en-US" dirty="0"/>
+              <a:t> </a:t>
+            </a:r>
+            <a:r>
+              <a:rPr lang="en-US" dirty="0" err="1"/>
+              <a:t>değerlendirildiği</a:t>
+            </a:r>
+            <a:r>
+              <a:rPr lang="en-US" dirty="0"/>
+              <a:t> proses </a:t>
+            </a:r>
+            <a:r>
+              <a:rPr lang="en-US" dirty="0" err="1"/>
+              <a:t>parametrelerinin</a:t>
+            </a:r>
+            <a:r>
+              <a:rPr lang="en-US" dirty="0"/>
+              <a:t> </a:t>
+            </a:r>
+            <a:r>
+              <a:rPr lang="en-US" dirty="0" err="1"/>
+              <a:t>belirlenmesine</a:t>
+            </a:r>
+            <a:r>
+              <a:rPr lang="en-US" dirty="0"/>
+              <a:t> </a:t>
+            </a:r>
+            <a:r>
+              <a:rPr lang="en-US" dirty="0" err="1"/>
+              <a:t>yardımcı</a:t>
+            </a:r>
+            <a:r>
+              <a:rPr lang="en-US" dirty="0"/>
+              <a:t> </a:t>
+            </a:r>
+            <a:r>
+              <a:rPr lang="en-US" dirty="0" err="1"/>
+              <a:t>olacak</a:t>
+            </a:r>
+            <a:r>
+              <a:rPr lang="en-US" dirty="0"/>
+              <a:t> </a:t>
+            </a:r>
+            <a:r>
+              <a:rPr lang="en-US" dirty="0" err="1"/>
+              <a:t>bir</a:t>
+            </a:r>
+            <a:r>
+              <a:rPr lang="en-US" dirty="0"/>
+              <a:t> model </a:t>
+            </a:r>
+            <a:r>
+              <a:rPr lang="en-US" dirty="0" err="1"/>
+              <a:t>öngörülü</a:t>
+            </a:r>
+            <a:r>
+              <a:rPr lang="en-US" dirty="0"/>
+              <a:t> </a:t>
+            </a:r>
+            <a:r>
+              <a:rPr lang="en-US" dirty="0" err="1"/>
+              <a:t>kontrol</a:t>
+            </a:r>
+            <a:r>
+              <a:rPr lang="en-US" dirty="0"/>
+              <a:t> (MÖK) </a:t>
+            </a:r>
+            <a:r>
+              <a:rPr lang="en-US" dirty="0" err="1"/>
+              <a:t>senaryosu</a:t>
+            </a:r>
+            <a:r>
+              <a:rPr lang="en-US" dirty="0"/>
+              <a:t> </a:t>
+            </a:r>
+            <a:r>
+              <a:rPr lang="en-US" dirty="0" err="1"/>
+              <a:t>geliştirmektir</a:t>
+            </a:r>
+            <a:r>
+              <a:rPr lang="en-US" dirty="0"/>
+              <a:t>.</a:t>
+            </a:r>
+          </a:p>
+          <a:p>
+            <a:pPr>
+              <a:lnSpc>
+                <a:spcPct val="150000"/>
+              </a:lnSpc>
+            </a:pPr>
+            <a:r>
+              <a:rPr lang="en-US" dirty="0" err="1"/>
+              <a:t>Biyoyağın</a:t>
+            </a:r>
+            <a:r>
+              <a:rPr lang="en-US" dirty="0"/>
+              <a:t> </a:t>
+            </a:r>
+            <a:r>
+              <a:rPr lang="en-US" dirty="0" err="1"/>
+              <a:t>işlenmesi</a:t>
+            </a:r>
+            <a:r>
+              <a:rPr lang="en-US" dirty="0"/>
+              <a:t> </a:t>
+            </a:r>
+            <a:r>
+              <a:rPr lang="en-US" dirty="0" err="1"/>
+              <a:t>sonucu</a:t>
+            </a:r>
+            <a:r>
+              <a:rPr lang="en-US" dirty="0"/>
+              <a:t> </a:t>
+            </a:r>
+            <a:r>
+              <a:rPr lang="en-US" dirty="0" err="1"/>
+              <a:t>oluşan</a:t>
+            </a:r>
+            <a:r>
+              <a:rPr lang="en-US" dirty="0"/>
+              <a:t> </a:t>
+            </a:r>
+            <a:r>
+              <a:rPr lang="en-US" dirty="0" err="1"/>
+              <a:t>ürünün</a:t>
+            </a:r>
+            <a:r>
+              <a:rPr lang="en-US" dirty="0"/>
+              <a:t> </a:t>
+            </a:r>
+            <a:r>
+              <a:rPr lang="en-US" dirty="0" err="1"/>
+              <a:t>özelliklerin</a:t>
+            </a:r>
+            <a:r>
+              <a:rPr lang="en-US" dirty="0"/>
+              <a:t> </a:t>
+            </a:r>
+            <a:r>
+              <a:rPr lang="en-US" dirty="0" err="1"/>
+              <a:t>bakarak</a:t>
+            </a:r>
+            <a:r>
+              <a:rPr lang="en-US" dirty="0"/>
+              <a:t>, </a:t>
+            </a:r>
+            <a:r>
+              <a:rPr lang="en-US" dirty="0" err="1"/>
+              <a:t>girişte</a:t>
+            </a:r>
+            <a:r>
+              <a:rPr lang="en-US" dirty="0"/>
+              <a:t> </a:t>
+            </a:r>
+            <a:r>
+              <a:rPr lang="en-US" dirty="0" err="1"/>
+              <a:t>kullanılan</a:t>
+            </a:r>
+            <a:r>
+              <a:rPr lang="en-US" dirty="0"/>
+              <a:t> </a:t>
+            </a:r>
+            <a:r>
+              <a:rPr lang="en-US" dirty="0" err="1"/>
+              <a:t>biyoyağın</a:t>
+            </a:r>
+            <a:r>
+              <a:rPr lang="en-US" dirty="0"/>
+              <a:t> </a:t>
+            </a:r>
+            <a:r>
+              <a:rPr lang="en-US" dirty="0" err="1"/>
+              <a:t>içeriğini</a:t>
+            </a:r>
+            <a:r>
+              <a:rPr lang="en-US" dirty="0"/>
+              <a:t> </a:t>
+            </a:r>
+            <a:r>
+              <a:rPr lang="en-US" dirty="0" err="1"/>
+              <a:t>tahmin</a:t>
+            </a:r>
+            <a:r>
+              <a:rPr lang="en-US" dirty="0"/>
+              <a:t> </a:t>
+            </a:r>
+            <a:r>
+              <a:rPr lang="en-US" dirty="0" err="1"/>
+              <a:t>edebilen</a:t>
+            </a:r>
+            <a:r>
+              <a:rPr lang="en-US" dirty="0"/>
+              <a:t> </a:t>
+            </a:r>
+            <a:r>
+              <a:rPr lang="en-US" dirty="0" err="1"/>
+              <a:t>bir</a:t>
+            </a:r>
+            <a:r>
+              <a:rPr lang="en-US" dirty="0"/>
+              <a:t> </a:t>
+            </a:r>
+            <a:r>
+              <a:rPr lang="en-US" dirty="0" err="1"/>
+              <a:t>yapayzeka</a:t>
+            </a:r>
+            <a:r>
+              <a:rPr lang="en-US" dirty="0"/>
+              <a:t> </a:t>
+            </a:r>
+            <a:r>
+              <a:rPr lang="en-US" dirty="0" err="1"/>
+              <a:t>modeli</a:t>
+            </a:r>
+            <a:endParaRPr lang="en-US" dirty="0"/>
+          </a:p>
+          <a:p>
+            <a:pPr>
+              <a:lnSpc>
+                <a:spcPct val="150000"/>
+              </a:lnSpc>
+            </a:pPr>
+            <a:r>
+              <a:rPr lang="en-US" dirty="0" err="1"/>
+              <a:t>Piroliz</a:t>
+            </a:r>
+            <a:r>
+              <a:rPr lang="en-US" dirty="0"/>
+              <a:t> </a:t>
+            </a:r>
+            <a:r>
+              <a:rPr lang="en-US" dirty="0" err="1"/>
+              <a:t>biyoyağı</a:t>
+            </a:r>
+            <a:r>
+              <a:rPr lang="en-US" dirty="0"/>
+              <a:t> – proses </a:t>
+            </a:r>
+            <a:r>
+              <a:rPr lang="en-US" dirty="0" err="1"/>
+              <a:t>koşulları</a:t>
+            </a:r>
+            <a:r>
+              <a:rPr lang="en-US" dirty="0"/>
+              <a:t> – son </a:t>
+            </a:r>
+            <a:r>
+              <a:rPr lang="en-US" dirty="0" err="1"/>
+              <a:t>ürün</a:t>
+            </a:r>
+            <a:r>
+              <a:rPr lang="en-US" dirty="0"/>
+              <a:t> </a:t>
+            </a:r>
+            <a:r>
+              <a:rPr lang="en-US" dirty="0" err="1"/>
+              <a:t>verisi</a:t>
+            </a:r>
+            <a:endParaRPr lang="en-US" dirty="0"/>
+          </a:p>
+          <a:p>
+            <a:pPr lvl="1">
+              <a:lnSpc>
+                <a:spcPct val="150000"/>
+              </a:lnSpc>
+            </a:pPr>
+            <a:r>
+              <a:rPr lang="en-US" dirty="0" err="1"/>
+              <a:t>Simülasyon</a:t>
+            </a:r>
+            <a:endParaRPr lang="en-US" dirty="0"/>
+          </a:p>
+          <a:p>
+            <a:pPr>
+              <a:lnSpc>
+                <a:spcPct val="150000"/>
+              </a:lnSpc>
+            </a:pPr>
+            <a:r>
+              <a:rPr lang="en-US" dirty="0" err="1"/>
+              <a:t>Piroliz</a:t>
+            </a:r>
+            <a:r>
+              <a:rPr lang="en-US" dirty="0"/>
+              <a:t> </a:t>
+            </a:r>
+            <a:r>
+              <a:rPr lang="en-US" dirty="0" err="1"/>
+              <a:t>biyoyağı</a:t>
+            </a:r>
+            <a:r>
+              <a:rPr lang="en-US" dirty="0"/>
+              <a:t> </a:t>
+            </a:r>
+            <a:r>
+              <a:rPr lang="en-US" dirty="0" err="1"/>
+              <a:t>verisi</a:t>
+            </a:r>
+            <a:endParaRPr lang="en-US" dirty="0"/>
+          </a:p>
+          <a:p>
+            <a:pPr lvl="1">
+              <a:lnSpc>
+                <a:spcPct val="150000"/>
+              </a:lnSpc>
+            </a:pPr>
+            <a:r>
+              <a:rPr lang="en-US" dirty="0" err="1"/>
+              <a:t>Literatür</a:t>
+            </a:r>
+            <a:endParaRPr lang="en-US" dirty="0"/>
+          </a:p>
+        </p:txBody>
+      </p:sp>
+    </p:spTree>
+    <p:extLst>
+      <p:ext uri="{BB962C8B-B14F-4D97-AF65-F5344CB8AC3E}">
+        <p14:creationId xmlns:p14="http://schemas.microsoft.com/office/powerpoint/2010/main" val="3170775359"/>
+      </p:ext>
+    </p:extLst>
+  </p:cSld>
+  <p:clrMapOvr>
+    <a:masterClrMapping/>
+  </p:clrMapOvr>
+</p:sld>
+</file>
+
+<file path=ppt/slides/slide20.xml><?xml version="1.0" encoding="utf-8"?>
+<p:sld xmlns:a="http://schemas.openxmlformats.org/drawingml/2006/main" xmlns:r="http://schemas.openxmlformats.org/officeDocument/2006/relationships" xmlns:p="http://schemas.openxmlformats.org/presentationml/2006/main">
+  <p:cSld>
+    <p:spTree>
+      <p:nvGrpSpPr>
+        <p:cNvPr id="1" name="">
+          <a:extLst>
+            <a:ext uri="{FF2B5EF4-FFF2-40B4-BE49-F238E27FC236}">
+              <a16:creationId xmlns:a16="http://schemas.microsoft.com/office/drawing/2014/main" id="{D7436AB0-E370-DBDD-1E4C-FD667CFC9B4B}"/>
+            </a:ext>
+          </a:extLst>
+        </p:cNvPr>
+        <p:cNvGrpSpPr/>
+        <p:nvPr/>
+      </p:nvGrpSpPr>
+      <p:grpSpPr>
+        <a:xfrm>
+          <a:off x="0" y="0"/>
+          <a:ext cx="0" cy="0"/>
+          <a:chOff x="0" y="0"/>
+          <a:chExt cx="0" cy="0"/>
+        </a:xfrm>
+      </p:grpSpPr>
+      <p:sp>
+        <p:nvSpPr>
+          <p:cNvPr id="2" name="Başlık 1">
+            <a:extLst>
+              <a:ext uri="{FF2B5EF4-FFF2-40B4-BE49-F238E27FC236}">
+                <a16:creationId xmlns:a16="http://schemas.microsoft.com/office/drawing/2014/main" id="{7BF07077-623E-B672-5298-2D01E591A04B}"/>
+              </a:ext>
+            </a:extLst>
+          </p:cNvPr>
+          <p:cNvSpPr>
+            <a:spLocks noGrp="1"/>
+          </p:cNvSpPr>
+          <p:nvPr>
+            <p:ph type="title"/>
+          </p:nvPr>
+        </p:nvSpPr>
+        <p:spPr/>
+        <p:txBody>
+          <a:bodyPr/>
+          <a:lstStyle/>
+          <a:p>
+            <a:r>
+              <a:rPr lang="en-US" dirty="0"/>
+              <a:t>Veri </a:t>
+            </a:r>
+            <a:r>
+              <a:rPr lang="en-US" dirty="0" err="1"/>
+              <a:t>ön</a:t>
+            </a:r>
+            <a:r>
+              <a:rPr lang="en-US" dirty="0"/>
+              <a:t> </a:t>
+            </a:r>
+            <a:r>
+              <a:rPr lang="en-US" dirty="0" err="1"/>
+              <a:t>işleme</a:t>
+            </a:r>
+            <a:r>
+              <a:rPr lang="en-US" dirty="0"/>
+              <a:t> </a:t>
+            </a:r>
+            <a:r>
+              <a:rPr lang="en-US" dirty="0" err="1"/>
+              <a:t>ve</a:t>
+            </a:r>
+            <a:r>
+              <a:rPr lang="en-US" dirty="0"/>
+              <a:t> </a:t>
+            </a:r>
+            <a:r>
+              <a:rPr lang="en-US" dirty="0" err="1"/>
+              <a:t>bölme</a:t>
+            </a:r>
+            <a:endParaRPr lang="en-US" dirty="0"/>
+          </a:p>
+        </p:txBody>
+      </p:sp>
+      <p:sp>
+        <p:nvSpPr>
+          <p:cNvPr id="3" name="İçerik Yer Tutucusu 2">
+            <a:extLst>
+              <a:ext uri="{FF2B5EF4-FFF2-40B4-BE49-F238E27FC236}">
+                <a16:creationId xmlns:a16="http://schemas.microsoft.com/office/drawing/2014/main" id="{63A08D0C-C258-A988-9F44-3B96D5A1FF03}"/>
+              </a:ext>
+            </a:extLst>
+          </p:cNvPr>
+          <p:cNvSpPr>
+            <a:spLocks noGrp="1"/>
+          </p:cNvSpPr>
+          <p:nvPr>
+            <p:ph idx="1"/>
+          </p:nvPr>
+        </p:nvSpPr>
+        <p:spPr>
+          <a:xfrm>
+            <a:off x="677334" y="2160589"/>
+            <a:ext cx="4665631" cy="3880773"/>
+          </a:xfrm>
+        </p:spPr>
+        <p:txBody>
+          <a:bodyPr/>
+          <a:lstStyle/>
+          <a:p>
+            <a:r>
+              <a:rPr lang="en-US" dirty="0"/>
+              <a:t>Veri </a:t>
+            </a:r>
+            <a:r>
+              <a:rPr lang="en-US" dirty="0" err="1"/>
+              <a:t>bölme</a:t>
+            </a:r>
+            <a:r>
+              <a:rPr lang="en-US" dirty="0"/>
+              <a:t> </a:t>
+            </a:r>
+            <a:r>
+              <a:rPr lang="en-US" dirty="0" err="1"/>
+              <a:t>stratejisi</a:t>
+            </a:r>
+            <a:r>
+              <a:rPr lang="en-US" dirty="0"/>
+              <a:t>:</a:t>
+            </a:r>
+          </a:p>
+          <a:p>
+            <a:pPr lvl="1"/>
+            <a:r>
+              <a:rPr lang="en-US" dirty="0" err="1"/>
+              <a:t>Toplam</a:t>
+            </a:r>
+            <a:r>
+              <a:rPr lang="en-US" dirty="0"/>
+              <a:t> 1350 </a:t>
+            </a:r>
+            <a:r>
+              <a:rPr lang="en-US" dirty="0" err="1"/>
+              <a:t>örnek</a:t>
+            </a:r>
+            <a:r>
+              <a:rPr lang="en-US" dirty="0"/>
+              <a:t> </a:t>
+            </a:r>
+            <a:r>
+              <a:rPr lang="en-US" dirty="0" err="1"/>
+              <a:t>şu</a:t>
+            </a:r>
+            <a:r>
+              <a:rPr lang="en-US" dirty="0"/>
+              <a:t> </a:t>
+            </a:r>
+            <a:r>
+              <a:rPr lang="en-US" dirty="0" err="1"/>
+              <a:t>şekilde</a:t>
+            </a:r>
+            <a:r>
+              <a:rPr lang="en-US" dirty="0"/>
+              <a:t> </a:t>
+            </a:r>
+            <a:r>
+              <a:rPr lang="en-US" dirty="0" err="1"/>
+              <a:t>bölünmüştür</a:t>
+            </a:r>
+            <a:r>
+              <a:rPr lang="en-US" dirty="0"/>
+              <a:t>:</a:t>
+            </a:r>
+          </a:p>
+          <a:p>
+            <a:pPr lvl="2"/>
+            <a:r>
+              <a:rPr lang="en-US" dirty="0" err="1"/>
+              <a:t>Eğitim</a:t>
+            </a:r>
+            <a:r>
+              <a:rPr lang="en-US" dirty="0"/>
+              <a:t> (%70): 944 </a:t>
+            </a:r>
+            <a:r>
+              <a:rPr lang="en-US" dirty="0" err="1"/>
+              <a:t>örnek</a:t>
+            </a:r>
+            <a:endParaRPr lang="en-US" dirty="0"/>
+          </a:p>
+          <a:p>
+            <a:pPr lvl="2"/>
+            <a:r>
+              <a:rPr lang="en-US" dirty="0" err="1"/>
+              <a:t>Doğrulama</a:t>
+            </a:r>
+            <a:r>
+              <a:rPr lang="en-US" dirty="0"/>
+              <a:t> (%15): 203 </a:t>
+            </a:r>
+            <a:r>
+              <a:rPr lang="en-US" dirty="0" err="1"/>
+              <a:t>örnek</a:t>
+            </a:r>
+            <a:endParaRPr lang="en-US" dirty="0"/>
+          </a:p>
+          <a:p>
+            <a:pPr lvl="2"/>
+            <a:r>
+              <a:rPr lang="en-US" dirty="0"/>
+              <a:t>Test (%15): 203 </a:t>
+            </a:r>
+            <a:r>
+              <a:rPr lang="en-US" dirty="0" err="1"/>
+              <a:t>örnek</a:t>
+            </a:r>
+            <a:endParaRPr lang="en-US" dirty="0"/>
+          </a:p>
+          <a:p>
+            <a:pPr lvl="2"/>
+            <a:endParaRPr lang="en-US" dirty="0"/>
+          </a:p>
+          <a:p>
+            <a:pPr lvl="2"/>
+            <a:endParaRPr lang="en-US" dirty="0"/>
+          </a:p>
+        </p:txBody>
+      </p:sp>
+      <p:pic>
+        <p:nvPicPr>
+          <p:cNvPr id="5" name="Resim 4">
+            <a:extLst>
+              <a:ext uri="{FF2B5EF4-FFF2-40B4-BE49-F238E27FC236}">
+                <a16:creationId xmlns:a16="http://schemas.microsoft.com/office/drawing/2014/main" id="{4D5B3666-5CCC-BD51-DFA3-ACB463604FEA}"/>
+              </a:ext>
+            </a:extLst>
+          </p:cNvPr>
+          <p:cNvPicPr>
+            <a:picLocks noChangeAspect="1"/>
+          </p:cNvPicPr>
+          <p:nvPr/>
+        </p:nvPicPr>
+        <p:blipFill>
+          <a:blip r:embed="rId2"/>
+          <a:stretch>
+            <a:fillRect/>
+          </a:stretch>
+        </p:blipFill>
+        <p:spPr>
+          <a:xfrm>
+            <a:off x="5775425" y="2486262"/>
+            <a:ext cx="5249008" cy="3229426"/>
+          </a:xfrm>
+          <a:prstGeom prst="rect">
+            <a:avLst/>
+          </a:prstGeom>
+        </p:spPr>
+      </p:pic>
+    </p:spTree>
+    <p:extLst>
+      <p:ext uri="{BB962C8B-B14F-4D97-AF65-F5344CB8AC3E}">
+        <p14:creationId xmlns:p14="http://schemas.microsoft.com/office/powerpoint/2010/main" val="58992294"/>
+      </p:ext>
+    </p:extLst>
+  </p:cSld>
+  <p:clrMapOvr>
+    <a:masterClrMapping/>
+  </p:clrMapOvr>
+</p:sld>
+</file>
+
+<file path=ppt/slides/slide21.xml><?xml version="1.0" encoding="utf-8"?>
+<p:sld xmlns:a="http://schemas.openxmlformats.org/drawingml/2006/main" xmlns:r="http://schemas.openxmlformats.org/officeDocument/2006/relationships" xmlns:p="http://schemas.openxmlformats.org/presentationml/2006/main">
+  <p:cSld>
+    <p:spTree>
+      <p:nvGrpSpPr>
+        <p:cNvPr id="1" name="">
+          <a:extLst>
+            <a:ext uri="{FF2B5EF4-FFF2-40B4-BE49-F238E27FC236}">
+              <a16:creationId xmlns:a16="http://schemas.microsoft.com/office/drawing/2014/main" id="{E84FB33C-C0F4-ACBB-D86B-DE146E3039EF}"/>
+            </a:ext>
+          </a:extLst>
+        </p:cNvPr>
+        <p:cNvGrpSpPr/>
+        <p:nvPr/>
+      </p:nvGrpSpPr>
+      <p:grpSpPr>
+        <a:xfrm>
+          <a:off x="0" y="0"/>
+          <a:ext cx="0" cy="0"/>
+          <a:chOff x="0" y="0"/>
+          <a:chExt cx="0" cy="0"/>
+        </a:xfrm>
+      </p:grpSpPr>
+      <p:sp>
+        <p:nvSpPr>
+          <p:cNvPr id="2" name="Başlık 1">
+            <a:extLst>
+              <a:ext uri="{FF2B5EF4-FFF2-40B4-BE49-F238E27FC236}">
+                <a16:creationId xmlns:a16="http://schemas.microsoft.com/office/drawing/2014/main" id="{DE069A83-DC5A-95C3-153B-4226BAA8A158}"/>
+              </a:ext>
+            </a:extLst>
+          </p:cNvPr>
+          <p:cNvSpPr>
+            <a:spLocks noGrp="1"/>
+          </p:cNvSpPr>
+          <p:nvPr>
+            <p:ph type="title"/>
+          </p:nvPr>
+        </p:nvSpPr>
+        <p:spPr/>
+        <p:txBody>
+          <a:bodyPr/>
+          <a:lstStyle/>
+          <a:p>
+            <a:r>
+              <a:rPr lang="en-US" dirty="0"/>
+              <a:t>Random forest </a:t>
+            </a:r>
+            <a:r>
+              <a:rPr lang="en-US" dirty="0" err="1"/>
+              <a:t>modeli</a:t>
+            </a:r>
+            <a:endParaRPr lang="en-US" dirty="0"/>
+          </a:p>
+        </p:txBody>
+      </p:sp>
+      <p:sp>
+        <p:nvSpPr>
+          <p:cNvPr id="3" name="İçerik Yer Tutucusu 2">
+            <a:extLst>
+              <a:ext uri="{FF2B5EF4-FFF2-40B4-BE49-F238E27FC236}">
+                <a16:creationId xmlns:a16="http://schemas.microsoft.com/office/drawing/2014/main" id="{4E0CA207-1B57-6C40-4DC3-591490E76D0D}"/>
+              </a:ext>
+            </a:extLst>
+          </p:cNvPr>
+          <p:cNvSpPr>
+            <a:spLocks noGrp="1"/>
+          </p:cNvSpPr>
+          <p:nvPr>
+            <p:ph idx="1"/>
+          </p:nvPr>
+        </p:nvSpPr>
+        <p:spPr>
+          <a:xfrm>
+            <a:off x="677334" y="2160589"/>
+            <a:ext cx="4665631" cy="3880773"/>
+          </a:xfrm>
+        </p:spPr>
+        <p:txBody>
+          <a:bodyPr/>
+          <a:lstStyle/>
+          <a:p>
+            <a:r>
+              <a:rPr lang="en-US" dirty="0"/>
+              <a:t>Temel (baseline) model </a:t>
+            </a:r>
+            <a:r>
+              <a:rPr lang="en-US" dirty="0" err="1"/>
+              <a:t>olarak</a:t>
+            </a:r>
+            <a:r>
+              <a:rPr lang="en-US" dirty="0"/>
+              <a:t> Random Forest Regressor </a:t>
+            </a:r>
+            <a:r>
+              <a:rPr lang="en-US" dirty="0" err="1"/>
+              <a:t>kullanışmıştır</a:t>
+            </a:r>
+            <a:endParaRPr lang="en-US" dirty="0"/>
+          </a:p>
+          <a:p>
+            <a:pPr lvl="1"/>
+            <a:r>
+              <a:rPr lang="en-US" dirty="0" err="1"/>
+              <a:t>Hiperparametreler</a:t>
+            </a:r>
+            <a:r>
+              <a:rPr lang="en-US" dirty="0"/>
+              <a:t>:</a:t>
+            </a:r>
+          </a:p>
+          <a:p>
+            <a:pPr lvl="2"/>
+            <a:r>
+              <a:rPr lang="en-US" dirty="0"/>
+              <a:t>100 </a:t>
+            </a:r>
+            <a:r>
+              <a:rPr lang="en-US" dirty="0" err="1"/>
+              <a:t>ağaç</a:t>
+            </a:r>
+            <a:r>
+              <a:rPr lang="en-US" dirty="0"/>
+              <a:t> (</a:t>
+            </a:r>
+            <a:r>
+              <a:rPr lang="en-US" dirty="0" err="1"/>
+              <a:t>n_estimators</a:t>
+            </a:r>
+            <a:r>
+              <a:rPr lang="en-US" dirty="0"/>
+              <a:t>)</a:t>
+            </a:r>
+          </a:p>
+          <a:p>
+            <a:pPr lvl="2"/>
+            <a:r>
+              <a:rPr lang="en-US" dirty="0" err="1"/>
+              <a:t>Maksimum</a:t>
+            </a:r>
+            <a:r>
+              <a:rPr lang="en-US" dirty="0"/>
+              <a:t> </a:t>
+            </a:r>
+            <a:r>
+              <a:rPr lang="en-US" dirty="0" err="1"/>
+              <a:t>derinlik</a:t>
+            </a:r>
+            <a:r>
+              <a:rPr lang="en-US" dirty="0"/>
+              <a:t>: 20</a:t>
+            </a:r>
+          </a:p>
+          <a:p>
+            <a:pPr lvl="2"/>
+            <a:r>
+              <a:rPr lang="en-US" dirty="0"/>
+              <a:t>Min sample split: 5</a:t>
+            </a:r>
+          </a:p>
+        </p:txBody>
+      </p:sp>
+      <p:pic>
+        <p:nvPicPr>
+          <p:cNvPr id="5" name="Resim 4">
+            <a:extLst>
+              <a:ext uri="{FF2B5EF4-FFF2-40B4-BE49-F238E27FC236}">
+                <a16:creationId xmlns:a16="http://schemas.microsoft.com/office/drawing/2014/main" id="{34831194-CA0C-8EAE-E658-7E9D2686E801}"/>
+              </a:ext>
+            </a:extLst>
+          </p:cNvPr>
+          <p:cNvPicPr>
+            <a:picLocks noChangeAspect="1"/>
+          </p:cNvPicPr>
+          <p:nvPr/>
+        </p:nvPicPr>
+        <p:blipFill>
+          <a:blip r:embed="rId2"/>
+          <a:stretch>
+            <a:fillRect/>
+          </a:stretch>
+        </p:blipFill>
+        <p:spPr>
+          <a:xfrm>
+            <a:off x="6467976" y="2695841"/>
+            <a:ext cx="4867954" cy="2810267"/>
+          </a:xfrm>
+          <a:prstGeom prst="rect">
+            <a:avLst/>
+          </a:prstGeom>
+        </p:spPr>
+      </p:pic>
+    </p:spTree>
+    <p:extLst>
+      <p:ext uri="{BB962C8B-B14F-4D97-AF65-F5344CB8AC3E}">
+        <p14:creationId xmlns:p14="http://schemas.microsoft.com/office/powerpoint/2010/main" val="2679777543"/>
+      </p:ext>
+    </p:extLst>
+  </p:cSld>
+  <p:clrMapOvr>
+    <a:masterClrMapping/>
+  </p:clrMapOvr>
+</p:sld>
+</file>
+
+<file path=ppt/slides/slide22.xml><?xml version="1.0" encoding="utf-8"?>
+<p:sld xmlns:a="http://schemas.openxmlformats.org/drawingml/2006/main" xmlns:r="http://schemas.openxmlformats.org/officeDocument/2006/relationships" xmlns:p="http://schemas.openxmlformats.org/presentationml/2006/main">
+  <p:cSld>
+    <p:spTree>
+      <p:nvGrpSpPr>
+        <p:cNvPr id="1" name="">
+          <a:extLst>
+            <a:ext uri="{FF2B5EF4-FFF2-40B4-BE49-F238E27FC236}">
+              <a16:creationId xmlns:a16="http://schemas.microsoft.com/office/drawing/2014/main" id="{B93D2AB7-57A1-B574-E470-6148FC8FA411}"/>
+            </a:ext>
+          </a:extLst>
+        </p:cNvPr>
+        <p:cNvGrpSpPr/>
+        <p:nvPr/>
+      </p:nvGrpSpPr>
+      <p:grpSpPr>
+        <a:xfrm>
+          <a:off x="0" y="0"/>
+          <a:ext cx="0" cy="0"/>
+          <a:chOff x="0" y="0"/>
+          <a:chExt cx="0" cy="0"/>
+        </a:xfrm>
+      </p:grpSpPr>
+      <p:sp>
+        <p:nvSpPr>
+          <p:cNvPr id="2" name="Başlık 1">
+            <a:extLst>
+              <a:ext uri="{FF2B5EF4-FFF2-40B4-BE49-F238E27FC236}">
+                <a16:creationId xmlns:a16="http://schemas.microsoft.com/office/drawing/2014/main" id="{46D6888D-466D-46B7-D72D-041DB31188A6}"/>
+              </a:ext>
+            </a:extLst>
+          </p:cNvPr>
+          <p:cNvSpPr>
+            <a:spLocks noGrp="1"/>
+          </p:cNvSpPr>
+          <p:nvPr>
+            <p:ph type="title"/>
+          </p:nvPr>
+        </p:nvSpPr>
+        <p:spPr/>
+        <p:txBody>
+          <a:bodyPr/>
+          <a:lstStyle/>
+          <a:p>
+            <a:r>
+              <a:rPr lang="en-US" dirty="0" err="1"/>
+              <a:t>XGBoost</a:t>
+            </a:r>
+            <a:r>
+              <a:rPr lang="en-US" dirty="0"/>
+              <a:t> </a:t>
+            </a:r>
+            <a:r>
+              <a:rPr lang="en-US" dirty="0" err="1"/>
+              <a:t>modeli</a:t>
+            </a:r>
+            <a:endParaRPr lang="en-US" dirty="0"/>
+          </a:p>
+        </p:txBody>
+      </p:sp>
+      <p:sp>
+        <p:nvSpPr>
+          <p:cNvPr id="3" name="İçerik Yer Tutucusu 2">
+            <a:extLst>
+              <a:ext uri="{FF2B5EF4-FFF2-40B4-BE49-F238E27FC236}">
+                <a16:creationId xmlns:a16="http://schemas.microsoft.com/office/drawing/2014/main" id="{AE37B31C-F1E1-DD56-61D6-4FA532623D50}"/>
+              </a:ext>
+            </a:extLst>
+          </p:cNvPr>
+          <p:cNvSpPr>
+            <a:spLocks noGrp="1"/>
+          </p:cNvSpPr>
+          <p:nvPr>
+            <p:ph idx="1"/>
+          </p:nvPr>
+        </p:nvSpPr>
+        <p:spPr>
+          <a:xfrm>
+            <a:off x="677334" y="2160589"/>
+            <a:ext cx="4665631" cy="3880773"/>
+          </a:xfrm>
+        </p:spPr>
+        <p:txBody>
+          <a:bodyPr/>
+          <a:lstStyle/>
+          <a:p>
+            <a:r>
+              <a:rPr lang="en-US" dirty="0"/>
+              <a:t>Gradient Boosting </a:t>
+            </a:r>
+            <a:r>
+              <a:rPr lang="en-US" dirty="0" err="1"/>
+              <a:t>algoritması</a:t>
+            </a:r>
+            <a:r>
+              <a:rPr lang="en-US" dirty="0"/>
+              <a:t> </a:t>
+            </a:r>
+            <a:r>
+              <a:rPr lang="en-US" dirty="0" err="1"/>
+              <a:t>ile</a:t>
+            </a:r>
+            <a:r>
+              <a:rPr lang="en-US" dirty="0"/>
+              <a:t> </a:t>
+            </a:r>
+            <a:r>
+              <a:rPr lang="en-US" dirty="0" err="1"/>
+              <a:t>daha</a:t>
+            </a:r>
+            <a:r>
+              <a:rPr lang="en-US" dirty="0"/>
+              <a:t> </a:t>
+            </a:r>
+            <a:r>
+              <a:rPr lang="en-US" dirty="0" err="1"/>
+              <a:t>güçlü</a:t>
+            </a:r>
+            <a:r>
+              <a:rPr lang="en-US" dirty="0"/>
+              <a:t> </a:t>
+            </a:r>
+            <a:r>
+              <a:rPr lang="en-US" dirty="0" err="1"/>
+              <a:t>bir</a:t>
+            </a:r>
+            <a:r>
+              <a:rPr lang="en-US" dirty="0"/>
+              <a:t> baseline </a:t>
+            </a:r>
+            <a:r>
+              <a:rPr lang="en-US" dirty="0" err="1"/>
+              <a:t>hedeflenmiştir</a:t>
+            </a:r>
+            <a:endParaRPr lang="en-US" dirty="0"/>
+          </a:p>
+          <a:p>
+            <a:pPr lvl="1"/>
+            <a:r>
+              <a:rPr lang="en-US" dirty="0" err="1"/>
+              <a:t>Özellikler</a:t>
+            </a:r>
+            <a:r>
+              <a:rPr lang="en-US" dirty="0"/>
+              <a:t>:</a:t>
+            </a:r>
+          </a:p>
+          <a:p>
+            <a:pPr lvl="2"/>
+            <a:r>
+              <a:rPr lang="en-US" dirty="0"/>
+              <a:t>Early stopping </a:t>
+            </a:r>
+            <a:r>
+              <a:rPr lang="en-US" dirty="0" err="1"/>
+              <a:t>ile</a:t>
+            </a:r>
+            <a:r>
+              <a:rPr lang="en-US" dirty="0"/>
+              <a:t> overfitting </a:t>
+            </a:r>
+            <a:r>
+              <a:rPr lang="en-US" dirty="0" err="1"/>
+              <a:t>önleme</a:t>
+            </a:r>
+            <a:endParaRPr lang="en-US" dirty="0"/>
+          </a:p>
+          <a:p>
+            <a:pPr lvl="2"/>
+            <a:r>
+              <a:rPr lang="en-US" dirty="0" err="1"/>
+              <a:t>Düşük</a:t>
+            </a:r>
+            <a:r>
+              <a:rPr lang="en-US" dirty="0"/>
+              <a:t> </a:t>
+            </a:r>
+            <a:r>
+              <a:rPr lang="en-US" dirty="0" err="1"/>
+              <a:t>öğrenme</a:t>
+            </a:r>
+            <a:r>
+              <a:rPr lang="en-US" dirty="0"/>
+              <a:t> </a:t>
+            </a:r>
+            <a:r>
+              <a:rPr lang="en-US" dirty="0" err="1"/>
+              <a:t>oranı</a:t>
+            </a:r>
+            <a:r>
+              <a:rPr lang="en-US" dirty="0"/>
+              <a:t> (0.05)</a:t>
+            </a:r>
+          </a:p>
+          <a:p>
+            <a:pPr lvl="2"/>
+            <a:r>
+              <a:rPr lang="en-US" dirty="0"/>
+              <a:t>%80 alt </a:t>
+            </a:r>
+            <a:r>
+              <a:rPr lang="en-US" dirty="0" err="1"/>
+              <a:t>örnekleme</a:t>
+            </a:r>
+            <a:r>
+              <a:rPr lang="en-US" dirty="0"/>
+              <a:t> (subsample)</a:t>
+            </a:r>
+          </a:p>
+        </p:txBody>
+      </p:sp>
+      <p:pic>
+        <p:nvPicPr>
+          <p:cNvPr id="5" name="Resim 4">
+            <a:extLst>
+              <a:ext uri="{FF2B5EF4-FFF2-40B4-BE49-F238E27FC236}">
+                <a16:creationId xmlns:a16="http://schemas.microsoft.com/office/drawing/2014/main" id="{7F1BB07C-1453-4D9A-9FE9-AB8AC8895D87}"/>
+              </a:ext>
+            </a:extLst>
+          </p:cNvPr>
+          <p:cNvPicPr>
+            <a:picLocks noChangeAspect="1"/>
+          </p:cNvPicPr>
+          <p:nvPr/>
+        </p:nvPicPr>
+        <p:blipFill>
+          <a:blip r:embed="rId2"/>
+          <a:stretch>
+            <a:fillRect/>
+          </a:stretch>
+        </p:blipFill>
+        <p:spPr>
+          <a:xfrm>
+            <a:off x="5637315" y="2476736"/>
+            <a:ext cx="5220429" cy="3248478"/>
+          </a:xfrm>
+          <a:prstGeom prst="rect">
+            <a:avLst/>
+          </a:prstGeom>
+        </p:spPr>
+      </p:pic>
+    </p:spTree>
+    <p:extLst>
+      <p:ext uri="{BB962C8B-B14F-4D97-AF65-F5344CB8AC3E}">
+        <p14:creationId xmlns:p14="http://schemas.microsoft.com/office/powerpoint/2010/main" val="2290740479"/>
+      </p:ext>
+    </p:extLst>
+  </p:cSld>
+  <p:clrMapOvr>
+    <a:masterClrMapping/>
+  </p:clrMapOvr>
+</p:sld>
+</file>
+
+<file path=ppt/slides/slide23.xml><?xml version="1.0" encoding="utf-8"?>
+<p:sld xmlns:a="http://schemas.openxmlformats.org/drawingml/2006/main" xmlns:r="http://schemas.openxmlformats.org/officeDocument/2006/relationships" xmlns:p="http://schemas.openxmlformats.org/presentationml/2006/main">
+  <p:cSld>
+    <p:spTree>
+      <p:nvGrpSpPr>
+        <p:cNvPr id="1" name="">
+          <a:extLst>
+            <a:ext uri="{FF2B5EF4-FFF2-40B4-BE49-F238E27FC236}">
+              <a16:creationId xmlns:a16="http://schemas.microsoft.com/office/drawing/2014/main" id="{F52F7226-0FDD-11E9-50D2-CFF8D2C969E6}"/>
+            </a:ext>
+          </a:extLst>
+        </p:cNvPr>
+        <p:cNvGrpSpPr/>
+        <p:nvPr/>
+      </p:nvGrpSpPr>
+      <p:grpSpPr>
+        <a:xfrm>
+          <a:off x="0" y="0"/>
+          <a:ext cx="0" cy="0"/>
+          <a:chOff x="0" y="0"/>
+          <a:chExt cx="0" cy="0"/>
+        </a:xfrm>
+      </p:grpSpPr>
+      <p:sp>
+        <p:nvSpPr>
+          <p:cNvPr id="2" name="Title 1">
+            <a:extLst>
+              <a:ext uri="{FF2B5EF4-FFF2-40B4-BE49-F238E27FC236}">
+                <a16:creationId xmlns:a16="http://schemas.microsoft.com/office/drawing/2014/main" id="{3406F7B5-2539-F346-C6DE-063DD1F60FD9}"/>
+              </a:ext>
+            </a:extLst>
+          </p:cNvPr>
+          <p:cNvSpPr>
+            <a:spLocks noGrp="1"/>
+          </p:cNvSpPr>
+          <p:nvPr>
+            <p:ph type="title"/>
+          </p:nvPr>
+        </p:nvSpPr>
+        <p:spPr>
+          <a:xfrm>
+            <a:off x="677333" y="609600"/>
+            <a:ext cx="9694832" cy="1320800"/>
+          </a:xfrm>
+        </p:spPr>
+        <p:txBody>
+          <a:bodyPr/>
+          <a:lstStyle/>
+          <a:p>
+            <a:r>
+              <a:rPr lang="en-US" dirty="0"/>
+              <a:t>Derin </a:t>
+            </a:r>
+            <a:r>
+              <a:rPr lang="en-US" dirty="0" err="1"/>
+              <a:t>öğrenme</a:t>
+            </a:r>
+            <a:r>
+              <a:rPr lang="en-US" dirty="0"/>
+              <a:t> </a:t>
+            </a:r>
+            <a:r>
+              <a:rPr lang="en-US" dirty="0" err="1"/>
+              <a:t>mimarisi</a:t>
+            </a:r>
+            <a:r>
+              <a:rPr lang="en-US" dirty="0"/>
+              <a:t> (MLP)</a:t>
+            </a:r>
+          </a:p>
+        </p:txBody>
+      </p:sp>
+      <p:pic>
+        <p:nvPicPr>
+          <p:cNvPr id="5" name="Resim 4">
+            <a:extLst>
+              <a:ext uri="{FF2B5EF4-FFF2-40B4-BE49-F238E27FC236}">
+                <a16:creationId xmlns:a16="http://schemas.microsoft.com/office/drawing/2014/main" id="{59A83441-64A1-C4EE-821B-C1F865B2F081}"/>
+              </a:ext>
+            </a:extLst>
+          </p:cNvPr>
+          <p:cNvPicPr>
+            <a:picLocks noChangeAspect="1"/>
+          </p:cNvPicPr>
+          <p:nvPr/>
+        </p:nvPicPr>
+        <p:blipFill>
+          <a:blip r:embed="rId2"/>
+          <a:stretch>
+            <a:fillRect/>
+          </a:stretch>
+        </p:blipFill>
+        <p:spPr>
+          <a:xfrm>
+            <a:off x="1059184" y="2043954"/>
+            <a:ext cx="8626734" cy="4419600"/>
+          </a:xfrm>
+          <a:prstGeom prst="rect">
+            <a:avLst/>
+          </a:prstGeom>
+        </p:spPr>
+      </p:pic>
+    </p:spTree>
+    <p:extLst>
+      <p:ext uri="{BB962C8B-B14F-4D97-AF65-F5344CB8AC3E}">
+        <p14:creationId xmlns:p14="http://schemas.microsoft.com/office/powerpoint/2010/main" val="1903128238"/>
+      </p:ext>
+    </p:extLst>
+  </p:cSld>
+  <p:clrMapOvr>
+    <a:masterClrMapping/>
+  </p:clrMapOvr>
+</p:sld>
+</file>
+
+<file path=ppt/slides/slide24.xml><?xml version="1.0" encoding="utf-8"?>
+<p:sld xmlns:a="http://schemas.openxmlformats.org/drawingml/2006/main" xmlns:r="http://schemas.openxmlformats.org/officeDocument/2006/relationships" xmlns:p="http://schemas.openxmlformats.org/presentationml/2006/main">
+  <p:cSld>
+    <p:spTree>
+      <p:nvGrpSpPr>
+        <p:cNvPr id="1" name="">
+          <a:extLst>
+            <a:ext uri="{FF2B5EF4-FFF2-40B4-BE49-F238E27FC236}">
+              <a16:creationId xmlns:a16="http://schemas.microsoft.com/office/drawing/2014/main" id="{3A164116-D613-6B05-7C35-89D8A33DBD64}"/>
+            </a:ext>
+          </a:extLst>
+        </p:cNvPr>
+        <p:cNvGrpSpPr/>
+        <p:nvPr/>
+      </p:nvGrpSpPr>
+      <p:grpSpPr>
+        <a:xfrm>
+          <a:off x="0" y="0"/>
+          <a:ext cx="0" cy="0"/>
+          <a:chOff x="0" y="0"/>
+          <a:chExt cx="0" cy="0"/>
+        </a:xfrm>
+      </p:grpSpPr>
+      <p:sp>
+        <p:nvSpPr>
+          <p:cNvPr id="2" name="Başlık 1">
+            <a:extLst>
+              <a:ext uri="{FF2B5EF4-FFF2-40B4-BE49-F238E27FC236}">
+                <a16:creationId xmlns:a16="http://schemas.microsoft.com/office/drawing/2014/main" id="{77A53A8F-7BB6-0487-82E4-4F0EB7FAF709}"/>
+              </a:ext>
+            </a:extLst>
+          </p:cNvPr>
+          <p:cNvSpPr>
+            <a:spLocks noGrp="1"/>
+          </p:cNvSpPr>
+          <p:nvPr>
+            <p:ph type="title"/>
+          </p:nvPr>
+        </p:nvSpPr>
+        <p:spPr/>
+        <p:txBody>
+          <a:bodyPr/>
+          <a:lstStyle/>
+          <a:p>
+            <a:r>
+              <a:rPr lang="en-US" dirty="0"/>
+              <a:t>Derin </a:t>
+            </a:r>
+            <a:r>
+              <a:rPr lang="en-US" dirty="0" err="1"/>
+              <a:t>öğrenme</a:t>
+            </a:r>
+            <a:r>
+              <a:rPr lang="en-US" dirty="0"/>
+              <a:t> </a:t>
+            </a:r>
+            <a:r>
+              <a:rPr lang="en-US" dirty="0" err="1"/>
+              <a:t>mimarisi</a:t>
+            </a:r>
+            <a:r>
+              <a:rPr lang="en-US" dirty="0"/>
+              <a:t> (MLP)</a:t>
+            </a:r>
+          </a:p>
+        </p:txBody>
+      </p:sp>
+      <p:sp>
+        <p:nvSpPr>
+          <p:cNvPr id="3" name="İçerik Yer Tutucusu 2">
+            <a:extLst>
+              <a:ext uri="{FF2B5EF4-FFF2-40B4-BE49-F238E27FC236}">
+                <a16:creationId xmlns:a16="http://schemas.microsoft.com/office/drawing/2014/main" id="{BEF729B5-A25D-4728-57C3-598856FCF2DF}"/>
+              </a:ext>
+            </a:extLst>
+          </p:cNvPr>
+          <p:cNvSpPr>
+            <a:spLocks noGrp="1"/>
+          </p:cNvSpPr>
+          <p:nvPr>
+            <p:ph idx="1"/>
+          </p:nvPr>
+        </p:nvSpPr>
+        <p:spPr>
+          <a:xfrm>
+            <a:off x="677334" y="2160589"/>
+            <a:ext cx="4665631" cy="3880773"/>
+          </a:xfrm>
+        </p:spPr>
+        <p:txBody>
+          <a:bodyPr/>
+          <a:lstStyle/>
+          <a:p>
+            <a:r>
+              <a:rPr lang="en-US" dirty="0" err="1"/>
+              <a:t>Çok</a:t>
+            </a:r>
+            <a:r>
+              <a:rPr lang="en-US" dirty="0"/>
+              <a:t> </a:t>
+            </a:r>
+            <a:r>
+              <a:rPr lang="en-US" dirty="0" err="1"/>
+              <a:t>katmanlı</a:t>
+            </a:r>
+            <a:r>
+              <a:rPr lang="en-US" dirty="0"/>
+              <a:t> </a:t>
+            </a:r>
+            <a:r>
+              <a:rPr lang="en-US" dirty="0" err="1"/>
+              <a:t>algılayıcı</a:t>
+            </a:r>
+            <a:r>
+              <a:rPr lang="en-US" dirty="0"/>
+              <a:t> (MLP) </a:t>
+            </a:r>
+            <a:r>
+              <a:rPr lang="en-US" dirty="0" err="1"/>
+              <a:t>mimarisi</a:t>
+            </a:r>
+            <a:endParaRPr lang="en-US" dirty="0"/>
+          </a:p>
+          <a:p>
+            <a:pPr lvl="1"/>
+            <a:r>
+              <a:rPr lang="en-US" dirty="0" err="1"/>
+              <a:t>Giriş</a:t>
+            </a:r>
+            <a:r>
+              <a:rPr lang="en-US" dirty="0"/>
+              <a:t> (8): proses + </a:t>
+            </a:r>
+            <a:r>
+              <a:rPr lang="en-US" dirty="0" err="1"/>
+              <a:t>singaz</a:t>
+            </a:r>
+            <a:endParaRPr lang="en-US" dirty="0"/>
+          </a:p>
+          <a:p>
+            <a:pPr lvl="1"/>
+            <a:r>
+              <a:rPr lang="en-US" dirty="0" err="1"/>
+              <a:t>Gizli</a:t>
+            </a:r>
+            <a:r>
+              <a:rPr lang="en-US" dirty="0"/>
+              <a:t> 1 (128): </a:t>
+            </a:r>
+            <a:r>
+              <a:rPr lang="en-US" dirty="0" err="1"/>
+              <a:t>ReLU</a:t>
+            </a:r>
+            <a:r>
+              <a:rPr lang="en-US" dirty="0"/>
+              <a:t> + BN +Dropout(0.3)</a:t>
+            </a:r>
+          </a:p>
+          <a:p>
+            <a:pPr lvl="1"/>
+            <a:r>
+              <a:rPr lang="en-US" dirty="0" err="1"/>
+              <a:t>Gizli</a:t>
+            </a:r>
+            <a:r>
+              <a:rPr lang="en-US" dirty="0"/>
+              <a:t> 2 (64): </a:t>
+            </a:r>
+            <a:r>
+              <a:rPr lang="en-US" dirty="0" err="1"/>
+              <a:t>ReLU</a:t>
+            </a:r>
+            <a:r>
+              <a:rPr lang="en-US" dirty="0"/>
+              <a:t> + BN +Dropout(0.2)</a:t>
+            </a:r>
+          </a:p>
+          <a:p>
+            <a:pPr lvl="1"/>
+            <a:r>
+              <a:rPr lang="en-US" dirty="0" err="1"/>
+              <a:t>Gizli</a:t>
+            </a:r>
+            <a:r>
+              <a:rPr lang="en-US" dirty="0"/>
+              <a:t> 3 (32): </a:t>
+            </a:r>
+            <a:r>
+              <a:rPr lang="en-US" dirty="0" err="1"/>
+              <a:t>ReLU</a:t>
+            </a:r>
+            <a:r>
+              <a:rPr lang="en-US" dirty="0"/>
+              <a:t> + Dropout(0.1)</a:t>
+            </a:r>
+          </a:p>
+          <a:p>
+            <a:pPr lvl="1"/>
+            <a:r>
+              <a:rPr lang="en-US" dirty="0" err="1"/>
+              <a:t>Çıkış</a:t>
+            </a:r>
+            <a:r>
+              <a:rPr lang="en-US" dirty="0"/>
+              <a:t> (6): Biyo-</a:t>
+            </a:r>
+            <a:r>
+              <a:rPr lang="en-US" dirty="0" err="1"/>
+              <a:t>yağ</a:t>
+            </a:r>
+            <a:r>
+              <a:rPr lang="en-US" dirty="0"/>
+              <a:t> </a:t>
+            </a:r>
+            <a:r>
+              <a:rPr lang="en-US" dirty="0" err="1"/>
+              <a:t>bileşenleri</a:t>
+            </a:r>
+            <a:endParaRPr lang="en-US" dirty="0"/>
+          </a:p>
+          <a:p>
+            <a:pPr lvl="1"/>
+            <a:endParaRPr lang="en-US" dirty="0"/>
+          </a:p>
+        </p:txBody>
+      </p:sp>
+      <p:pic>
+        <p:nvPicPr>
+          <p:cNvPr id="5" name="Resim 4">
+            <a:extLst>
+              <a:ext uri="{FF2B5EF4-FFF2-40B4-BE49-F238E27FC236}">
+                <a16:creationId xmlns:a16="http://schemas.microsoft.com/office/drawing/2014/main" id="{E5325CE4-A11B-D17A-5FA3-26AB50C8D1DD}"/>
+              </a:ext>
+            </a:extLst>
+          </p:cNvPr>
+          <p:cNvPicPr>
+            <a:picLocks noChangeAspect="1"/>
+          </p:cNvPicPr>
+          <p:nvPr/>
+        </p:nvPicPr>
+        <p:blipFill>
+          <a:blip r:embed="rId2"/>
+          <a:stretch>
+            <a:fillRect/>
+          </a:stretch>
+        </p:blipFill>
+        <p:spPr>
+          <a:xfrm>
+            <a:off x="5867298" y="2448157"/>
+            <a:ext cx="5477639" cy="3305636"/>
+          </a:xfrm>
+          <a:prstGeom prst="rect">
+            <a:avLst/>
+          </a:prstGeom>
+        </p:spPr>
+      </p:pic>
+    </p:spTree>
+    <p:extLst>
+      <p:ext uri="{BB962C8B-B14F-4D97-AF65-F5344CB8AC3E}">
+        <p14:creationId xmlns:p14="http://schemas.microsoft.com/office/powerpoint/2010/main" val="1709458168"/>
+      </p:ext>
+    </p:extLst>
+  </p:cSld>
+  <p:clrMapOvr>
+    <a:masterClrMapping/>
+  </p:clrMapOvr>
+</p:sld>
+</file>
+
+<file path=ppt/slides/slide25.xml><?xml version="1.0" encoding="utf-8"?>
+<p:sld xmlns:a="http://schemas.openxmlformats.org/drawingml/2006/main" xmlns:r="http://schemas.openxmlformats.org/officeDocument/2006/relationships" xmlns:p="http://schemas.openxmlformats.org/presentationml/2006/main">
+  <p:cSld>
+    <p:spTree>
+      <p:nvGrpSpPr>
+        <p:cNvPr id="1" name="">
+          <a:extLst>
+            <a:ext uri="{FF2B5EF4-FFF2-40B4-BE49-F238E27FC236}">
+              <a16:creationId xmlns:a16="http://schemas.microsoft.com/office/drawing/2014/main" id="{3B27BD9F-5F50-F5D5-7418-D4503313D433}"/>
+            </a:ext>
+          </a:extLst>
+        </p:cNvPr>
+        <p:cNvGrpSpPr/>
+        <p:nvPr/>
+      </p:nvGrpSpPr>
+      <p:grpSpPr>
+        <a:xfrm>
+          <a:off x="0" y="0"/>
+          <a:ext cx="0" cy="0"/>
+          <a:chOff x="0" y="0"/>
+          <a:chExt cx="0" cy="0"/>
+        </a:xfrm>
+      </p:grpSpPr>
+      <p:sp>
+        <p:nvSpPr>
+          <p:cNvPr id="2" name="Başlık 1">
+            <a:extLst>
+              <a:ext uri="{FF2B5EF4-FFF2-40B4-BE49-F238E27FC236}">
+                <a16:creationId xmlns:a16="http://schemas.microsoft.com/office/drawing/2014/main" id="{5D112A90-FDC3-BF4B-BE9F-1A2F1D1ACCFE}"/>
+              </a:ext>
+            </a:extLst>
+          </p:cNvPr>
+          <p:cNvSpPr>
+            <a:spLocks noGrp="1"/>
+          </p:cNvSpPr>
+          <p:nvPr>
+            <p:ph type="title"/>
+          </p:nvPr>
+        </p:nvSpPr>
+        <p:spPr/>
+        <p:txBody>
+          <a:bodyPr/>
+          <a:lstStyle/>
+          <a:p>
+            <a:r>
+              <a:rPr lang="en-US" dirty="0"/>
+              <a:t>MLP </a:t>
+            </a:r>
+            <a:r>
+              <a:rPr lang="en-US" dirty="0" err="1"/>
+              <a:t>eğitimi</a:t>
+            </a:r>
+            <a:r>
+              <a:rPr lang="en-US" dirty="0"/>
+              <a:t> </a:t>
+            </a:r>
+            <a:r>
+              <a:rPr lang="en-US" dirty="0" err="1"/>
+              <a:t>ve</a:t>
+            </a:r>
+            <a:r>
+              <a:rPr lang="en-US" dirty="0"/>
+              <a:t> </a:t>
+            </a:r>
+            <a:r>
+              <a:rPr lang="en-US" dirty="0" err="1"/>
+              <a:t>değerlendirme</a:t>
+            </a:r>
+            <a:endParaRPr lang="en-US" dirty="0"/>
+          </a:p>
+        </p:txBody>
+      </p:sp>
+      <p:sp>
+        <p:nvSpPr>
+          <p:cNvPr id="3" name="İçerik Yer Tutucusu 2">
+            <a:extLst>
+              <a:ext uri="{FF2B5EF4-FFF2-40B4-BE49-F238E27FC236}">
+                <a16:creationId xmlns:a16="http://schemas.microsoft.com/office/drawing/2014/main" id="{E1F1F73C-C534-918B-925E-CA33E28A3F21}"/>
+              </a:ext>
+            </a:extLst>
+          </p:cNvPr>
+          <p:cNvSpPr>
+            <a:spLocks noGrp="1"/>
+          </p:cNvSpPr>
+          <p:nvPr>
+            <p:ph idx="1"/>
+          </p:nvPr>
+        </p:nvSpPr>
+        <p:spPr>
+          <a:xfrm>
+            <a:off x="677334" y="2160589"/>
+            <a:ext cx="4665631" cy="3880773"/>
+          </a:xfrm>
+        </p:spPr>
+        <p:txBody>
+          <a:bodyPr/>
+          <a:lstStyle/>
+          <a:p>
+            <a:r>
+              <a:rPr lang="en-US" dirty="0" err="1"/>
+              <a:t>Eğitim</a:t>
+            </a:r>
+            <a:r>
+              <a:rPr lang="en-US" dirty="0"/>
+              <a:t> </a:t>
+            </a:r>
+            <a:r>
+              <a:rPr lang="en-US" dirty="0" err="1"/>
+              <a:t>sürecinde</a:t>
+            </a:r>
+            <a:r>
+              <a:rPr lang="en-US" dirty="0"/>
+              <a:t> </a:t>
+            </a:r>
+            <a:r>
+              <a:rPr lang="en-US" dirty="0" err="1"/>
+              <a:t>stabilite</a:t>
+            </a:r>
+            <a:r>
+              <a:rPr lang="en-US" dirty="0"/>
+              <a:t> </a:t>
+            </a:r>
+            <a:r>
+              <a:rPr lang="en-US" dirty="0" err="1"/>
+              <a:t>için</a:t>
+            </a:r>
+            <a:r>
+              <a:rPr lang="en-US" dirty="0"/>
+              <a:t> Callbacks </a:t>
+            </a:r>
+            <a:r>
+              <a:rPr lang="en-US" dirty="0" err="1"/>
+              <a:t>kullanılmıştır</a:t>
+            </a:r>
+            <a:endParaRPr lang="en-US" dirty="0"/>
+          </a:p>
+          <a:p>
+            <a:pPr lvl="1"/>
+            <a:r>
+              <a:rPr lang="en-US" dirty="0"/>
+              <a:t>Early stopping: 30 epoch </a:t>
+            </a:r>
+            <a:r>
+              <a:rPr lang="en-US" dirty="0" err="1"/>
+              <a:t>sabır</a:t>
+            </a:r>
+            <a:endParaRPr lang="en-US" dirty="0"/>
+          </a:p>
+          <a:p>
+            <a:pPr lvl="1"/>
+            <a:r>
+              <a:rPr lang="en-US" dirty="0" err="1"/>
+              <a:t>ReduceLROnPlateau</a:t>
+            </a:r>
+            <a:r>
+              <a:rPr lang="en-US" dirty="0"/>
+              <a:t>: </a:t>
+            </a:r>
+            <a:r>
+              <a:rPr lang="en-US" dirty="0" err="1"/>
+              <a:t>öğrenme</a:t>
+            </a:r>
+            <a:r>
+              <a:rPr lang="en-US" dirty="0"/>
+              <a:t> </a:t>
+            </a:r>
+            <a:r>
+              <a:rPr lang="en-US" dirty="0" err="1"/>
+              <a:t>oranını</a:t>
+            </a:r>
+            <a:r>
+              <a:rPr lang="en-US" dirty="0"/>
+              <a:t> </a:t>
+            </a:r>
+            <a:r>
+              <a:rPr lang="en-US" dirty="0" err="1"/>
+              <a:t>dinamik</a:t>
+            </a:r>
+            <a:r>
+              <a:rPr lang="en-US" dirty="0"/>
+              <a:t> </a:t>
+            </a:r>
+            <a:r>
+              <a:rPr lang="en-US" dirty="0" err="1"/>
+              <a:t>azaltma</a:t>
+            </a:r>
+            <a:endParaRPr lang="en-US" dirty="0"/>
+          </a:p>
+          <a:p>
+            <a:pPr lvl="1"/>
+            <a:r>
+              <a:rPr lang="en-US" dirty="0" err="1"/>
+              <a:t>Normalizasyon</a:t>
+            </a:r>
+            <a:r>
+              <a:rPr lang="en-US" dirty="0"/>
+              <a:t>: </a:t>
+            </a:r>
+            <a:r>
+              <a:rPr lang="en-US" dirty="0" err="1"/>
+              <a:t>StandardScaler</a:t>
+            </a:r>
+            <a:r>
+              <a:rPr lang="en-US" dirty="0"/>
+              <a:t> (z-score) </a:t>
+            </a:r>
+            <a:r>
+              <a:rPr lang="en-US" dirty="0" err="1"/>
+              <a:t>kullanılmıştır</a:t>
+            </a:r>
+            <a:endParaRPr lang="en-US" dirty="0"/>
+          </a:p>
+        </p:txBody>
+      </p:sp>
+      <p:pic>
+        <p:nvPicPr>
+          <p:cNvPr id="5" name="Resim 4">
+            <a:extLst>
+              <a:ext uri="{FF2B5EF4-FFF2-40B4-BE49-F238E27FC236}">
+                <a16:creationId xmlns:a16="http://schemas.microsoft.com/office/drawing/2014/main" id="{A3F0955A-E298-0972-25D7-840BCEA2978D}"/>
+              </a:ext>
+            </a:extLst>
+          </p:cNvPr>
+          <p:cNvPicPr>
+            <a:picLocks noChangeAspect="1"/>
+          </p:cNvPicPr>
+          <p:nvPr/>
+        </p:nvPicPr>
+        <p:blipFill>
+          <a:blip r:embed="rId2"/>
+          <a:stretch>
+            <a:fillRect/>
+          </a:stretch>
+        </p:blipFill>
+        <p:spPr>
+          <a:xfrm>
+            <a:off x="5494026" y="2543420"/>
+            <a:ext cx="6020640" cy="3115110"/>
+          </a:xfrm>
+          <a:prstGeom prst="rect">
+            <a:avLst/>
+          </a:prstGeom>
+        </p:spPr>
+      </p:pic>
+    </p:spTree>
+    <p:extLst>
+      <p:ext uri="{BB962C8B-B14F-4D97-AF65-F5344CB8AC3E}">
+        <p14:creationId xmlns:p14="http://schemas.microsoft.com/office/powerpoint/2010/main" val="4253472626"/>
+      </p:ext>
+    </p:extLst>
+  </p:cSld>
+  <p:clrMapOvr>
+    <a:masterClrMapping/>
+  </p:clrMapOvr>
+</p:sld>
+</file>
+
+<file path=ppt/slides/slide26.xml><?xml version="1.0" encoding="utf-8"?>
+<p:sld xmlns:a="http://schemas.openxmlformats.org/drawingml/2006/main" xmlns:r="http://schemas.openxmlformats.org/officeDocument/2006/relationships" xmlns:p="http://schemas.openxmlformats.org/presentationml/2006/main">
+  <p:cSld>
+    <p:spTree>
+      <p:nvGrpSpPr>
+        <p:cNvPr id="1" name="">
+          <a:extLst>
+            <a:ext uri="{FF2B5EF4-FFF2-40B4-BE49-F238E27FC236}">
+              <a16:creationId xmlns:a16="http://schemas.microsoft.com/office/drawing/2014/main" id="{9C7D7153-D721-3E25-8FBA-F322534AEDB1}"/>
+            </a:ext>
+          </a:extLst>
+        </p:cNvPr>
+        <p:cNvGrpSpPr/>
+        <p:nvPr/>
+      </p:nvGrpSpPr>
+      <p:grpSpPr>
+        <a:xfrm>
+          <a:off x="0" y="0"/>
+          <a:ext cx="0" cy="0"/>
+          <a:chOff x="0" y="0"/>
+          <a:chExt cx="0" cy="0"/>
+        </a:xfrm>
+      </p:grpSpPr>
+      <p:sp>
+        <p:nvSpPr>
+          <p:cNvPr id="2" name="Başlık 1">
+            <a:extLst>
+              <a:ext uri="{FF2B5EF4-FFF2-40B4-BE49-F238E27FC236}">
+                <a16:creationId xmlns:a16="http://schemas.microsoft.com/office/drawing/2014/main" id="{972CD9B7-CA0E-259D-1F0F-902A1E3F08F6}"/>
+              </a:ext>
+            </a:extLst>
+          </p:cNvPr>
+          <p:cNvSpPr>
+            <a:spLocks noGrp="1"/>
+          </p:cNvSpPr>
+          <p:nvPr>
+            <p:ph type="title"/>
+          </p:nvPr>
+        </p:nvSpPr>
+        <p:spPr/>
+        <p:txBody>
+          <a:bodyPr/>
+          <a:lstStyle/>
+          <a:p>
+            <a:r>
+              <a:rPr lang="en-US" dirty="0" err="1"/>
+              <a:t>Kullanım</a:t>
+            </a:r>
+            <a:r>
+              <a:rPr lang="en-US" dirty="0"/>
+              <a:t> </a:t>
+            </a:r>
+            <a:r>
+              <a:rPr lang="en-US" dirty="0" err="1"/>
+              <a:t>örneği</a:t>
+            </a:r>
+            <a:endParaRPr lang="en-US" dirty="0"/>
+          </a:p>
+        </p:txBody>
+      </p:sp>
+      <p:sp>
+        <p:nvSpPr>
+          <p:cNvPr id="3" name="İçerik Yer Tutucusu 2">
+            <a:extLst>
+              <a:ext uri="{FF2B5EF4-FFF2-40B4-BE49-F238E27FC236}">
+                <a16:creationId xmlns:a16="http://schemas.microsoft.com/office/drawing/2014/main" id="{C8B60DF3-6801-E8F6-7824-D74C85F059F3}"/>
+              </a:ext>
+            </a:extLst>
+          </p:cNvPr>
+          <p:cNvSpPr>
+            <a:spLocks noGrp="1"/>
+          </p:cNvSpPr>
+          <p:nvPr>
+            <p:ph idx="1"/>
+          </p:nvPr>
+        </p:nvSpPr>
+        <p:spPr>
+          <a:xfrm>
+            <a:off x="677334" y="2160589"/>
+            <a:ext cx="4665631" cy="3880773"/>
+          </a:xfrm>
+        </p:spPr>
+        <p:txBody>
+          <a:bodyPr/>
+          <a:lstStyle/>
+          <a:p>
+            <a:r>
+              <a:rPr lang="en-US" dirty="0" err="1"/>
+              <a:t>Eğitilmiş</a:t>
+            </a:r>
+            <a:r>
+              <a:rPr lang="en-US" dirty="0"/>
+              <a:t> </a:t>
+            </a:r>
+            <a:r>
+              <a:rPr lang="en-US" dirty="0" err="1"/>
+              <a:t>modelin</a:t>
+            </a:r>
+            <a:r>
+              <a:rPr lang="en-US" dirty="0"/>
+              <a:t> (‘mlp_standard.h5’) yeni </a:t>
+            </a:r>
+            <a:r>
+              <a:rPr lang="en-US" dirty="0" err="1"/>
+              <a:t>bir</a:t>
+            </a:r>
+            <a:r>
+              <a:rPr lang="en-US" dirty="0"/>
+              <a:t> </a:t>
+            </a:r>
+            <a:r>
+              <a:rPr lang="en-US" dirty="0" err="1"/>
+              <a:t>veri</a:t>
+            </a:r>
+            <a:r>
+              <a:rPr lang="en-US" dirty="0"/>
+              <a:t> </a:t>
+            </a:r>
+            <a:r>
+              <a:rPr lang="en-US" dirty="0" err="1"/>
+              <a:t>noktası</a:t>
+            </a:r>
+            <a:r>
+              <a:rPr lang="en-US" dirty="0"/>
+              <a:t> </a:t>
+            </a:r>
+            <a:r>
+              <a:rPr lang="en-US" dirty="0" err="1"/>
+              <a:t>üzerinde</a:t>
+            </a:r>
+            <a:r>
+              <a:rPr lang="en-US" dirty="0"/>
+              <a:t> </a:t>
+            </a:r>
+            <a:r>
+              <a:rPr lang="en-US" dirty="0" err="1"/>
+              <a:t>tahmin</a:t>
+            </a:r>
+            <a:r>
+              <a:rPr lang="en-US" dirty="0"/>
+              <a:t> </a:t>
+            </a:r>
+            <a:r>
+              <a:rPr lang="en-US" dirty="0" err="1"/>
+              <a:t>yapmak</a:t>
+            </a:r>
+            <a:r>
+              <a:rPr lang="en-US" dirty="0"/>
+              <a:t> </a:t>
+            </a:r>
+            <a:r>
+              <a:rPr lang="en-US" dirty="0" err="1"/>
+              <a:t>için</a:t>
+            </a:r>
+            <a:r>
+              <a:rPr lang="en-US" dirty="0"/>
+              <a:t> </a:t>
+            </a:r>
+            <a:r>
+              <a:rPr lang="en-US" dirty="0" err="1"/>
+              <a:t>kullanımı</a:t>
+            </a:r>
+            <a:endParaRPr lang="en-US" dirty="0"/>
+          </a:p>
+        </p:txBody>
+      </p:sp>
+      <p:pic>
+        <p:nvPicPr>
+          <p:cNvPr id="5" name="Resim 4">
+            <a:extLst>
+              <a:ext uri="{FF2B5EF4-FFF2-40B4-BE49-F238E27FC236}">
+                <a16:creationId xmlns:a16="http://schemas.microsoft.com/office/drawing/2014/main" id="{49EE40A5-70EC-946C-7CA9-464ED3B583FF}"/>
+              </a:ext>
+            </a:extLst>
+          </p:cNvPr>
+          <p:cNvPicPr>
+            <a:picLocks noChangeAspect="1"/>
+          </p:cNvPicPr>
+          <p:nvPr/>
+        </p:nvPicPr>
+        <p:blipFill>
+          <a:blip r:embed="rId2"/>
+          <a:stretch>
+            <a:fillRect/>
+          </a:stretch>
+        </p:blipFill>
+        <p:spPr>
+          <a:xfrm>
+            <a:off x="5936811" y="2381472"/>
+            <a:ext cx="4944165" cy="3439005"/>
+          </a:xfrm>
+          <a:prstGeom prst="rect">
+            <a:avLst/>
+          </a:prstGeom>
+        </p:spPr>
+      </p:pic>
+    </p:spTree>
+    <p:extLst>
+      <p:ext uri="{BB962C8B-B14F-4D97-AF65-F5344CB8AC3E}">
+        <p14:creationId xmlns:p14="http://schemas.microsoft.com/office/powerpoint/2010/main" val="2187445794"/>
+      </p:ext>
+    </p:extLst>
+  </p:cSld>
+  <p:clrMapOvr>
+    <a:masterClrMapping/>
+  </p:clrMapOvr>
+</p:sld>
+</file>
+
+<file path=ppt/slides/slide27.xml><?xml version="1.0" encoding="utf-8"?>
+<p:sld xmlns:a="http://schemas.openxmlformats.org/drawingml/2006/main" xmlns:r="http://schemas.openxmlformats.org/officeDocument/2006/relationships" xmlns:p="http://schemas.openxmlformats.org/presentationml/2006/main">
+  <p:cSld>
+    <p:spTree>
+      <p:nvGrpSpPr>
+        <p:cNvPr id="1" name="">
+          <a:extLst>
+            <a:ext uri="{FF2B5EF4-FFF2-40B4-BE49-F238E27FC236}">
+              <a16:creationId xmlns:a16="http://schemas.microsoft.com/office/drawing/2014/main" id="{E5B9FA32-EF3C-3EDF-7CBF-275FB9803E57}"/>
+            </a:ext>
+          </a:extLst>
+        </p:cNvPr>
+        <p:cNvGrpSpPr/>
+        <p:nvPr/>
+      </p:nvGrpSpPr>
+      <p:grpSpPr>
+        <a:xfrm>
+          <a:off x="0" y="0"/>
+          <a:ext cx="0" cy="0"/>
+          <a:chOff x="0" y="0"/>
+          <a:chExt cx="0" cy="0"/>
+        </a:xfrm>
+      </p:grpSpPr>
+      <p:sp>
+        <p:nvSpPr>
+          <p:cNvPr id="2" name="Başlık 1">
+            <a:extLst>
+              <a:ext uri="{FF2B5EF4-FFF2-40B4-BE49-F238E27FC236}">
+                <a16:creationId xmlns:a16="http://schemas.microsoft.com/office/drawing/2014/main" id="{1FCDFA73-F6EA-1528-D18F-4119DCAC04EF}"/>
+              </a:ext>
+            </a:extLst>
+          </p:cNvPr>
+          <p:cNvSpPr>
+            <a:spLocks noGrp="1"/>
+          </p:cNvSpPr>
+          <p:nvPr>
+            <p:ph type="title"/>
+          </p:nvPr>
+        </p:nvSpPr>
+        <p:spPr/>
+        <p:txBody>
+          <a:bodyPr/>
+          <a:lstStyle/>
+          <a:p>
+            <a:r>
+              <a:rPr lang="en-US" dirty="0" err="1"/>
+              <a:t>Kullanılan</a:t>
+            </a:r>
+            <a:r>
+              <a:rPr lang="en-US" dirty="0"/>
+              <a:t> </a:t>
+            </a:r>
+            <a:r>
+              <a:rPr lang="en-US" dirty="0" err="1"/>
+              <a:t>kütüphaneler</a:t>
+            </a:r>
+            <a:endParaRPr lang="en-US" dirty="0"/>
+          </a:p>
+        </p:txBody>
+      </p:sp>
+      <p:sp>
+        <p:nvSpPr>
+          <p:cNvPr id="3" name="İçerik Yer Tutucusu 2">
+            <a:extLst>
+              <a:ext uri="{FF2B5EF4-FFF2-40B4-BE49-F238E27FC236}">
+                <a16:creationId xmlns:a16="http://schemas.microsoft.com/office/drawing/2014/main" id="{B4CC6944-0237-BCA0-408C-F8EB47C5FD48}"/>
+              </a:ext>
+            </a:extLst>
+          </p:cNvPr>
+          <p:cNvSpPr>
+            <a:spLocks noGrp="1"/>
+          </p:cNvSpPr>
+          <p:nvPr>
+            <p:ph idx="1"/>
+          </p:nvPr>
+        </p:nvSpPr>
+        <p:spPr>
+          <a:xfrm>
+            <a:off x="381500" y="2357812"/>
+            <a:ext cx="2783042" cy="1927317"/>
+          </a:xfrm>
+        </p:spPr>
+        <p:txBody>
+          <a:bodyPr/>
+          <a:lstStyle/>
+          <a:p>
+            <a:r>
+              <a:rPr lang="en-US" dirty="0"/>
+              <a:t>Temel </a:t>
+            </a:r>
+            <a:r>
+              <a:rPr lang="en-US" dirty="0" err="1"/>
+              <a:t>kütüphaneler</a:t>
+            </a:r>
+            <a:endParaRPr lang="en-US" dirty="0"/>
+          </a:p>
+          <a:p>
+            <a:pPr lvl="1"/>
+            <a:r>
+              <a:rPr lang="en-US" dirty="0"/>
+              <a:t>pandas 1.5.0</a:t>
+            </a:r>
+          </a:p>
+          <a:p>
+            <a:pPr lvl="1"/>
+            <a:r>
+              <a:rPr lang="en-US" dirty="0" err="1"/>
+              <a:t>numpy</a:t>
+            </a:r>
+            <a:r>
+              <a:rPr lang="en-US" dirty="0"/>
+              <a:t> 1.23.0</a:t>
+            </a:r>
+          </a:p>
+          <a:p>
+            <a:pPr lvl="1"/>
+            <a:r>
+              <a:rPr lang="en-US" dirty="0"/>
+              <a:t>scikit-learn 1.2.0 </a:t>
+            </a:r>
+          </a:p>
+        </p:txBody>
+      </p:sp>
+      <p:sp>
+        <p:nvSpPr>
+          <p:cNvPr id="6" name="İçerik Yer Tutucusu 2">
+            <a:extLst>
+              <a:ext uri="{FF2B5EF4-FFF2-40B4-BE49-F238E27FC236}">
+                <a16:creationId xmlns:a16="http://schemas.microsoft.com/office/drawing/2014/main" id="{C12CDC1A-1253-8294-0C38-14FF0B4B055D}"/>
+              </a:ext>
+            </a:extLst>
+          </p:cNvPr>
+          <p:cNvSpPr txBox="1">
+            <a:spLocks/>
+          </p:cNvSpPr>
+          <p:nvPr/>
+        </p:nvSpPr>
+        <p:spPr>
+          <a:xfrm>
+            <a:off x="3584147" y="2357812"/>
+            <a:ext cx="2783042" cy="1927317"/>
+          </a:xfrm>
+          <a:prstGeom prst="rect">
+            <a:avLst/>
+          </a:prstGeom>
+        </p:spPr>
+        <p:txBody>
+          <a:bodyPr vert="horz" lIns="91440" tIns="45720" rIns="91440" bIns="45720" rtlCol="0">
+            <a:normAutofit/>
+          </a:bodyPr>
+          <a:lstStyle>
+            <a:lvl1pPr marL="342900" indent="-342900" algn="l" defTabSz="457200" rtl="0" eaLnBrk="1" latinLnBrk="0" hangingPunct="1">
+              <a:spcBef>
+                <a:spcPts val="1000"/>
+              </a:spcBef>
+              <a:spcAft>
+                <a:spcPts val="0"/>
+              </a:spcAft>
+              <a:buClr>
+                <a:schemeClr val="accent1"/>
+              </a:buClr>
+              <a:buSzPct val="80000"/>
+              <a:buFont typeface="Wingdings 3" charset="2"/>
+              <a:buChar char=""/>
+              <a:defRPr sz="1800" kern="1200">
+                <a:solidFill>
+                  <a:schemeClr val="tx1">
+                    <a:lumMod val="75000"/>
+                    <a:lumOff val="25000"/>
+                  </a:schemeClr>
+                </a:solidFill>
+                <a:latin typeface="+mn-lt"/>
+                <a:ea typeface="+mn-ea"/>
+                <a:cs typeface="+mn-cs"/>
+              </a:defRPr>
+            </a:lvl1pPr>
+            <a:lvl2pPr marL="742950" indent="-285750" algn="l" defTabSz="457200" rtl="0" eaLnBrk="1" latinLnBrk="0" hangingPunct="1">
+              <a:spcBef>
+                <a:spcPts val="1000"/>
+              </a:spcBef>
+              <a:spcAft>
+                <a:spcPts val="0"/>
+              </a:spcAft>
+              <a:buClr>
+                <a:schemeClr val="accent1"/>
+              </a:buClr>
+              <a:buSzPct val="80000"/>
+              <a:buFont typeface="Wingdings 3" charset="2"/>
+              <a:buChar char=""/>
+              <a:defRPr sz="1600" kern="1200">
+                <a:solidFill>
+                  <a:schemeClr val="tx1">
+                    <a:lumMod val="75000"/>
+                    <a:lumOff val="25000"/>
+                  </a:schemeClr>
+                </a:solidFill>
+                <a:latin typeface="+mn-lt"/>
+                <a:ea typeface="+mn-ea"/>
+                <a:cs typeface="+mn-cs"/>
+              </a:defRPr>
+            </a:lvl2pPr>
+            <a:lvl3pPr marL="1143000" indent="-228600" algn="l" defTabSz="457200" rtl="0" eaLnBrk="1" latinLnBrk="0" hangingPunct="1">
+              <a:spcBef>
+                <a:spcPts val="1000"/>
+              </a:spcBef>
+              <a:spcAft>
+                <a:spcPts val="0"/>
+              </a:spcAft>
+              <a:buClr>
+                <a:schemeClr val="accent1"/>
+              </a:buClr>
+              <a:buSzPct val="80000"/>
+              <a:buFont typeface="Wingdings 3" charset="2"/>
+              <a:buChar char=""/>
+              <a:defRPr sz="1400" kern="1200">
+                <a:solidFill>
+                  <a:schemeClr val="tx1">
+                    <a:lumMod val="75000"/>
+                    <a:lumOff val="25000"/>
+                  </a:schemeClr>
+                </a:solidFill>
+                <a:latin typeface="+mn-lt"/>
+                <a:ea typeface="+mn-ea"/>
+                <a:cs typeface="+mn-cs"/>
+              </a:defRPr>
+            </a:lvl3pPr>
+            <a:lvl4pPr marL="1600200" indent="-228600" algn="l" defTabSz="457200" rtl="0" eaLnBrk="1" latinLnBrk="0" hangingPunct="1">
+              <a:spcBef>
+                <a:spcPts val="1000"/>
+              </a:spcBef>
+              <a:spcAft>
+                <a:spcPts val="0"/>
+              </a:spcAft>
+              <a:buClr>
+                <a:schemeClr val="accent1"/>
+              </a:buClr>
+              <a:buSzPct val="80000"/>
+              <a:buFont typeface="Wingdings 3" charset="2"/>
+              <a:buChar char=""/>
+              <a:defRPr sz="1200" kern="1200">
+                <a:solidFill>
+                  <a:schemeClr val="tx1">
+                    <a:lumMod val="75000"/>
+                    <a:lumOff val="25000"/>
+                  </a:schemeClr>
+                </a:solidFill>
+                <a:latin typeface="+mn-lt"/>
+                <a:ea typeface="+mn-ea"/>
+                <a:cs typeface="+mn-cs"/>
+              </a:defRPr>
+            </a:lvl4pPr>
+            <a:lvl5pPr marL="2057400" indent="-228600" algn="l" defTabSz="457200" rtl="0" eaLnBrk="1" latinLnBrk="0" hangingPunct="1">
+              <a:spcBef>
+                <a:spcPts val="1000"/>
+              </a:spcBef>
+              <a:spcAft>
+                <a:spcPts val="0"/>
+              </a:spcAft>
+              <a:buClr>
+                <a:schemeClr val="accent1"/>
+              </a:buClr>
+              <a:buSzPct val="80000"/>
+              <a:buFont typeface="Wingdings 3" charset="2"/>
+              <a:buChar char=""/>
+              <a:defRPr sz="1200" kern="1200">
+                <a:solidFill>
+                  <a:schemeClr val="tx1">
+                    <a:lumMod val="75000"/>
+                    <a:lumOff val="25000"/>
+                  </a:schemeClr>
+                </a:solidFill>
+                <a:latin typeface="+mn-lt"/>
+                <a:ea typeface="+mn-ea"/>
+                <a:cs typeface="+mn-cs"/>
+              </a:defRPr>
+            </a:lvl5pPr>
+            <a:lvl6pPr marL="2514600" indent="-228600" algn="l" defTabSz="457200" rtl="0" eaLnBrk="1" latinLnBrk="0" hangingPunct="1">
+              <a:spcBef>
+                <a:spcPts val="1000"/>
+              </a:spcBef>
+              <a:spcAft>
+                <a:spcPts val="0"/>
+              </a:spcAft>
+              <a:buClr>
+                <a:schemeClr val="accent1"/>
+              </a:buClr>
+              <a:buSzPct val="80000"/>
+              <a:buFont typeface="Wingdings 3" charset="2"/>
+              <a:buChar char=""/>
+              <a:defRPr sz="1200" kern="1200">
+                <a:solidFill>
+                  <a:schemeClr val="tx1">
+                    <a:lumMod val="75000"/>
+                    <a:lumOff val="25000"/>
+                  </a:schemeClr>
+                </a:solidFill>
+                <a:latin typeface="+mn-lt"/>
+                <a:ea typeface="+mn-ea"/>
+                <a:cs typeface="+mn-cs"/>
+              </a:defRPr>
+            </a:lvl6pPr>
+            <a:lvl7pPr marL="2971800" indent="-228600" algn="l" defTabSz="457200" rtl="0" eaLnBrk="1" latinLnBrk="0" hangingPunct="1">
+              <a:spcBef>
+                <a:spcPts val="1000"/>
+              </a:spcBef>
+              <a:spcAft>
+                <a:spcPts val="0"/>
+              </a:spcAft>
+              <a:buClr>
+                <a:schemeClr val="accent1"/>
+              </a:buClr>
+              <a:buSzPct val="80000"/>
+              <a:buFont typeface="Wingdings 3" charset="2"/>
+              <a:buChar char=""/>
+              <a:defRPr sz="1200" kern="1200">
+                <a:solidFill>
+                  <a:schemeClr val="tx1">
+                    <a:lumMod val="75000"/>
+                    <a:lumOff val="25000"/>
+                  </a:schemeClr>
+                </a:solidFill>
+                <a:latin typeface="+mn-lt"/>
+                <a:ea typeface="+mn-ea"/>
+                <a:cs typeface="+mn-cs"/>
+              </a:defRPr>
+            </a:lvl7pPr>
+            <a:lvl8pPr marL="3429000" indent="-228600" algn="l" defTabSz="457200" rtl="0" eaLnBrk="1" latinLnBrk="0" hangingPunct="1">
+              <a:spcBef>
+                <a:spcPts val="1000"/>
+              </a:spcBef>
+              <a:spcAft>
+                <a:spcPts val="0"/>
+              </a:spcAft>
+              <a:buClr>
+                <a:schemeClr val="accent1"/>
+              </a:buClr>
+              <a:buSzPct val="80000"/>
+              <a:buFont typeface="Wingdings 3" charset="2"/>
+              <a:buChar char=""/>
+              <a:defRPr sz="1200" kern="1200">
+                <a:solidFill>
+                  <a:schemeClr val="tx1">
+                    <a:lumMod val="75000"/>
+                    <a:lumOff val="25000"/>
+                  </a:schemeClr>
+                </a:solidFill>
+                <a:latin typeface="+mn-lt"/>
+                <a:ea typeface="+mn-ea"/>
+                <a:cs typeface="+mn-cs"/>
+              </a:defRPr>
+            </a:lvl8pPr>
+            <a:lvl9pPr marL="3886200" indent="-228600" algn="l" defTabSz="457200" rtl="0" eaLnBrk="1" latinLnBrk="0" hangingPunct="1">
+              <a:spcBef>
+                <a:spcPts val="1000"/>
+              </a:spcBef>
+              <a:spcAft>
+                <a:spcPts val="0"/>
+              </a:spcAft>
+              <a:buClr>
+                <a:schemeClr val="accent1"/>
+              </a:buClr>
+              <a:buSzPct val="80000"/>
+              <a:buFont typeface="Wingdings 3" charset="2"/>
+              <a:buChar char=""/>
+              <a:defRPr sz="1200" kern="1200">
+                <a:solidFill>
+                  <a:schemeClr val="tx1">
+                    <a:lumMod val="75000"/>
+                    <a:lumOff val="25000"/>
+                  </a:schemeClr>
+                </a:solidFill>
+                <a:latin typeface="+mn-lt"/>
+                <a:ea typeface="+mn-ea"/>
+                <a:cs typeface="+mn-cs"/>
+              </a:defRPr>
+            </a:lvl9pPr>
+          </a:lstStyle>
+          <a:p>
+            <a:r>
+              <a:rPr lang="en-US" dirty="0"/>
+              <a:t>ML &amp; DL</a:t>
+            </a:r>
+          </a:p>
+          <a:p>
+            <a:pPr lvl="1"/>
+            <a:r>
+              <a:rPr lang="en-US" dirty="0" err="1"/>
+              <a:t>tensorflow</a:t>
+            </a:r>
+            <a:r>
+              <a:rPr lang="en-US" dirty="0"/>
+              <a:t> 2.12.0 </a:t>
+            </a:r>
+          </a:p>
+          <a:p>
+            <a:pPr lvl="1"/>
+            <a:r>
+              <a:rPr lang="en-US" dirty="0" err="1"/>
+              <a:t>keras</a:t>
+            </a:r>
+            <a:r>
+              <a:rPr lang="en-US" dirty="0"/>
+              <a:t> 2.12.0</a:t>
+            </a:r>
+          </a:p>
+          <a:p>
+            <a:pPr lvl="1"/>
+            <a:r>
+              <a:rPr lang="en-US" dirty="0" err="1"/>
+              <a:t>xgboost</a:t>
+            </a:r>
+            <a:r>
+              <a:rPr lang="en-US" dirty="0"/>
+              <a:t> 1.7.0</a:t>
+            </a:r>
+          </a:p>
+        </p:txBody>
+      </p:sp>
+      <p:sp>
+        <p:nvSpPr>
+          <p:cNvPr id="7" name="İçerik Yer Tutucusu 2">
+            <a:extLst>
+              <a:ext uri="{FF2B5EF4-FFF2-40B4-BE49-F238E27FC236}">
+                <a16:creationId xmlns:a16="http://schemas.microsoft.com/office/drawing/2014/main" id="{12AD9E4F-7361-60F5-5B87-B8FCEDC9409B}"/>
+              </a:ext>
+            </a:extLst>
+          </p:cNvPr>
+          <p:cNvSpPr txBox="1">
+            <a:spLocks/>
+          </p:cNvSpPr>
+          <p:nvPr/>
+        </p:nvSpPr>
+        <p:spPr>
+          <a:xfrm>
+            <a:off x="7006417" y="2357811"/>
+            <a:ext cx="3625723" cy="1927317"/>
+          </a:xfrm>
+          <a:prstGeom prst="rect">
+            <a:avLst/>
+          </a:prstGeom>
+        </p:spPr>
+        <p:txBody>
+          <a:bodyPr vert="horz" lIns="91440" tIns="45720" rIns="91440" bIns="45720" rtlCol="0">
+            <a:normAutofit/>
+          </a:bodyPr>
+          <a:lstStyle>
+            <a:lvl1pPr marL="342900" indent="-342900" algn="l" defTabSz="457200" rtl="0" eaLnBrk="1" latinLnBrk="0" hangingPunct="1">
+              <a:spcBef>
+                <a:spcPts val="1000"/>
+              </a:spcBef>
+              <a:spcAft>
+                <a:spcPts val="0"/>
+              </a:spcAft>
+              <a:buClr>
+                <a:schemeClr val="accent1"/>
+              </a:buClr>
+              <a:buSzPct val="80000"/>
+              <a:buFont typeface="Wingdings 3" charset="2"/>
+              <a:buChar char=""/>
+              <a:defRPr sz="1800" kern="1200">
+                <a:solidFill>
+                  <a:schemeClr val="tx1">
+                    <a:lumMod val="75000"/>
+                    <a:lumOff val="25000"/>
+                  </a:schemeClr>
+                </a:solidFill>
+                <a:latin typeface="+mn-lt"/>
+                <a:ea typeface="+mn-ea"/>
+                <a:cs typeface="+mn-cs"/>
+              </a:defRPr>
+            </a:lvl1pPr>
+            <a:lvl2pPr marL="742950" indent="-285750" algn="l" defTabSz="457200" rtl="0" eaLnBrk="1" latinLnBrk="0" hangingPunct="1">
+              <a:spcBef>
+                <a:spcPts val="1000"/>
+              </a:spcBef>
+              <a:spcAft>
+                <a:spcPts val="0"/>
+              </a:spcAft>
+              <a:buClr>
+                <a:schemeClr val="accent1"/>
+              </a:buClr>
+              <a:buSzPct val="80000"/>
+              <a:buFont typeface="Wingdings 3" charset="2"/>
+              <a:buChar char=""/>
+              <a:defRPr sz="1600" kern="1200">
+                <a:solidFill>
+                  <a:schemeClr val="tx1">
+                    <a:lumMod val="75000"/>
+                    <a:lumOff val="25000"/>
+                  </a:schemeClr>
+                </a:solidFill>
+                <a:latin typeface="+mn-lt"/>
+                <a:ea typeface="+mn-ea"/>
+                <a:cs typeface="+mn-cs"/>
+              </a:defRPr>
+            </a:lvl2pPr>
+            <a:lvl3pPr marL="1143000" indent="-228600" algn="l" defTabSz="457200" rtl="0" eaLnBrk="1" latinLnBrk="0" hangingPunct="1">
+              <a:spcBef>
+                <a:spcPts val="1000"/>
+              </a:spcBef>
+              <a:spcAft>
+                <a:spcPts val="0"/>
+              </a:spcAft>
+              <a:buClr>
+                <a:schemeClr val="accent1"/>
+              </a:buClr>
+              <a:buSzPct val="80000"/>
+              <a:buFont typeface="Wingdings 3" charset="2"/>
+              <a:buChar char=""/>
+              <a:defRPr sz="1400" kern="1200">
+                <a:solidFill>
+                  <a:schemeClr val="tx1">
+                    <a:lumMod val="75000"/>
+                    <a:lumOff val="25000"/>
+                  </a:schemeClr>
+                </a:solidFill>
+                <a:latin typeface="+mn-lt"/>
+                <a:ea typeface="+mn-ea"/>
+                <a:cs typeface="+mn-cs"/>
+              </a:defRPr>
+            </a:lvl3pPr>
+            <a:lvl4pPr marL="1600200" indent="-228600" algn="l" defTabSz="457200" rtl="0" eaLnBrk="1" latinLnBrk="0" hangingPunct="1">
+              <a:spcBef>
+                <a:spcPts val="1000"/>
+              </a:spcBef>
+              <a:spcAft>
+                <a:spcPts val="0"/>
+              </a:spcAft>
+              <a:buClr>
+                <a:schemeClr val="accent1"/>
+              </a:buClr>
+              <a:buSzPct val="80000"/>
+              <a:buFont typeface="Wingdings 3" charset="2"/>
+              <a:buChar char=""/>
+              <a:defRPr sz="1200" kern="1200">
+                <a:solidFill>
+                  <a:schemeClr val="tx1">
+                    <a:lumMod val="75000"/>
+                    <a:lumOff val="25000"/>
+                  </a:schemeClr>
+                </a:solidFill>
+                <a:latin typeface="+mn-lt"/>
+                <a:ea typeface="+mn-ea"/>
+                <a:cs typeface="+mn-cs"/>
+              </a:defRPr>
+            </a:lvl4pPr>
+            <a:lvl5pPr marL="2057400" indent="-228600" algn="l" defTabSz="457200" rtl="0" eaLnBrk="1" latinLnBrk="0" hangingPunct="1">
+              <a:spcBef>
+                <a:spcPts val="1000"/>
+              </a:spcBef>
+              <a:spcAft>
+                <a:spcPts val="0"/>
+              </a:spcAft>
+              <a:buClr>
+                <a:schemeClr val="accent1"/>
+              </a:buClr>
+              <a:buSzPct val="80000"/>
+              <a:buFont typeface="Wingdings 3" charset="2"/>
+              <a:buChar char=""/>
+              <a:defRPr sz="1200" kern="1200">
+                <a:solidFill>
+                  <a:schemeClr val="tx1">
+                    <a:lumMod val="75000"/>
+                    <a:lumOff val="25000"/>
+                  </a:schemeClr>
+                </a:solidFill>
+                <a:latin typeface="+mn-lt"/>
+                <a:ea typeface="+mn-ea"/>
+                <a:cs typeface="+mn-cs"/>
+              </a:defRPr>
+            </a:lvl5pPr>
+            <a:lvl6pPr marL="2514600" indent="-228600" algn="l" defTabSz="457200" rtl="0" eaLnBrk="1" latinLnBrk="0" hangingPunct="1">
+              <a:spcBef>
+                <a:spcPts val="1000"/>
+              </a:spcBef>
+              <a:spcAft>
+                <a:spcPts val="0"/>
+              </a:spcAft>
+              <a:buClr>
+                <a:schemeClr val="accent1"/>
+              </a:buClr>
+              <a:buSzPct val="80000"/>
+              <a:buFont typeface="Wingdings 3" charset="2"/>
+              <a:buChar char=""/>
+              <a:defRPr sz="1200" kern="1200">
+                <a:solidFill>
+                  <a:schemeClr val="tx1">
+                    <a:lumMod val="75000"/>
+                    <a:lumOff val="25000"/>
+                  </a:schemeClr>
+                </a:solidFill>
+                <a:latin typeface="+mn-lt"/>
+                <a:ea typeface="+mn-ea"/>
+                <a:cs typeface="+mn-cs"/>
+              </a:defRPr>
+            </a:lvl6pPr>
+            <a:lvl7pPr marL="2971800" indent="-228600" algn="l" defTabSz="457200" rtl="0" eaLnBrk="1" latinLnBrk="0" hangingPunct="1">
+              <a:spcBef>
+                <a:spcPts val="1000"/>
+              </a:spcBef>
+              <a:spcAft>
+                <a:spcPts val="0"/>
+              </a:spcAft>
+              <a:buClr>
+                <a:schemeClr val="accent1"/>
+              </a:buClr>
+              <a:buSzPct val="80000"/>
+              <a:buFont typeface="Wingdings 3" charset="2"/>
+              <a:buChar char=""/>
+              <a:defRPr sz="1200" kern="1200">
+                <a:solidFill>
+                  <a:schemeClr val="tx1">
+                    <a:lumMod val="75000"/>
+                    <a:lumOff val="25000"/>
+                  </a:schemeClr>
+                </a:solidFill>
+                <a:latin typeface="+mn-lt"/>
+                <a:ea typeface="+mn-ea"/>
+                <a:cs typeface="+mn-cs"/>
+              </a:defRPr>
+            </a:lvl7pPr>
+            <a:lvl8pPr marL="3429000" indent="-228600" algn="l" defTabSz="457200" rtl="0" eaLnBrk="1" latinLnBrk="0" hangingPunct="1">
+              <a:spcBef>
+                <a:spcPts val="1000"/>
+              </a:spcBef>
+              <a:spcAft>
+                <a:spcPts val="0"/>
+              </a:spcAft>
+              <a:buClr>
+                <a:schemeClr val="accent1"/>
+              </a:buClr>
+              <a:buSzPct val="80000"/>
+              <a:buFont typeface="Wingdings 3" charset="2"/>
+              <a:buChar char=""/>
+              <a:defRPr sz="1200" kern="1200">
+                <a:solidFill>
+                  <a:schemeClr val="tx1">
+                    <a:lumMod val="75000"/>
+                    <a:lumOff val="25000"/>
+                  </a:schemeClr>
+                </a:solidFill>
+                <a:latin typeface="+mn-lt"/>
+                <a:ea typeface="+mn-ea"/>
+                <a:cs typeface="+mn-cs"/>
+              </a:defRPr>
+            </a:lvl8pPr>
+            <a:lvl9pPr marL="3886200" indent="-228600" algn="l" defTabSz="457200" rtl="0" eaLnBrk="1" latinLnBrk="0" hangingPunct="1">
+              <a:spcBef>
+                <a:spcPts val="1000"/>
+              </a:spcBef>
+              <a:spcAft>
+                <a:spcPts val="0"/>
+              </a:spcAft>
+              <a:buClr>
+                <a:schemeClr val="accent1"/>
+              </a:buClr>
+              <a:buSzPct val="80000"/>
+              <a:buFont typeface="Wingdings 3" charset="2"/>
+              <a:buChar char=""/>
+              <a:defRPr sz="1200" kern="1200">
+                <a:solidFill>
+                  <a:schemeClr val="tx1">
+                    <a:lumMod val="75000"/>
+                    <a:lumOff val="25000"/>
+                  </a:schemeClr>
+                </a:solidFill>
+                <a:latin typeface="+mn-lt"/>
+                <a:ea typeface="+mn-ea"/>
+                <a:cs typeface="+mn-cs"/>
+              </a:defRPr>
+            </a:lvl9pPr>
+          </a:lstStyle>
+          <a:p>
+            <a:r>
+              <a:rPr lang="en-US" dirty="0"/>
+              <a:t>Özel </a:t>
+            </a:r>
+            <a:r>
+              <a:rPr lang="en-US" dirty="0" err="1"/>
+              <a:t>araçlar</a:t>
+            </a:r>
+            <a:endParaRPr lang="en-US" dirty="0"/>
+          </a:p>
+          <a:p>
+            <a:pPr lvl="1"/>
+            <a:r>
+              <a:rPr lang="en-US" dirty="0" err="1"/>
+              <a:t>cantera</a:t>
+            </a:r>
+            <a:r>
+              <a:rPr lang="en-US" dirty="0"/>
+              <a:t> 2.6.0 (</a:t>
+            </a:r>
+            <a:r>
+              <a:rPr lang="en-US" dirty="0" err="1"/>
+              <a:t>simülasyon</a:t>
+            </a:r>
+            <a:r>
+              <a:rPr lang="en-US" dirty="0"/>
+              <a:t>)</a:t>
+            </a:r>
+          </a:p>
+          <a:p>
+            <a:pPr lvl="1"/>
+            <a:r>
+              <a:rPr lang="en-US" dirty="0" err="1"/>
+              <a:t>pyodbc</a:t>
+            </a:r>
+            <a:r>
+              <a:rPr lang="en-US" dirty="0"/>
+              <a:t> (</a:t>
+            </a:r>
+            <a:r>
+              <a:rPr lang="en-US" dirty="0" err="1"/>
+              <a:t>veritabanı</a:t>
+            </a:r>
+            <a:r>
+              <a:rPr lang="en-US" dirty="0"/>
+              <a:t>)</a:t>
+            </a:r>
+          </a:p>
+          <a:p>
+            <a:pPr lvl="1"/>
+            <a:r>
+              <a:rPr lang="en-US" dirty="0"/>
+              <a:t>matplotlib/seaborn</a:t>
+            </a:r>
+          </a:p>
+        </p:txBody>
+      </p:sp>
+      <p:pic>
+        <p:nvPicPr>
+          <p:cNvPr id="9" name="Resim 8">
+            <a:extLst>
+              <a:ext uri="{FF2B5EF4-FFF2-40B4-BE49-F238E27FC236}">
+                <a16:creationId xmlns:a16="http://schemas.microsoft.com/office/drawing/2014/main" id="{6E4E9FEF-FA3A-291A-86D0-F9479EB71748}"/>
+              </a:ext>
+            </a:extLst>
+          </p:cNvPr>
+          <p:cNvPicPr>
+            <a:picLocks noChangeAspect="1"/>
+          </p:cNvPicPr>
+          <p:nvPr/>
+        </p:nvPicPr>
+        <p:blipFill>
+          <a:blip r:embed="rId2"/>
+          <a:stretch>
+            <a:fillRect/>
+          </a:stretch>
+        </p:blipFill>
+        <p:spPr>
+          <a:xfrm>
+            <a:off x="2208269" y="4418423"/>
+            <a:ext cx="5534797" cy="800212"/>
+          </a:xfrm>
+          <a:prstGeom prst="rect">
+            <a:avLst/>
+          </a:prstGeom>
+        </p:spPr>
+      </p:pic>
+    </p:spTree>
+    <p:extLst>
+      <p:ext uri="{BB962C8B-B14F-4D97-AF65-F5344CB8AC3E}">
+        <p14:creationId xmlns:p14="http://schemas.microsoft.com/office/powerpoint/2010/main" val="3225447560"/>
+      </p:ext>
+    </p:extLst>
+  </p:cSld>
+  <p:clrMapOvr>
+    <a:masterClrMapping/>
+  </p:clrMapOvr>
+</p:sld>
+</file>
+
+<file path=ppt/slides/slide28.xml><?xml version="1.0" encoding="utf-8"?>
 <p:sld xmlns:a="http://schemas.openxmlformats.org/drawingml/2006/main" xmlns:r="http://schemas.openxmlformats.org/officeDocument/2006/relationships" xmlns:p="http://schemas.openxmlformats.org/presentationml/2006/main">
   <p:cSld>
     <p:spTree>
@@ -9941,23 +13532,23 @@
           <a:p>
             <a:r>
               <a:rPr lang="en-US" dirty="0" err="1"/>
-              <a:t>Piroliz</a:t>
-            </a:r>
-            <a:r>
-              <a:rPr lang="en-US" dirty="0"/>
-              <a:t> </a:t>
-            </a:r>
-            <a:r>
-              <a:rPr lang="en-US" dirty="0" err="1"/>
-              <a:t>Verisi</a:t>
-            </a:r>
-            <a:r>
-              <a:rPr lang="en-US" dirty="0"/>
-              <a:t> </a:t>
-            </a:r>
-            <a:r>
-              <a:rPr lang="en-US" dirty="0" err="1"/>
-              <a:t>Toplama</a:t>
+              <a:t>Klasik</a:t>
+            </a:r>
+            <a:r>
+              <a:rPr lang="en-US" dirty="0"/>
+              <a:t> </a:t>
+            </a:r>
+            <a:r>
+              <a:rPr lang="en-US" dirty="0" err="1"/>
+              <a:t>makine</a:t>
+            </a:r>
+            <a:r>
+              <a:rPr lang="en-US" dirty="0"/>
+              <a:t> </a:t>
+            </a:r>
+            <a:r>
+              <a:rPr lang="en-US" dirty="0" err="1"/>
+              <a:t>öğrenmesi</a:t>
             </a:r>
             <a:endParaRPr lang="en-US" dirty="0"/>
           </a:p>
@@ -10091,207 +13682,7 @@
 </p:sld>
 </file>
 
-<file path=ppt/slides/slide19.xml><?xml version="1.0" encoding="utf-8"?>
-<p:sld xmlns:a="http://schemas.openxmlformats.org/drawingml/2006/main" xmlns:r="http://schemas.openxmlformats.org/officeDocument/2006/relationships" xmlns:p="http://schemas.openxmlformats.org/presentationml/2006/main">
-  <p:cSld>
-    <p:spTree>
-      <p:nvGrpSpPr>
-        <p:cNvPr id="1" name="">
-          <a:extLst>
-            <a:ext uri="{FF2B5EF4-FFF2-40B4-BE49-F238E27FC236}">
-              <a16:creationId xmlns:a16="http://schemas.microsoft.com/office/drawing/2014/main" id="{F52F7226-0FDD-11E9-50D2-CFF8D2C969E6}"/>
-            </a:ext>
-          </a:extLst>
-        </p:cNvPr>
-        <p:cNvGrpSpPr/>
-        <p:nvPr/>
-      </p:nvGrpSpPr>
-      <p:grpSpPr>
-        <a:xfrm>
-          <a:off x="0" y="0"/>
-          <a:ext cx="0" cy="0"/>
-          <a:chOff x="0" y="0"/>
-          <a:chExt cx="0" cy="0"/>
-        </a:xfrm>
-      </p:grpSpPr>
-      <p:sp>
-        <p:nvSpPr>
-          <p:cNvPr id="2" name="Title 1">
-            <a:extLst>
-              <a:ext uri="{FF2B5EF4-FFF2-40B4-BE49-F238E27FC236}">
-                <a16:creationId xmlns:a16="http://schemas.microsoft.com/office/drawing/2014/main" id="{3406F7B5-2539-F346-C6DE-063DD1F60FD9}"/>
-              </a:ext>
-            </a:extLst>
-          </p:cNvPr>
-          <p:cNvSpPr>
-            <a:spLocks noGrp="1"/>
-          </p:cNvSpPr>
-          <p:nvPr>
-            <p:ph type="title"/>
-          </p:nvPr>
-        </p:nvSpPr>
-        <p:spPr>
-          <a:xfrm>
-            <a:off x="677333" y="609600"/>
-            <a:ext cx="9694832" cy="1320800"/>
-          </a:xfrm>
-        </p:spPr>
-        <p:txBody>
-          <a:bodyPr/>
-          <a:lstStyle/>
-          <a:p>
-            <a:r>
-              <a:rPr lang="en-US" dirty="0" err="1"/>
-              <a:t>Piroliz</a:t>
-            </a:r>
-            <a:r>
-              <a:rPr lang="en-US" dirty="0"/>
-              <a:t> </a:t>
-            </a:r>
-            <a:r>
-              <a:rPr lang="en-US" dirty="0" err="1"/>
-              <a:t>Verisi</a:t>
-            </a:r>
-            <a:r>
-              <a:rPr lang="en-US" dirty="0"/>
-              <a:t> </a:t>
-            </a:r>
-            <a:r>
-              <a:rPr lang="en-US" dirty="0" err="1"/>
-              <a:t>Toplama</a:t>
-            </a:r>
-            <a:endParaRPr lang="en-US" dirty="0"/>
-          </a:p>
-        </p:txBody>
-      </p:sp>
-      <p:pic>
-        <p:nvPicPr>
-          <p:cNvPr id="5" name="Resim 4">
-            <a:extLst>
-              <a:ext uri="{FF2B5EF4-FFF2-40B4-BE49-F238E27FC236}">
-                <a16:creationId xmlns:a16="http://schemas.microsoft.com/office/drawing/2014/main" id="{59A83441-64A1-C4EE-821B-C1F865B2F081}"/>
-              </a:ext>
-            </a:extLst>
-          </p:cNvPr>
-          <p:cNvPicPr>
-            <a:picLocks noChangeAspect="1"/>
-          </p:cNvPicPr>
-          <p:nvPr/>
-        </p:nvPicPr>
-        <p:blipFill>
-          <a:blip r:embed="rId2"/>
-          <a:stretch>
-            <a:fillRect/>
-          </a:stretch>
-        </p:blipFill>
-        <p:spPr>
-          <a:xfrm>
-            <a:off x="1059184" y="2515172"/>
-            <a:ext cx="7706949" cy="3948381"/>
-          </a:xfrm>
-          <a:prstGeom prst="rect">
-            <a:avLst/>
-          </a:prstGeom>
-        </p:spPr>
-      </p:pic>
-    </p:spTree>
-    <p:extLst>
-      <p:ext uri="{BB962C8B-B14F-4D97-AF65-F5344CB8AC3E}">
-        <p14:creationId xmlns:p14="http://schemas.microsoft.com/office/powerpoint/2010/main" val="1903128238"/>
-      </p:ext>
-    </p:extLst>
-  </p:cSld>
-  <p:clrMapOvr>
-    <a:masterClrMapping/>
-  </p:clrMapOvr>
-</p:sld>
-</file>
-
-<file path=ppt/slides/slide2.xml><?xml version="1.0" encoding="utf-8"?>
-<p:sld xmlns:a="http://schemas.openxmlformats.org/drawingml/2006/main" xmlns:r="http://schemas.openxmlformats.org/officeDocument/2006/relationships" xmlns:p="http://schemas.openxmlformats.org/presentationml/2006/main">
-  <p:cSld>
-    <p:spTree>
-      <p:nvGrpSpPr>
-        <p:cNvPr id="1" name="">
-          <a:extLst>
-            <a:ext uri="{FF2B5EF4-FFF2-40B4-BE49-F238E27FC236}">
-              <a16:creationId xmlns:a16="http://schemas.microsoft.com/office/drawing/2014/main" id="{7153E03A-0C6F-1770-1FDB-EF2712A42D4F}"/>
-            </a:ext>
-          </a:extLst>
-        </p:cNvPr>
-        <p:cNvGrpSpPr/>
-        <p:nvPr/>
-      </p:nvGrpSpPr>
-      <p:grpSpPr>
-        <a:xfrm>
-          <a:off x="0" y="0"/>
-          <a:ext cx="0" cy="0"/>
-          <a:chOff x="0" y="0"/>
-          <a:chExt cx="0" cy="0"/>
-        </a:xfrm>
-      </p:grpSpPr>
-      <p:sp>
-        <p:nvSpPr>
-          <p:cNvPr id="2" name="Title 1">
-            <a:extLst>
-              <a:ext uri="{FF2B5EF4-FFF2-40B4-BE49-F238E27FC236}">
-                <a16:creationId xmlns:a16="http://schemas.microsoft.com/office/drawing/2014/main" id="{BDDCA809-6406-46C2-B92A-68ED3F2F31AC}"/>
-              </a:ext>
-            </a:extLst>
-          </p:cNvPr>
-          <p:cNvSpPr>
-            <a:spLocks noGrp="1"/>
-          </p:cNvSpPr>
-          <p:nvPr>
-            <p:ph type="title"/>
-          </p:nvPr>
-        </p:nvSpPr>
-        <p:spPr>
-          <a:xfrm>
-            <a:off x="677334" y="609599"/>
-            <a:ext cx="5042148" cy="4410635"/>
-          </a:xfrm>
-        </p:spPr>
-        <p:txBody>
-          <a:bodyPr>
-            <a:normAutofit/>
-          </a:bodyPr>
-          <a:lstStyle/>
-          <a:p>
-            <a:pPr>
-              <a:lnSpc>
-                <a:spcPct val="150000"/>
-              </a:lnSpc>
-            </a:pPr>
-            <a:r>
-              <a:rPr lang="en-US" sz="4000" dirty="0" err="1"/>
-              <a:t>Tezin</a:t>
-            </a:r>
-            <a:br>
-              <a:rPr lang="en-US" sz="4000" dirty="0"/>
-            </a:br>
-            <a:r>
-              <a:rPr lang="en-US" sz="4000" dirty="0" err="1"/>
-              <a:t>Amacı</a:t>
-            </a:r>
-            <a:endParaRPr lang="en-US" sz="4000" dirty="0"/>
-          </a:p>
-        </p:txBody>
-      </p:sp>
-    </p:spTree>
-    <p:extLst>
-      <p:ext uri="{BB962C8B-B14F-4D97-AF65-F5344CB8AC3E}">
-        <p14:creationId xmlns:p14="http://schemas.microsoft.com/office/powerpoint/2010/main" val="691481800"/>
-      </p:ext>
-    </p:extLst>
-  </p:cSld>
-  <p:clrMapOvr>
-    <a:masterClrMapping/>
-  </p:clrMapOvr>
-</p:sld>
-</file>
-
-<file path=ppt/slides/slide20.xml><?xml version="1.0" encoding="utf-8"?>
+<file path=ppt/slides/slide29.xml><?xml version="1.0" encoding="utf-8"?>
 <p:sld xmlns:a="http://schemas.openxmlformats.org/drawingml/2006/main" xmlns:r="http://schemas.openxmlformats.org/officeDocument/2006/relationships" xmlns:p="http://schemas.openxmlformats.org/presentationml/2006/main">
   <p:cSld>
     <p:spTree>
@@ -10341,24 +13732,12 @@
           <a:lstStyle/>
           <a:p>
             <a:r>
-              <a:rPr lang="en-US" dirty="0" err="1"/>
-              <a:t>Piroliz</a:t>
-            </a:r>
-            <a:r>
-              <a:rPr lang="en-US" dirty="0"/>
-              <a:t> </a:t>
-            </a:r>
-            <a:r>
-              <a:rPr lang="en-US" dirty="0" err="1"/>
-              <a:t>Verisi</a:t>
-            </a:r>
-            <a:r>
-              <a:rPr lang="en-US" dirty="0"/>
-              <a:t> </a:t>
-            </a:r>
-            <a:r>
-              <a:rPr lang="en-US" dirty="0" err="1"/>
-              <a:t>Toplama</a:t>
+              <a:rPr lang="en-US" dirty="0"/>
+              <a:t>Derin </a:t>
+            </a:r>
+            <a:r>
+              <a:rPr lang="en-US" dirty="0" err="1"/>
+              <a:t>öğrenme</a:t>
             </a:r>
             <a:endParaRPr lang="en-US" dirty="0"/>
           </a:p>
@@ -10407,7 +13786,111 @@
 </p:sld>
 </file>
 
-<file path=ppt/slides/slide21.xml><?xml version="1.0" encoding="utf-8"?>
+<file path=ppt/slides/slide3.xml><?xml version="1.0" encoding="utf-8"?>
+<p:sld xmlns:a="http://schemas.openxmlformats.org/drawingml/2006/main" xmlns:r="http://schemas.openxmlformats.org/officeDocument/2006/relationships" xmlns:p="http://schemas.openxmlformats.org/presentationml/2006/main">
+  <p:cSld>
+    <p:spTree>
+      <p:nvGrpSpPr>
+        <p:cNvPr id="1" name="">
+          <a:extLst>
+            <a:ext uri="{FF2B5EF4-FFF2-40B4-BE49-F238E27FC236}">
+              <a16:creationId xmlns:a16="http://schemas.microsoft.com/office/drawing/2014/main" id="{47B8BBD9-82FC-640D-7A8D-1FBE8617E601}"/>
+            </a:ext>
+          </a:extLst>
+        </p:cNvPr>
+        <p:cNvGrpSpPr/>
+        <p:nvPr/>
+      </p:nvGrpSpPr>
+      <p:grpSpPr>
+        <a:xfrm>
+          <a:off x="0" y="0"/>
+          <a:ext cx="0" cy="0"/>
+          <a:chOff x="0" y="0"/>
+          <a:chExt cx="0" cy="0"/>
+        </a:xfrm>
+      </p:grpSpPr>
+      <p:sp>
+        <p:nvSpPr>
+          <p:cNvPr id="2" name="Title 1">
+            <a:extLst>
+              <a:ext uri="{FF2B5EF4-FFF2-40B4-BE49-F238E27FC236}">
+                <a16:creationId xmlns:a16="http://schemas.microsoft.com/office/drawing/2014/main" id="{FB8249D9-C5EA-696B-CC2F-DFA90750164E}"/>
+              </a:ext>
+            </a:extLst>
+          </p:cNvPr>
+          <p:cNvSpPr>
+            <a:spLocks noGrp="1"/>
+          </p:cNvSpPr>
+          <p:nvPr>
+            <p:ph type="title"/>
+          </p:nvPr>
+        </p:nvSpPr>
+        <p:spPr>
+          <a:xfrm>
+            <a:off x="677334" y="609599"/>
+            <a:ext cx="5042148" cy="4410635"/>
+          </a:xfrm>
+        </p:spPr>
+        <p:txBody>
+          <a:bodyPr>
+            <a:normAutofit/>
+          </a:bodyPr>
+          <a:lstStyle/>
+          <a:p>
+            <a:pPr>
+              <a:lnSpc>
+                <a:spcPct val="150000"/>
+              </a:lnSpc>
+            </a:pPr>
+            <a:r>
+              <a:rPr lang="en-US" sz="4000" dirty="0" err="1"/>
+              <a:t>Önceki</a:t>
+            </a:r>
+            <a:r>
+              <a:rPr lang="en-US" sz="4000" dirty="0"/>
+              <a:t> </a:t>
+            </a:r>
+            <a:r>
+              <a:rPr lang="en-US" sz="4000" dirty="0" err="1"/>
+              <a:t>Dönemlerde</a:t>
+            </a:r>
+            <a:r>
+              <a:rPr lang="en-US" sz="4000" dirty="0"/>
+              <a:t> </a:t>
+            </a:r>
+            <a:r>
+              <a:rPr lang="en-US" sz="4000" dirty="0" err="1"/>
+              <a:t>Yapılan</a:t>
+            </a:r>
+            <a:r>
+              <a:rPr lang="en-US" sz="4000" dirty="0"/>
+              <a:t> </a:t>
+            </a:r>
+            <a:br>
+              <a:rPr lang="en-US" sz="4000" dirty="0"/>
+            </a:br>
+            <a:r>
+              <a:rPr lang="en-US" sz="4000" dirty="0" err="1"/>
+              <a:t>Çalışmalar</a:t>
+            </a:r>
+            <a:endParaRPr lang="en-US" sz="4000" dirty="0"/>
+          </a:p>
+        </p:txBody>
+      </p:sp>
+    </p:spTree>
+    <p:extLst>
+      <p:ext uri="{BB962C8B-B14F-4D97-AF65-F5344CB8AC3E}">
+        <p14:creationId xmlns:p14="http://schemas.microsoft.com/office/powerpoint/2010/main" val="3984759758"/>
+      </p:ext>
+    </p:extLst>
+  </p:cSld>
+  <p:clrMapOvr>
+    <a:masterClrMapping/>
+  </p:clrMapOvr>
+</p:sld>
+</file>
+
+<file path=ppt/slides/slide30.xml><?xml version="1.0" encoding="utf-8"?>
 <p:sld xmlns:a="http://schemas.openxmlformats.org/drawingml/2006/main" xmlns:r="http://schemas.openxmlformats.org/officeDocument/2006/relationships" xmlns:p="http://schemas.openxmlformats.org/presentationml/2006/main">
   <p:cSld>
     <p:spTree>
@@ -10458,23 +13941,15 @@
           <a:p>
             <a:r>
               <a:rPr lang="en-US" dirty="0" err="1"/>
-              <a:t>Piroliz</a:t>
-            </a:r>
-            <a:r>
-              <a:rPr lang="en-US" dirty="0"/>
-              <a:t> </a:t>
-            </a:r>
-            <a:r>
-              <a:rPr lang="en-US" dirty="0" err="1"/>
-              <a:t>Verisi</a:t>
-            </a:r>
-            <a:r>
-              <a:rPr lang="en-US" dirty="0"/>
-              <a:t> </a:t>
-            </a:r>
-            <a:r>
-              <a:rPr lang="en-US" dirty="0" err="1"/>
-              <a:t>Toplama</a:t>
+              <a:t>Kollektik</a:t>
+            </a:r>
+            <a:r>
+              <a:rPr lang="en-US" dirty="0"/>
+              <a:t> </a:t>
+            </a:r>
+            <a:r>
+              <a:rPr lang="en-US" dirty="0" err="1"/>
+              <a:t>öğrenme</a:t>
             </a:r>
             <a:endParaRPr lang="en-US" dirty="0"/>
           </a:p>
@@ -10887,7 +14362,7 @@
 </p:sld>
 </file>
 
-<file path=ppt/slides/slide22.xml><?xml version="1.0" encoding="utf-8"?>
+<file path=ppt/slides/slide31.xml><?xml version="1.0" encoding="utf-8"?>
 <p:sld xmlns:a="http://schemas.openxmlformats.org/drawingml/2006/main" xmlns:r="http://schemas.openxmlformats.org/officeDocument/2006/relationships" xmlns:p="http://schemas.openxmlformats.org/presentationml/2006/main">
   <p:cSld>
     <p:spTree>
@@ -10938,23 +14413,7 @@
           <a:p>
             <a:r>
               <a:rPr lang="en-US" dirty="0" err="1"/>
-              <a:t>Piroliz</a:t>
-            </a:r>
-            <a:r>
-              <a:rPr lang="en-US" dirty="0"/>
-              <a:t> </a:t>
-            </a:r>
-            <a:r>
-              <a:rPr lang="en-US" dirty="0" err="1"/>
-              <a:t>Verisi</a:t>
-            </a:r>
-            <a:r>
-              <a:rPr lang="en-US" dirty="0"/>
-              <a:t> </a:t>
-            </a:r>
-            <a:r>
-              <a:rPr lang="en-US" dirty="0" err="1"/>
-              <a:t>Toplama</a:t>
+              <a:t>Sonuçlar</a:t>
             </a:r>
             <a:endParaRPr lang="en-US" dirty="0"/>
           </a:p>
@@ -11003,7 +14462,107 @@
 </p:sld>
 </file>
 
-<file path=ppt/slides/slide23.xml><?xml version="1.0" encoding="utf-8"?>
+<file path=ppt/slides/slide32.xml><?xml version="1.0" encoding="utf-8"?>
+<p:sld xmlns:a="http://schemas.openxmlformats.org/drawingml/2006/main" xmlns:r="http://schemas.openxmlformats.org/officeDocument/2006/relationships" xmlns:p="http://schemas.openxmlformats.org/presentationml/2006/main">
+  <p:cSld>
+    <p:spTree>
+      <p:nvGrpSpPr>
+        <p:cNvPr id="1" name="">
+          <a:extLst>
+            <a:ext uri="{FF2B5EF4-FFF2-40B4-BE49-F238E27FC236}">
+              <a16:creationId xmlns:a16="http://schemas.microsoft.com/office/drawing/2014/main" id="{26682785-82F6-3FE3-8BC7-D3C2415292B0}"/>
+            </a:ext>
+          </a:extLst>
+        </p:cNvPr>
+        <p:cNvGrpSpPr/>
+        <p:nvPr/>
+      </p:nvGrpSpPr>
+      <p:grpSpPr>
+        <a:xfrm>
+          <a:off x="0" y="0"/>
+          <a:ext cx="0" cy="0"/>
+          <a:chOff x="0" y="0"/>
+          <a:chExt cx="0" cy="0"/>
+        </a:xfrm>
+      </p:grpSpPr>
+      <p:sp>
+        <p:nvSpPr>
+          <p:cNvPr id="2" name="Title 1">
+            <a:extLst>
+              <a:ext uri="{FF2B5EF4-FFF2-40B4-BE49-F238E27FC236}">
+                <a16:creationId xmlns:a16="http://schemas.microsoft.com/office/drawing/2014/main" id="{CD96EAB8-8FC7-0F36-0A08-FFCB58EC1D91}"/>
+              </a:ext>
+            </a:extLst>
+          </p:cNvPr>
+          <p:cNvSpPr>
+            <a:spLocks noGrp="1"/>
+          </p:cNvSpPr>
+          <p:nvPr>
+            <p:ph type="title"/>
+          </p:nvPr>
+        </p:nvSpPr>
+        <p:spPr>
+          <a:xfrm>
+            <a:off x="677333" y="609600"/>
+            <a:ext cx="9694832" cy="1320800"/>
+          </a:xfrm>
+        </p:spPr>
+        <p:txBody>
+          <a:bodyPr/>
+          <a:lstStyle/>
+          <a:p>
+            <a:r>
+              <a:rPr lang="en-US" dirty="0" err="1"/>
+              <a:t>Sonuçlar</a:t>
+            </a:r>
+            <a:endParaRPr lang="en-US" dirty="0"/>
+          </a:p>
+        </p:txBody>
+      </p:sp>
+      <p:pic>
+        <p:nvPicPr>
+          <p:cNvPr id="5" name="Resim 4">
+            <a:extLst>
+              <a:ext uri="{FF2B5EF4-FFF2-40B4-BE49-F238E27FC236}">
+                <a16:creationId xmlns:a16="http://schemas.microsoft.com/office/drawing/2014/main" id="{953A8CF1-FC96-553C-D83B-F7BB5179B9F4}"/>
+              </a:ext>
+            </a:extLst>
+          </p:cNvPr>
+          <p:cNvPicPr>
+            <a:picLocks noChangeAspect="1"/>
+          </p:cNvPicPr>
+          <p:nvPr/>
+        </p:nvPicPr>
+        <p:blipFill>
+          <a:blip r:embed="rId2"/>
+          <a:stretch>
+            <a:fillRect/>
+          </a:stretch>
+        </p:blipFill>
+        <p:spPr>
+          <a:xfrm>
+            <a:off x="1089212" y="2136556"/>
+            <a:ext cx="8871074" cy="3798080"/>
+          </a:xfrm>
+          <a:prstGeom prst="rect">
+            <a:avLst/>
+          </a:prstGeom>
+        </p:spPr>
+      </p:pic>
+    </p:spTree>
+    <p:extLst>
+      <p:ext uri="{BB962C8B-B14F-4D97-AF65-F5344CB8AC3E}">
+        <p14:creationId xmlns:p14="http://schemas.microsoft.com/office/powerpoint/2010/main" val="1179936788"/>
+      </p:ext>
+    </p:extLst>
+  </p:cSld>
+  <p:clrMapOvr>
+    <a:masterClrMapping/>
+  </p:clrMapOvr>
+</p:sld>
+</file>
+
+<file path=ppt/slides/slide33.xml><?xml version="1.0" encoding="utf-8"?>
 <p:sld xmlns:a="http://schemas.openxmlformats.org/drawingml/2006/main" xmlns:r="http://schemas.openxmlformats.org/officeDocument/2006/relationships" xmlns:p="http://schemas.openxmlformats.org/presentationml/2006/main">
   <p:cSld>
     <p:spTree>
@@ -11054,23 +14613,23 @@
           <a:p>
             <a:r>
               <a:rPr lang="en-US" dirty="0" err="1"/>
-              <a:t>Piroliz</a:t>
-            </a:r>
-            <a:r>
-              <a:rPr lang="en-US" dirty="0"/>
-              <a:t> </a:t>
-            </a:r>
-            <a:r>
-              <a:rPr lang="en-US" dirty="0" err="1"/>
-              <a:t>Verisi</a:t>
-            </a:r>
-            <a:r>
-              <a:rPr lang="en-US" dirty="0"/>
-              <a:t> </a:t>
-            </a:r>
-            <a:r>
-              <a:rPr lang="en-US" dirty="0" err="1"/>
-              <a:t>Toplama</a:t>
+              <a:t>Özellik</a:t>
+            </a:r>
+            <a:r>
+              <a:rPr lang="en-US" dirty="0"/>
+              <a:t> </a:t>
+            </a:r>
+            <a:r>
+              <a:rPr lang="en-US" dirty="0" err="1"/>
+              <a:t>önem</a:t>
+            </a:r>
+            <a:r>
+              <a:rPr lang="en-US" dirty="0"/>
+              <a:t> </a:t>
+            </a:r>
+            <a:r>
+              <a:rPr lang="en-US" dirty="0" err="1"/>
+              <a:t>analizi</a:t>
             </a:r>
             <a:endParaRPr lang="en-US" dirty="0"/>
           </a:p>
@@ -11119,123 +14678,7 @@
 </p:sld>
 </file>
 
-<file path=ppt/slides/slide24.xml><?xml version="1.0" encoding="utf-8"?>
-<p:sld xmlns:a="http://schemas.openxmlformats.org/drawingml/2006/main" xmlns:r="http://schemas.openxmlformats.org/officeDocument/2006/relationships" xmlns:p="http://schemas.openxmlformats.org/presentationml/2006/main">
-  <p:cSld>
-    <p:spTree>
-      <p:nvGrpSpPr>
-        <p:cNvPr id="1" name="">
-          <a:extLst>
-            <a:ext uri="{FF2B5EF4-FFF2-40B4-BE49-F238E27FC236}">
-              <a16:creationId xmlns:a16="http://schemas.microsoft.com/office/drawing/2014/main" id="{26682785-82F6-3FE3-8BC7-D3C2415292B0}"/>
-            </a:ext>
-          </a:extLst>
-        </p:cNvPr>
-        <p:cNvGrpSpPr/>
-        <p:nvPr/>
-      </p:nvGrpSpPr>
-      <p:grpSpPr>
-        <a:xfrm>
-          <a:off x="0" y="0"/>
-          <a:ext cx="0" cy="0"/>
-          <a:chOff x="0" y="0"/>
-          <a:chExt cx="0" cy="0"/>
-        </a:xfrm>
-      </p:grpSpPr>
-      <p:sp>
-        <p:nvSpPr>
-          <p:cNvPr id="2" name="Title 1">
-            <a:extLst>
-              <a:ext uri="{FF2B5EF4-FFF2-40B4-BE49-F238E27FC236}">
-                <a16:creationId xmlns:a16="http://schemas.microsoft.com/office/drawing/2014/main" id="{CD96EAB8-8FC7-0F36-0A08-FFCB58EC1D91}"/>
-              </a:ext>
-            </a:extLst>
-          </p:cNvPr>
-          <p:cNvSpPr>
-            <a:spLocks noGrp="1"/>
-          </p:cNvSpPr>
-          <p:nvPr>
-            <p:ph type="title"/>
-          </p:nvPr>
-        </p:nvSpPr>
-        <p:spPr>
-          <a:xfrm>
-            <a:off x="677333" y="609600"/>
-            <a:ext cx="9694832" cy="1320800"/>
-          </a:xfrm>
-        </p:spPr>
-        <p:txBody>
-          <a:bodyPr/>
-          <a:lstStyle/>
-          <a:p>
-            <a:r>
-              <a:rPr lang="en-US" dirty="0" err="1"/>
-              <a:t>Piroliz</a:t>
-            </a:r>
-            <a:r>
-              <a:rPr lang="en-US" dirty="0"/>
-              <a:t> </a:t>
-            </a:r>
-            <a:r>
-              <a:rPr lang="en-US" dirty="0" err="1"/>
-              <a:t>Verisi</a:t>
-            </a:r>
-            <a:r>
-              <a:rPr lang="en-US" dirty="0"/>
-              <a:t> </a:t>
-            </a:r>
-            <a:r>
-              <a:rPr lang="en-US" dirty="0" err="1"/>
-              <a:t>Toplama</a:t>
-            </a:r>
-            <a:endParaRPr lang="en-US" dirty="0"/>
-          </a:p>
-        </p:txBody>
-      </p:sp>
-      <p:pic>
-        <p:nvPicPr>
-          <p:cNvPr id="5" name="Resim 4">
-            <a:extLst>
-              <a:ext uri="{FF2B5EF4-FFF2-40B4-BE49-F238E27FC236}">
-                <a16:creationId xmlns:a16="http://schemas.microsoft.com/office/drawing/2014/main" id="{953A8CF1-FC96-553C-D83B-F7BB5179B9F4}"/>
-              </a:ext>
-            </a:extLst>
-          </p:cNvPr>
-          <p:cNvPicPr>
-            <a:picLocks noChangeAspect="1"/>
-          </p:cNvPicPr>
-          <p:nvPr/>
-        </p:nvPicPr>
-        <p:blipFill>
-          <a:blip r:embed="rId2"/>
-          <a:stretch>
-            <a:fillRect/>
-          </a:stretch>
-        </p:blipFill>
-        <p:spPr>
-          <a:xfrm>
-            <a:off x="1089212" y="2136556"/>
-            <a:ext cx="8871074" cy="3798080"/>
-          </a:xfrm>
-          <a:prstGeom prst="rect">
-            <a:avLst/>
-          </a:prstGeom>
-        </p:spPr>
-      </p:pic>
-    </p:spTree>
-    <p:extLst>
-      <p:ext uri="{BB962C8B-B14F-4D97-AF65-F5344CB8AC3E}">
-        <p14:creationId xmlns:p14="http://schemas.microsoft.com/office/powerpoint/2010/main" val="1179936788"/>
-      </p:ext>
-    </p:extLst>
-  </p:cSld>
-  <p:clrMapOvr>
-    <a:masterClrMapping/>
-  </p:clrMapOvr>
-</p:sld>
-</file>
-
-<file path=ppt/slides/slide25.xml><?xml version="1.0" encoding="utf-8"?>
+<file path=ppt/slides/slide34.xml><?xml version="1.0" encoding="utf-8"?>
 <p:sld xmlns:a="http://schemas.openxmlformats.org/drawingml/2006/main" xmlns:r="http://schemas.openxmlformats.org/officeDocument/2006/relationships" xmlns:p="http://schemas.openxmlformats.org/presentationml/2006/main">
   <p:cSld>
     <p:spTree>
@@ -11286,23 +14729,15 @@
           <a:p>
             <a:r>
               <a:rPr lang="en-US" dirty="0" err="1"/>
-              <a:t>Piroliz</a:t>
-            </a:r>
-            <a:r>
-              <a:rPr lang="en-US" dirty="0"/>
-              <a:t> </a:t>
-            </a:r>
-            <a:r>
-              <a:rPr lang="en-US" dirty="0" err="1"/>
-              <a:t>Verisi</a:t>
-            </a:r>
-            <a:r>
-              <a:rPr lang="en-US" dirty="0"/>
-              <a:t> </a:t>
-            </a:r>
-            <a:r>
-              <a:rPr lang="en-US" dirty="0" err="1"/>
-              <a:t>Toplama</a:t>
+              <a:t>Özet</a:t>
+            </a:r>
+            <a:r>
+              <a:rPr lang="en-US" dirty="0"/>
+              <a:t> </a:t>
+            </a:r>
+            <a:r>
+              <a:rPr lang="en-US" dirty="0" err="1"/>
+              <a:t>akış</a:t>
             </a:r>
             <a:endParaRPr lang="en-US" dirty="0"/>
           </a:p>
@@ -11388,7 +14823,7 @@
 </p:sld>
 </file>
 
-<file path=ppt/slides/slide26.xml><?xml version="1.0" encoding="utf-8"?>
+<file path=ppt/slides/slide35.xml><?xml version="1.0" encoding="utf-8"?>
 <p:sld xmlns:a="http://schemas.openxmlformats.org/drawingml/2006/main" xmlns:r="http://schemas.openxmlformats.org/officeDocument/2006/relationships" xmlns:p="http://schemas.openxmlformats.org/presentationml/2006/main">
   <p:cSld>
     <p:spTree>
@@ -11439,23 +14874,15 @@
           <a:p>
             <a:r>
               <a:rPr lang="en-US" dirty="0" err="1"/>
-              <a:t>Piroliz</a:t>
-            </a:r>
-            <a:r>
-              <a:rPr lang="en-US" dirty="0"/>
-              <a:t> </a:t>
-            </a:r>
-            <a:r>
-              <a:rPr lang="en-US" dirty="0" err="1"/>
-              <a:t>Verisi</a:t>
-            </a:r>
-            <a:r>
-              <a:rPr lang="en-US" dirty="0"/>
-              <a:t> </a:t>
-            </a:r>
-            <a:r>
-              <a:rPr lang="en-US" dirty="0" err="1"/>
-              <a:t>Toplama</a:t>
+              <a:t>Özet</a:t>
+            </a:r>
+            <a:r>
+              <a:rPr lang="en-US" dirty="0"/>
+              <a:t> </a:t>
+            </a:r>
+            <a:r>
+              <a:rPr lang="en-US" dirty="0" err="1"/>
+              <a:t>akış</a:t>
             </a:r>
             <a:endParaRPr lang="en-US" dirty="0"/>
           </a:p>
@@ -11504,7 +14931,581 @@
 </p:sld>
 </file>
 
-<file path=ppt/slides/slide27.xml><?xml version="1.0" encoding="utf-8"?>
+<file path=ppt/slides/slide36.xml><?xml version="1.0" encoding="utf-8"?>
+<p:sld xmlns:a="http://schemas.openxmlformats.org/drawingml/2006/main" xmlns:r="http://schemas.openxmlformats.org/officeDocument/2006/relationships" xmlns:p="http://schemas.openxmlformats.org/presentationml/2006/main">
+  <p:cSld>
+    <p:spTree>
+      <p:nvGrpSpPr>
+        <p:cNvPr id="1" name=""/>
+        <p:cNvGrpSpPr/>
+        <p:nvPr/>
+      </p:nvGrpSpPr>
+      <p:grpSpPr>
+        <a:xfrm>
+          <a:off x="0" y="0"/>
+          <a:ext cx="0" cy="0"/>
+          <a:chOff x="0" y="0"/>
+          <a:chExt cx="0" cy="0"/>
+        </a:xfrm>
+      </p:grpSpPr>
+      <p:sp>
+        <p:nvSpPr>
+          <p:cNvPr id="2" name="Başlık 1">
+            <a:extLst>
+              <a:ext uri="{FF2B5EF4-FFF2-40B4-BE49-F238E27FC236}">
+                <a16:creationId xmlns:a16="http://schemas.microsoft.com/office/drawing/2014/main" id="{9980DBBD-D4D7-5D71-CE7C-F4048084B211}"/>
+              </a:ext>
+            </a:extLst>
+          </p:cNvPr>
+          <p:cNvSpPr>
+            <a:spLocks noGrp="1"/>
+          </p:cNvSpPr>
+          <p:nvPr>
+            <p:ph type="title"/>
+          </p:nvPr>
+        </p:nvSpPr>
+        <p:spPr>
+          <a:xfrm>
+            <a:off x="677334" y="609600"/>
+            <a:ext cx="8596668" cy="1039906"/>
+          </a:xfrm>
+        </p:spPr>
+        <p:txBody>
+          <a:bodyPr/>
+          <a:lstStyle/>
+          <a:p>
+            <a:r>
+              <a:rPr lang="en-US" dirty="0" err="1"/>
+              <a:t>Çalışmanın</a:t>
+            </a:r>
+            <a:r>
+              <a:rPr lang="en-US" dirty="0"/>
+              <a:t> </a:t>
+            </a:r>
+            <a:r>
+              <a:rPr lang="en-US" dirty="0" err="1"/>
+              <a:t>kalan</a:t>
+            </a:r>
+            <a:r>
+              <a:rPr lang="en-US" dirty="0"/>
+              <a:t> </a:t>
+            </a:r>
+            <a:r>
+              <a:rPr lang="en-US" dirty="0" err="1"/>
+              <a:t>kısmında</a:t>
+            </a:r>
+            <a:r>
+              <a:rPr lang="en-US" dirty="0"/>
+              <a:t> </a:t>
+            </a:r>
+            <a:r>
+              <a:rPr lang="en-US" dirty="0" err="1"/>
+              <a:t>yapılacaklar</a:t>
+            </a:r>
+            <a:endParaRPr lang="en-US" dirty="0"/>
+          </a:p>
+        </p:txBody>
+      </p:sp>
+      <p:sp>
+        <p:nvSpPr>
+          <p:cNvPr id="3" name="İçerik Yer Tutucusu 2">
+            <a:extLst>
+              <a:ext uri="{FF2B5EF4-FFF2-40B4-BE49-F238E27FC236}">
+                <a16:creationId xmlns:a16="http://schemas.microsoft.com/office/drawing/2014/main" id="{9A8228CF-E292-A706-BD22-6CB4F22AD688}"/>
+              </a:ext>
+            </a:extLst>
+          </p:cNvPr>
+          <p:cNvSpPr>
+            <a:spLocks noGrp="1"/>
+          </p:cNvSpPr>
+          <p:nvPr>
+            <p:ph idx="1"/>
+          </p:nvPr>
+        </p:nvSpPr>
+        <p:spPr>
+          <a:xfrm>
+            <a:off x="677334" y="1891553"/>
+            <a:ext cx="8596668" cy="4356847"/>
+          </a:xfrm>
+        </p:spPr>
+        <p:txBody>
+          <a:bodyPr>
+            <a:normAutofit lnSpcReduction="10000"/>
+          </a:bodyPr>
+          <a:lstStyle/>
+          <a:p>
+            <a:pPr>
+              <a:lnSpc>
+                <a:spcPct val="150000"/>
+              </a:lnSpc>
+            </a:pPr>
+            <a:r>
+              <a:rPr lang="en-US" dirty="0" err="1"/>
+              <a:t>Geliştirilen</a:t>
+            </a:r>
+            <a:r>
+              <a:rPr lang="en-US" dirty="0"/>
+              <a:t> </a:t>
+            </a:r>
+            <a:r>
+              <a:rPr lang="en-US" dirty="0" err="1"/>
+              <a:t>derin</a:t>
+            </a:r>
+            <a:r>
+              <a:rPr lang="en-US" dirty="0"/>
+              <a:t> </a:t>
+            </a:r>
+            <a:r>
+              <a:rPr lang="en-US" dirty="0" err="1"/>
+              <a:t>öğrenme</a:t>
+            </a:r>
+            <a:r>
+              <a:rPr lang="en-US" dirty="0"/>
+              <a:t> </a:t>
+            </a:r>
+            <a:r>
+              <a:rPr lang="en-US" dirty="0" err="1"/>
+              <a:t>modelinin</a:t>
+            </a:r>
+            <a:r>
+              <a:rPr lang="en-US" dirty="0"/>
+              <a:t> (R² = 0.863) </a:t>
+            </a:r>
+            <a:r>
+              <a:rPr lang="en-US" dirty="0" err="1"/>
+              <a:t>endüstriyel</a:t>
+            </a:r>
+            <a:r>
+              <a:rPr lang="en-US" dirty="0"/>
+              <a:t> </a:t>
+            </a:r>
+            <a:r>
+              <a:rPr lang="en-US" dirty="0" err="1"/>
+              <a:t>uygulamaya</a:t>
+            </a:r>
+            <a:r>
+              <a:rPr lang="en-US" dirty="0"/>
+              <a:t> </a:t>
+            </a:r>
+            <a:r>
+              <a:rPr lang="en-US" dirty="0" err="1"/>
+              <a:t>dönüştürülmesi</a:t>
+            </a:r>
+            <a:r>
+              <a:rPr lang="en-US" dirty="0"/>
+              <a:t> </a:t>
+            </a:r>
+            <a:r>
+              <a:rPr lang="en-US" dirty="0" err="1"/>
+              <a:t>hedeflenmektedir</a:t>
+            </a:r>
+            <a:r>
+              <a:rPr lang="en-US" dirty="0"/>
+              <a:t>. </a:t>
+            </a:r>
+          </a:p>
+          <a:p>
+            <a:pPr>
+              <a:lnSpc>
+                <a:spcPct val="150000"/>
+              </a:lnSpc>
+            </a:pPr>
+            <a:r>
+              <a:rPr lang="en-US" dirty="0"/>
+              <a:t>Bu </a:t>
+            </a:r>
+            <a:r>
+              <a:rPr lang="en-US" dirty="0" err="1"/>
+              <a:t>kapsamda</a:t>
+            </a:r>
+            <a:r>
+              <a:rPr lang="en-US" dirty="0"/>
+              <a:t>, </a:t>
+            </a:r>
+            <a:r>
+              <a:rPr lang="en-US" dirty="0" err="1"/>
+              <a:t>ölçülen</a:t>
+            </a:r>
+            <a:r>
+              <a:rPr lang="en-US" dirty="0"/>
+              <a:t> </a:t>
+            </a:r>
+            <a:r>
+              <a:rPr lang="en-US" dirty="0" err="1"/>
+              <a:t>singaz</a:t>
+            </a:r>
+            <a:r>
+              <a:rPr lang="en-US" dirty="0"/>
+              <a:t> </a:t>
+            </a:r>
+            <a:r>
+              <a:rPr lang="en-US" dirty="0" err="1"/>
+              <a:t>kompozisyonundan</a:t>
+            </a:r>
+            <a:r>
+              <a:rPr lang="en-US" dirty="0"/>
+              <a:t> </a:t>
+            </a:r>
+            <a:r>
+              <a:rPr lang="en-US" dirty="0" err="1"/>
+              <a:t>biyoyağ</a:t>
+            </a:r>
+            <a:r>
+              <a:rPr lang="en-US" dirty="0"/>
+              <a:t> </a:t>
+            </a:r>
+            <a:r>
+              <a:rPr lang="en-US" dirty="0" err="1"/>
+              <a:t>bileşimini</a:t>
+            </a:r>
+            <a:r>
+              <a:rPr lang="en-US" dirty="0"/>
+              <a:t> </a:t>
+            </a:r>
+            <a:r>
+              <a:rPr lang="en-US" dirty="0" err="1"/>
+              <a:t>gerçek</a:t>
+            </a:r>
+            <a:r>
+              <a:rPr lang="en-US" dirty="0"/>
+              <a:t> </a:t>
+            </a:r>
+            <a:r>
+              <a:rPr lang="en-US" dirty="0" err="1"/>
+              <a:t>zamanlı</a:t>
+            </a:r>
+            <a:r>
+              <a:rPr lang="en-US" dirty="0"/>
+              <a:t> </a:t>
+            </a:r>
+            <a:r>
+              <a:rPr lang="en-US" dirty="0" err="1"/>
+              <a:t>olarak</a:t>
+            </a:r>
+            <a:r>
+              <a:rPr lang="en-US" dirty="0"/>
+              <a:t> </a:t>
+            </a:r>
+            <a:r>
+              <a:rPr lang="en-US" dirty="0" err="1"/>
+              <a:t>tahmin</a:t>
+            </a:r>
+            <a:r>
+              <a:rPr lang="en-US" dirty="0"/>
+              <a:t> </a:t>
+            </a:r>
+            <a:r>
+              <a:rPr lang="en-US" dirty="0" err="1"/>
+              <a:t>eden</a:t>
+            </a:r>
+            <a:r>
+              <a:rPr lang="en-US" dirty="0"/>
+              <a:t> </a:t>
+            </a:r>
+            <a:r>
+              <a:rPr lang="en-US" dirty="0" err="1"/>
+              <a:t>ters</a:t>
+            </a:r>
+            <a:r>
+              <a:rPr lang="en-US" dirty="0"/>
+              <a:t> model, model </a:t>
+            </a:r>
+            <a:r>
+              <a:rPr lang="en-US" dirty="0" err="1"/>
+              <a:t>öngörülü</a:t>
+            </a:r>
+            <a:r>
+              <a:rPr lang="en-US" dirty="0"/>
+              <a:t> </a:t>
+            </a:r>
+            <a:r>
+              <a:rPr lang="en-US" dirty="0" err="1"/>
+              <a:t>kontrol</a:t>
+            </a:r>
+            <a:r>
+              <a:rPr lang="en-US" dirty="0"/>
+              <a:t> (Model Predictive Control - MPC) </a:t>
+            </a:r>
+            <a:r>
+              <a:rPr lang="en-US" dirty="0" err="1"/>
+              <a:t>mimarisi</a:t>
+            </a:r>
+            <a:r>
+              <a:rPr lang="en-US" dirty="0"/>
+              <a:t> </a:t>
+            </a:r>
+            <a:r>
+              <a:rPr lang="en-US" dirty="0" err="1"/>
+              <a:t>içerisine</a:t>
+            </a:r>
+            <a:r>
+              <a:rPr lang="en-US" dirty="0"/>
+              <a:t> </a:t>
+            </a:r>
+            <a:r>
+              <a:rPr lang="en-US" dirty="0" err="1"/>
+              <a:t>entegre</a:t>
+            </a:r>
+            <a:r>
+              <a:rPr lang="en-US" dirty="0"/>
+              <a:t> </a:t>
+            </a:r>
+            <a:r>
+              <a:rPr lang="en-US" dirty="0" err="1"/>
+              <a:t>edilecektir</a:t>
+            </a:r>
+            <a:r>
+              <a:rPr lang="en-US" dirty="0"/>
+              <a:t>. </a:t>
+            </a:r>
+          </a:p>
+          <a:p>
+            <a:pPr>
+              <a:lnSpc>
+                <a:spcPct val="150000"/>
+              </a:lnSpc>
+            </a:pPr>
+            <a:r>
+              <a:rPr lang="en-US" dirty="0" err="1"/>
+              <a:t>Optimizasyon</a:t>
+            </a:r>
+            <a:r>
+              <a:rPr lang="en-US" dirty="0"/>
+              <a:t> </a:t>
+            </a:r>
+            <a:r>
+              <a:rPr lang="en-US" dirty="0" err="1"/>
+              <a:t>çalışmasında</a:t>
+            </a:r>
+            <a:r>
+              <a:rPr lang="en-US" dirty="0"/>
+              <a:t>, </a:t>
+            </a:r>
+            <a:r>
+              <a:rPr lang="en-US" dirty="0" err="1"/>
+              <a:t>karar</a:t>
+            </a:r>
+            <a:r>
+              <a:rPr lang="en-US" dirty="0"/>
+              <a:t> </a:t>
+            </a:r>
+            <a:r>
+              <a:rPr lang="en-US" dirty="0" err="1"/>
+              <a:t>değişkenleri</a:t>
+            </a:r>
+            <a:r>
+              <a:rPr lang="en-US" dirty="0"/>
+              <a:t> </a:t>
+            </a:r>
+            <a:r>
+              <a:rPr lang="en-US" dirty="0" err="1"/>
+              <a:t>olarak</a:t>
+            </a:r>
+            <a:r>
+              <a:rPr lang="en-US" dirty="0"/>
+              <a:t> </a:t>
+            </a:r>
+            <a:r>
+              <a:rPr lang="en-US" dirty="0" err="1"/>
+              <a:t>farklı</a:t>
+            </a:r>
+            <a:r>
+              <a:rPr lang="en-US" dirty="0"/>
+              <a:t> </a:t>
+            </a:r>
+            <a:r>
+              <a:rPr lang="en-US" dirty="0" err="1"/>
+              <a:t>kaynaklardan</a:t>
+            </a:r>
+            <a:r>
+              <a:rPr lang="en-US" dirty="0"/>
+              <a:t> </a:t>
+            </a:r>
+            <a:r>
+              <a:rPr lang="en-US" dirty="0" err="1"/>
+              <a:t>temin</a:t>
+            </a:r>
+            <a:r>
+              <a:rPr lang="en-US" dirty="0"/>
+              <a:t> </a:t>
+            </a:r>
+            <a:r>
+              <a:rPr lang="en-US" dirty="0" err="1"/>
+              <a:t>edilen</a:t>
+            </a:r>
+            <a:r>
+              <a:rPr lang="en-US" dirty="0"/>
+              <a:t> </a:t>
+            </a:r>
+            <a:r>
+              <a:rPr lang="en-US" dirty="0" err="1"/>
+              <a:t>biyoyağların</a:t>
+            </a:r>
+            <a:r>
+              <a:rPr lang="en-US" dirty="0"/>
+              <a:t> </a:t>
+            </a:r>
+            <a:r>
+              <a:rPr lang="en-US" dirty="0" err="1"/>
+              <a:t>karışım</a:t>
+            </a:r>
+            <a:r>
+              <a:rPr lang="en-US" dirty="0"/>
+              <a:t> </a:t>
+            </a:r>
+            <a:r>
+              <a:rPr lang="en-US" dirty="0" err="1"/>
+              <a:t>oranları</a:t>
+            </a:r>
+            <a:r>
+              <a:rPr lang="en-US" dirty="0"/>
+              <a:t> (</a:t>
+            </a:r>
+            <a:r>
+              <a:rPr lang="en-US" dirty="0" err="1"/>
+              <a:t>aromatik-zengin</a:t>
+            </a:r>
+            <a:r>
+              <a:rPr lang="en-US" dirty="0"/>
+              <a:t>, </a:t>
+            </a:r>
+            <a:r>
+              <a:rPr lang="en-US" dirty="0" err="1"/>
+              <a:t>asit-zengin</a:t>
+            </a:r>
+            <a:r>
+              <a:rPr lang="en-US" dirty="0"/>
+              <a:t>, </a:t>
+            </a:r>
+            <a:r>
+              <a:rPr lang="en-US" dirty="0" err="1"/>
+              <a:t>alkol-zengin</a:t>
+            </a:r>
+            <a:r>
+              <a:rPr lang="en-US" dirty="0"/>
+              <a:t> vb. 30 </a:t>
+            </a:r>
+            <a:r>
+              <a:rPr lang="en-US" dirty="0" err="1"/>
+              <a:t>farklı</a:t>
+            </a:r>
+            <a:r>
+              <a:rPr lang="en-US" dirty="0"/>
+              <a:t> </a:t>
+            </a:r>
+            <a:r>
+              <a:rPr lang="en-US" dirty="0" err="1"/>
+              <a:t>biyoyağ</a:t>
+            </a:r>
+            <a:r>
+              <a:rPr lang="en-US" dirty="0"/>
+              <a:t> </a:t>
+            </a:r>
+            <a:r>
+              <a:rPr lang="en-US" dirty="0" err="1"/>
+              <a:t>kompozisyonunun</a:t>
+            </a:r>
+            <a:r>
+              <a:rPr lang="en-US" dirty="0"/>
+              <a:t> %0-100 </a:t>
+            </a:r>
+            <a:r>
+              <a:rPr lang="en-US" dirty="0" err="1"/>
+              <a:t>aralığında</a:t>
+            </a:r>
+            <a:r>
+              <a:rPr lang="en-US" dirty="0"/>
+              <a:t> </a:t>
+            </a:r>
+            <a:r>
+              <a:rPr lang="en-US" dirty="0" err="1"/>
+              <a:t>harmanlanması</a:t>
+            </a:r>
+            <a:r>
+              <a:rPr lang="en-US" dirty="0"/>
+              <a:t>) </a:t>
+            </a:r>
+            <a:r>
+              <a:rPr lang="en-US" dirty="0" err="1"/>
+              <a:t>ile</a:t>
+            </a:r>
+            <a:r>
+              <a:rPr lang="en-US" dirty="0"/>
+              <a:t> </a:t>
+            </a:r>
+            <a:r>
+              <a:rPr lang="en-US" dirty="0" err="1"/>
+              <a:t>birlikte</a:t>
+            </a:r>
+            <a:r>
+              <a:rPr lang="en-US" dirty="0"/>
+              <a:t> proses </a:t>
+            </a:r>
+            <a:r>
+              <a:rPr lang="en-US" dirty="0" err="1"/>
+              <a:t>koşulları</a:t>
+            </a:r>
+            <a:r>
+              <a:rPr lang="en-US" dirty="0"/>
+              <a:t> (reformer </a:t>
+            </a:r>
+            <a:r>
+              <a:rPr lang="en-US" dirty="0" err="1"/>
+              <a:t>sıcaklığı</a:t>
+            </a:r>
+            <a:r>
+              <a:rPr lang="en-US" dirty="0"/>
+              <a:t> 650-850°C, </a:t>
+            </a:r>
+            <a:r>
+              <a:rPr lang="en-US" dirty="0" err="1"/>
+              <a:t>basınç</a:t>
+            </a:r>
+            <a:r>
+              <a:rPr lang="en-US" dirty="0"/>
+              <a:t> 5-30 bar, </a:t>
+            </a:r>
+            <a:r>
+              <a:rPr lang="en-US" dirty="0" err="1"/>
+              <a:t>buhar-karbon</a:t>
+            </a:r>
+            <a:r>
+              <a:rPr lang="en-US" dirty="0"/>
+              <a:t> </a:t>
+            </a:r>
+            <a:r>
+              <a:rPr lang="en-US" dirty="0" err="1"/>
+              <a:t>oranı</a:t>
+            </a:r>
+            <a:r>
+              <a:rPr lang="en-US" dirty="0"/>
+              <a:t> 2-6) optimize </a:t>
+            </a:r>
+            <a:r>
+              <a:rPr lang="en-US" dirty="0" err="1"/>
+              <a:t>edilecektir</a:t>
+            </a:r>
+            <a:r>
+              <a:rPr lang="en-US" dirty="0"/>
+              <a:t>. </a:t>
+            </a:r>
+          </a:p>
+        </p:txBody>
+      </p:sp>
+    </p:spTree>
+    <p:extLst>
+      <p:ext uri="{BB962C8B-B14F-4D97-AF65-F5344CB8AC3E}">
+        <p14:creationId xmlns:p14="http://schemas.microsoft.com/office/powerpoint/2010/main" val="1556875940"/>
+      </p:ext>
+    </p:extLst>
+  </p:cSld>
+  <p:clrMapOvr>
+    <a:masterClrMapping/>
+  </p:clrMapOvr>
+</p:sld>
+</file>
+
+<file path=ppt/slides/slide37.xml><?xml version="1.0" encoding="utf-8"?>
 <p:sld xmlns:a="http://schemas.openxmlformats.org/drawingml/2006/main" xmlns:r="http://schemas.openxmlformats.org/officeDocument/2006/relationships" xmlns:p="http://schemas.openxmlformats.org/presentationml/2006/main">
   <p:cSld>
     <p:spTree>
@@ -11512,7 +15513,7 @@
         <p:cNvPr id="1" name="">
           <a:extLst>
             <a:ext uri="{FF2B5EF4-FFF2-40B4-BE49-F238E27FC236}">
-              <a16:creationId xmlns:a16="http://schemas.microsoft.com/office/drawing/2014/main" id="{DA811D29-A198-7230-8ADD-C73C260F9057}"/>
+              <a16:creationId xmlns:a16="http://schemas.microsoft.com/office/drawing/2014/main" id="{16D89624-EA13-271B-5F37-5750EF7A2777}"/>
             </a:ext>
           </a:extLst>
         </p:cNvPr>
@@ -11529,10 +15530,10 @@
       </p:grpSpPr>
       <p:sp>
         <p:nvSpPr>
-          <p:cNvPr id="2" name="Title 1">
+          <p:cNvPr id="2" name="Başlık 1">
             <a:extLst>
               <a:ext uri="{FF2B5EF4-FFF2-40B4-BE49-F238E27FC236}">
-                <a16:creationId xmlns:a16="http://schemas.microsoft.com/office/drawing/2014/main" id="{68BB8462-65A8-5783-7CC7-8C92BEDE7CC0}"/>
+                <a16:creationId xmlns:a16="http://schemas.microsoft.com/office/drawing/2014/main" id="{DC589BBF-F658-EF7A-F969-E0CBE7E8DF9F}"/>
               </a:ext>
             </a:extLst>
           </p:cNvPr>
@@ -11545,8 +15546,8 @@
         </p:nvSpPr>
         <p:spPr>
           <a:xfrm>
-            <a:off x="677333" y="609600"/>
-            <a:ext cx="9694832" cy="1320800"/>
+            <a:off x="677334" y="609600"/>
+            <a:ext cx="8596668" cy="1039906"/>
           </a:xfrm>
         </p:spPr>
         <p:txBody>
@@ -11555,23 +15556,31 @@
           <a:p>
             <a:r>
               <a:rPr lang="en-US" dirty="0" err="1"/>
-              <a:t>Piroliz</a:t>
-            </a:r>
-            <a:r>
-              <a:rPr lang="en-US" dirty="0"/>
-              <a:t> </a:t>
-            </a:r>
-            <a:r>
-              <a:rPr lang="en-US" dirty="0" err="1"/>
-              <a:t>Verisi</a:t>
-            </a:r>
-            <a:r>
-              <a:rPr lang="en-US" dirty="0"/>
-              <a:t> </a:t>
-            </a:r>
-            <a:r>
-              <a:rPr lang="en-US" dirty="0" err="1"/>
-              <a:t>Toplama</a:t>
+              <a:t>Çalışmanın</a:t>
+            </a:r>
+            <a:r>
+              <a:rPr lang="en-US" dirty="0"/>
+              <a:t> </a:t>
+            </a:r>
+            <a:r>
+              <a:rPr lang="en-US" dirty="0" err="1"/>
+              <a:t>kalan</a:t>
+            </a:r>
+            <a:r>
+              <a:rPr lang="en-US" dirty="0"/>
+              <a:t> </a:t>
+            </a:r>
+            <a:r>
+              <a:rPr lang="en-US" dirty="0" err="1"/>
+              <a:t>kısmında</a:t>
+            </a:r>
+            <a:r>
+              <a:rPr lang="en-US" dirty="0"/>
+              <a:t> </a:t>
+            </a:r>
+            <a:r>
+              <a:rPr lang="en-US" dirty="0" err="1"/>
+              <a:t>yapılacaklar</a:t>
             </a:r>
             <a:endParaRPr lang="en-US" dirty="0"/>
           </a:p>
@@ -11579,10 +15588,10 @@
       </p:sp>
       <p:sp>
         <p:nvSpPr>
-          <p:cNvPr id="3" name="Content Placeholder 2">
+          <p:cNvPr id="3" name="İçerik Yer Tutucusu 2">
             <a:extLst>
               <a:ext uri="{FF2B5EF4-FFF2-40B4-BE49-F238E27FC236}">
-                <a16:creationId xmlns:a16="http://schemas.microsoft.com/office/drawing/2014/main" id="{675CEC82-C11C-BECB-12FC-4035FD28F28F}"/>
+                <a16:creationId xmlns:a16="http://schemas.microsoft.com/office/drawing/2014/main" id="{B6D15CF5-C1D9-2910-5767-FDB0B6574B11}"/>
               </a:ext>
             </a:extLst>
           </p:cNvPr>
@@ -11595,13 +15604,13 @@
         </p:nvSpPr>
         <p:spPr>
           <a:xfrm>
-            <a:off x="677334" y="1676399"/>
-            <a:ext cx="8596668" cy="5072131"/>
+            <a:off x="677334" y="1891553"/>
+            <a:ext cx="8596668" cy="4356847"/>
           </a:xfrm>
         </p:spPr>
         <p:txBody>
           <a:bodyPr>
-            <a:normAutofit/>
+            <a:normAutofit fontScale="85000" lnSpcReduction="10000"/>
           </a:bodyPr>
           <a:lstStyle/>
           <a:p>
@@ -11610,14 +15619,714 @@
                 <a:spcPct val="150000"/>
               </a:lnSpc>
             </a:pPr>
-            <a:endParaRPr lang="tr-TR" dirty="0"/>
+            <a:r>
+              <a:rPr lang="en-US" dirty="0"/>
+              <a:t>Amaç </a:t>
+            </a:r>
+            <a:r>
+              <a:rPr lang="en-US" dirty="0" err="1"/>
+              <a:t>fonksiyonu</a:t>
+            </a:r>
+            <a:r>
+              <a:rPr lang="en-US" dirty="0"/>
+              <a:t> </a:t>
+            </a:r>
+            <a:r>
+              <a:rPr lang="en-US" dirty="0" err="1"/>
+              <a:t>olarak</a:t>
+            </a:r>
+            <a:r>
+              <a:rPr lang="en-US" dirty="0"/>
+              <a:t> </a:t>
+            </a:r>
+            <a:r>
+              <a:rPr lang="en-US" dirty="0" err="1"/>
+              <a:t>hedeflenen</a:t>
+            </a:r>
+            <a:r>
+              <a:rPr lang="en-US" dirty="0"/>
+              <a:t> </a:t>
+            </a:r>
+            <a:r>
+              <a:rPr lang="en-US" dirty="0" err="1"/>
+              <a:t>hidrojen</a:t>
+            </a:r>
+            <a:r>
+              <a:rPr lang="en-US" dirty="0"/>
+              <a:t> </a:t>
+            </a:r>
+            <a:r>
+              <a:rPr lang="en-US" dirty="0" err="1"/>
+              <a:t>verimi</a:t>
+            </a:r>
+            <a:r>
+              <a:rPr lang="en-US" dirty="0"/>
+              <a:t> </a:t>
+            </a:r>
+            <a:r>
+              <a:rPr lang="en-US" dirty="0" err="1"/>
+              <a:t>maksimizasyonu</a:t>
+            </a:r>
+            <a:r>
+              <a:rPr lang="en-US" dirty="0"/>
+              <a:t>, H2/CO </a:t>
+            </a:r>
+            <a:r>
+              <a:rPr lang="en-US" dirty="0" err="1"/>
+              <a:t>oranının</a:t>
+            </a:r>
+            <a:r>
+              <a:rPr lang="en-US" dirty="0"/>
+              <a:t> </a:t>
+            </a:r>
+            <a:r>
+              <a:rPr lang="en-US" dirty="0" err="1"/>
+              <a:t>belirlenen</a:t>
+            </a:r>
+            <a:r>
+              <a:rPr lang="en-US" dirty="0"/>
+              <a:t> </a:t>
+            </a:r>
+            <a:r>
+              <a:rPr lang="en-US" dirty="0" err="1"/>
+              <a:t>hedef</a:t>
+            </a:r>
+            <a:r>
+              <a:rPr lang="en-US" dirty="0"/>
+              <a:t> </a:t>
+            </a:r>
+            <a:r>
+              <a:rPr lang="en-US" dirty="0" err="1"/>
+              <a:t>değere</a:t>
+            </a:r>
+            <a:r>
+              <a:rPr lang="en-US" dirty="0"/>
+              <a:t> </a:t>
+            </a:r>
+            <a:r>
+              <a:rPr lang="en-US" dirty="0" err="1"/>
+              <a:t>yaklaştırılması</a:t>
+            </a:r>
+            <a:r>
+              <a:rPr lang="en-US" dirty="0"/>
+              <a:t>, CO2 </a:t>
+            </a:r>
+            <a:r>
+              <a:rPr lang="en-US" dirty="0" err="1"/>
+              <a:t>emisyonunun</a:t>
+            </a:r>
+            <a:r>
+              <a:rPr lang="en-US" dirty="0"/>
+              <a:t> minimize </a:t>
+            </a:r>
+            <a:r>
+              <a:rPr lang="en-US" dirty="0" err="1"/>
+              <a:t>edilmesi</a:t>
+            </a:r>
+            <a:r>
+              <a:rPr lang="en-US" dirty="0"/>
+              <a:t> </a:t>
+            </a:r>
+            <a:r>
+              <a:rPr lang="en-US" dirty="0" err="1"/>
+              <a:t>ve</a:t>
+            </a:r>
+            <a:r>
+              <a:rPr lang="en-US" dirty="0"/>
+              <a:t> </a:t>
+            </a:r>
+            <a:r>
+              <a:rPr lang="en-US" dirty="0" err="1"/>
+              <a:t>hammadde</a:t>
+            </a:r>
+            <a:r>
+              <a:rPr lang="en-US" dirty="0"/>
+              <a:t> </a:t>
+            </a:r>
+            <a:r>
+              <a:rPr lang="en-US" dirty="0" err="1"/>
+              <a:t>maliyetinin</a:t>
+            </a:r>
+            <a:r>
+              <a:rPr lang="en-US" dirty="0"/>
+              <a:t> </a:t>
+            </a:r>
+            <a:r>
+              <a:rPr lang="en-US" dirty="0" err="1"/>
+              <a:t>düşürülmesi</a:t>
+            </a:r>
+            <a:r>
+              <a:rPr lang="en-US" dirty="0"/>
+              <a:t> </a:t>
+            </a:r>
+            <a:r>
+              <a:rPr lang="en-US" dirty="0" err="1"/>
+              <a:t>gibi</a:t>
+            </a:r>
+            <a:r>
+              <a:rPr lang="en-US" dirty="0"/>
+              <a:t> </a:t>
+            </a:r>
+            <a:r>
+              <a:rPr lang="en-US" dirty="0" err="1"/>
+              <a:t>çok</a:t>
+            </a:r>
+            <a:r>
+              <a:rPr lang="en-US" dirty="0"/>
+              <a:t> </a:t>
+            </a:r>
+            <a:r>
+              <a:rPr lang="en-US" dirty="0" err="1"/>
+              <a:t>amaçlı</a:t>
+            </a:r>
+            <a:r>
+              <a:rPr lang="en-US" dirty="0"/>
+              <a:t> </a:t>
+            </a:r>
+            <a:r>
+              <a:rPr lang="en-US" dirty="0" err="1"/>
+              <a:t>hedefler</a:t>
+            </a:r>
+            <a:r>
+              <a:rPr lang="en-US" dirty="0"/>
+              <a:t> </a:t>
+            </a:r>
+            <a:r>
+              <a:rPr lang="en-US" dirty="0" err="1"/>
+              <a:t>eşzamanlı</a:t>
+            </a:r>
+            <a:r>
+              <a:rPr lang="en-US" dirty="0"/>
+              <a:t> </a:t>
+            </a:r>
+            <a:r>
+              <a:rPr lang="en-US" dirty="0" err="1"/>
+              <a:t>olarak</a:t>
+            </a:r>
+            <a:r>
+              <a:rPr lang="en-US" dirty="0"/>
+              <a:t> </a:t>
+            </a:r>
+            <a:r>
+              <a:rPr lang="en-US" dirty="0" err="1"/>
+              <a:t>ele</a:t>
+            </a:r>
+            <a:r>
+              <a:rPr lang="en-US" dirty="0"/>
+              <a:t> </a:t>
+            </a:r>
+            <a:r>
+              <a:rPr lang="en-US" dirty="0" err="1"/>
+              <a:t>alınacaktır</a:t>
+            </a:r>
+            <a:r>
+              <a:rPr lang="en-US" dirty="0"/>
+              <a:t>. </a:t>
+            </a:r>
+          </a:p>
+          <a:p>
+            <a:pPr>
+              <a:lnSpc>
+                <a:spcPct val="150000"/>
+              </a:lnSpc>
+            </a:pPr>
+            <a:r>
+              <a:rPr lang="en-US" dirty="0" err="1"/>
+              <a:t>Genetik</a:t>
+            </a:r>
+            <a:r>
+              <a:rPr lang="en-US" dirty="0"/>
+              <a:t> </a:t>
+            </a:r>
+            <a:r>
+              <a:rPr lang="en-US" dirty="0" err="1"/>
+              <a:t>algoritma</a:t>
+            </a:r>
+            <a:r>
+              <a:rPr lang="en-US" dirty="0"/>
+              <a:t>, </a:t>
+            </a:r>
+            <a:r>
+              <a:rPr lang="en-US" dirty="0" err="1"/>
+              <a:t>parçacık</a:t>
+            </a:r>
+            <a:r>
+              <a:rPr lang="en-US" dirty="0"/>
+              <a:t> </a:t>
+            </a:r>
+            <a:r>
+              <a:rPr lang="en-US" dirty="0" err="1"/>
+              <a:t>sürü</a:t>
+            </a:r>
+            <a:r>
+              <a:rPr lang="en-US" dirty="0"/>
+              <a:t> </a:t>
+            </a:r>
+            <a:r>
+              <a:rPr lang="en-US" dirty="0" err="1"/>
+              <a:t>optimizasyonu</a:t>
+            </a:r>
+            <a:r>
+              <a:rPr lang="en-US" dirty="0"/>
+              <a:t> </a:t>
+            </a:r>
+            <a:r>
+              <a:rPr lang="en-US" dirty="0" err="1"/>
+              <a:t>veya</a:t>
+            </a:r>
+            <a:r>
+              <a:rPr lang="en-US" dirty="0"/>
+              <a:t> Bayesian </a:t>
+            </a:r>
+            <a:r>
+              <a:rPr lang="en-US" dirty="0" err="1"/>
+              <a:t>optimizasyon</a:t>
+            </a:r>
+            <a:r>
+              <a:rPr lang="en-US" dirty="0"/>
+              <a:t> </a:t>
+            </a:r>
+            <a:r>
+              <a:rPr lang="en-US" dirty="0" err="1"/>
+              <a:t>gibi</a:t>
+            </a:r>
+            <a:r>
+              <a:rPr lang="en-US" dirty="0"/>
+              <a:t> meta-</a:t>
+            </a:r>
+            <a:r>
+              <a:rPr lang="en-US" dirty="0" err="1"/>
+              <a:t>sezgisel</a:t>
+            </a:r>
+            <a:r>
+              <a:rPr lang="en-US" dirty="0"/>
+              <a:t> </a:t>
+            </a:r>
+            <a:r>
+              <a:rPr lang="en-US" dirty="0" err="1"/>
+              <a:t>yöntemler</a:t>
+            </a:r>
+            <a:r>
+              <a:rPr lang="en-US" dirty="0"/>
+              <a:t> </a:t>
+            </a:r>
+            <a:r>
+              <a:rPr lang="en-US" dirty="0" err="1"/>
+              <a:t>kullanılarak</a:t>
+            </a:r>
+            <a:r>
+              <a:rPr lang="en-US" dirty="0"/>
+              <a:t>, </a:t>
+            </a:r>
+            <a:r>
+              <a:rPr lang="en-US" dirty="0" err="1"/>
+              <a:t>makine</a:t>
+            </a:r>
+            <a:r>
+              <a:rPr lang="en-US" dirty="0"/>
+              <a:t> </a:t>
+            </a:r>
+            <a:r>
+              <a:rPr lang="en-US" dirty="0" err="1"/>
+              <a:t>öğrenmesi</a:t>
+            </a:r>
+            <a:r>
+              <a:rPr lang="en-US" dirty="0"/>
+              <a:t> </a:t>
+            </a:r>
+            <a:r>
+              <a:rPr lang="en-US" dirty="0" err="1"/>
+              <a:t>ile</a:t>
+            </a:r>
+            <a:r>
+              <a:rPr lang="en-US" dirty="0"/>
+              <a:t> </a:t>
+            </a:r>
+            <a:r>
+              <a:rPr lang="en-US" dirty="0" err="1"/>
+              <a:t>hesaplanacak</a:t>
+            </a:r>
+            <a:r>
+              <a:rPr lang="en-US" dirty="0"/>
+              <a:t> </a:t>
+            </a:r>
+            <a:r>
+              <a:rPr lang="en-US" dirty="0" err="1"/>
+              <a:t>olan</a:t>
+            </a:r>
+            <a:r>
+              <a:rPr lang="en-US" dirty="0"/>
+              <a:t> </a:t>
+            </a:r>
+            <a:r>
+              <a:rPr lang="en-US" dirty="0" err="1"/>
+              <a:t>biyoyağ</a:t>
+            </a:r>
+            <a:r>
+              <a:rPr lang="en-US" dirty="0"/>
+              <a:t> </a:t>
+            </a:r>
+            <a:r>
+              <a:rPr lang="en-US" dirty="0" err="1"/>
+              <a:t>karışımı</a:t>
+            </a:r>
+            <a:r>
+              <a:rPr lang="en-US" dirty="0"/>
+              <a:t> </a:t>
+            </a:r>
+            <a:r>
+              <a:rPr lang="en-US" dirty="0" err="1"/>
+              <a:t>için</a:t>
+            </a:r>
+            <a:r>
+              <a:rPr lang="en-US" dirty="0"/>
+              <a:t>, </a:t>
+            </a:r>
+            <a:r>
+              <a:rPr lang="en-US" dirty="0" err="1"/>
+              <a:t>istenilen</a:t>
+            </a:r>
+            <a:r>
+              <a:rPr lang="en-US" dirty="0"/>
+              <a:t> </a:t>
+            </a:r>
+            <a:r>
+              <a:rPr lang="en-US" dirty="0" err="1"/>
+              <a:t>singaz</a:t>
+            </a:r>
+            <a:r>
+              <a:rPr lang="en-US" dirty="0"/>
+              <a:t> </a:t>
+            </a:r>
+            <a:r>
+              <a:rPr lang="en-US" dirty="0" err="1"/>
+              <a:t>kalitesini</a:t>
+            </a:r>
+            <a:r>
+              <a:rPr lang="en-US" dirty="0"/>
+              <a:t> </a:t>
+            </a:r>
+            <a:r>
+              <a:rPr lang="en-US" dirty="0" err="1"/>
+              <a:t>üretecek</a:t>
+            </a:r>
+            <a:r>
+              <a:rPr lang="en-US" dirty="0"/>
+              <a:t> </a:t>
+            </a:r>
+            <a:r>
+              <a:rPr lang="en-US" dirty="0" err="1"/>
+              <a:t>işletme</a:t>
+            </a:r>
+            <a:r>
+              <a:rPr lang="en-US" dirty="0"/>
+              <a:t> </a:t>
+            </a:r>
+            <a:r>
+              <a:rPr lang="en-US" dirty="0" err="1"/>
+              <a:t>koşulları</a:t>
+            </a:r>
+            <a:r>
+              <a:rPr lang="en-US" dirty="0"/>
+              <a:t> </a:t>
+            </a:r>
+            <a:r>
+              <a:rPr lang="en-US" dirty="0" err="1"/>
+              <a:t>belirlenecektir</a:t>
+            </a:r>
+            <a:r>
+              <a:rPr lang="en-US" dirty="0"/>
+              <a:t>. </a:t>
+            </a:r>
+          </a:p>
+          <a:p>
+            <a:pPr>
+              <a:lnSpc>
+                <a:spcPct val="150000"/>
+              </a:lnSpc>
+            </a:pPr>
+            <a:r>
+              <a:rPr lang="en-US" dirty="0" err="1"/>
+              <a:t>Ayrıca</a:t>
+            </a:r>
+            <a:r>
+              <a:rPr lang="en-US" dirty="0"/>
+              <a:t>, </a:t>
+            </a:r>
+            <a:r>
+              <a:rPr lang="en-US" dirty="0" err="1"/>
+              <a:t>reaktör</a:t>
+            </a:r>
+            <a:r>
+              <a:rPr lang="en-US" dirty="0"/>
+              <a:t> </a:t>
+            </a:r>
+            <a:r>
+              <a:rPr lang="en-US" dirty="0" err="1"/>
+              <a:t>çıkışındaki</a:t>
+            </a:r>
+            <a:r>
+              <a:rPr lang="en-US" dirty="0"/>
+              <a:t> </a:t>
+            </a:r>
+            <a:r>
+              <a:rPr lang="en-US" dirty="0" err="1"/>
+              <a:t>anlık</a:t>
+            </a:r>
+            <a:r>
+              <a:rPr lang="en-US" dirty="0"/>
+              <a:t> </a:t>
+            </a:r>
+            <a:r>
+              <a:rPr lang="en-US" dirty="0" err="1"/>
+              <a:t>singaz</a:t>
+            </a:r>
+            <a:r>
+              <a:rPr lang="en-US" dirty="0"/>
+              <a:t> </a:t>
+            </a:r>
+            <a:r>
+              <a:rPr lang="en-US" dirty="0" err="1"/>
+              <a:t>ölçümlerinden</a:t>
+            </a:r>
+            <a:r>
+              <a:rPr lang="en-US" dirty="0"/>
+              <a:t> </a:t>
+            </a:r>
+            <a:r>
+              <a:rPr lang="en-US" dirty="0" err="1"/>
+              <a:t>yola</a:t>
+            </a:r>
+            <a:r>
+              <a:rPr lang="en-US" dirty="0"/>
+              <a:t> </a:t>
+            </a:r>
+            <a:r>
+              <a:rPr lang="en-US" dirty="0" err="1"/>
+              <a:t>çıkarak</a:t>
+            </a:r>
+            <a:r>
+              <a:rPr lang="en-US" dirty="0"/>
+              <a:t> </a:t>
+            </a:r>
+            <a:r>
+              <a:rPr lang="en-US" dirty="0" err="1"/>
+              <a:t>biyoyağ</a:t>
+            </a:r>
+            <a:r>
+              <a:rPr lang="en-US" dirty="0"/>
+              <a:t> </a:t>
+            </a:r>
+            <a:r>
+              <a:rPr lang="en-US" dirty="0" err="1"/>
+              <a:t>kompozisyonundaki</a:t>
+            </a:r>
+            <a:r>
+              <a:rPr lang="en-US" dirty="0"/>
+              <a:t> </a:t>
+            </a:r>
+            <a:r>
+              <a:rPr lang="en-US" dirty="0" err="1"/>
+              <a:t>sapmaların</a:t>
+            </a:r>
+            <a:r>
+              <a:rPr lang="en-US" dirty="0"/>
+              <a:t> </a:t>
+            </a:r>
+            <a:r>
+              <a:rPr lang="en-US" dirty="0" err="1"/>
+              <a:t>tespit</a:t>
+            </a:r>
+            <a:r>
+              <a:rPr lang="en-US" dirty="0"/>
+              <a:t> </a:t>
+            </a:r>
+            <a:r>
+              <a:rPr lang="en-US" dirty="0" err="1"/>
+              <a:t>edilmesi</a:t>
+            </a:r>
+            <a:r>
+              <a:rPr lang="en-US" dirty="0"/>
+              <a:t> </a:t>
+            </a:r>
+            <a:r>
+              <a:rPr lang="en-US" dirty="0" err="1"/>
+              <a:t>ve</a:t>
+            </a:r>
+            <a:r>
+              <a:rPr lang="en-US" dirty="0"/>
+              <a:t> </a:t>
+            </a:r>
+            <a:r>
+              <a:rPr lang="en-US" dirty="0" err="1"/>
+              <a:t>geri</a:t>
+            </a:r>
+            <a:r>
+              <a:rPr lang="en-US" dirty="0"/>
+              <a:t> </a:t>
+            </a:r>
+            <a:r>
+              <a:rPr lang="en-US" dirty="0" err="1"/>
+              <a:t>beslemeli</a:t>
+            </a:r>
+            <a:r>
+              <a:rPr lang="en-US" dirty="0"/>
+              <a:t> </a:t>
+            </a:r>
+            <a:r>
+              <a:rPr lang="en-US" dirty="0" err="1"/>
+              <a:t>düzeltme</a:t>
+            </a:r>
+            <a:r>
+              <a:rPr lang="en-US" dirty="0"/>
+              <a:t> </a:t>
+            </a:r>
+            <a:r>
+              <a:rPr lang="en-US" dirty="0" err="1"/>
+              <a:t>yapılması</a:t>
+            </a:r>
+            <a:r>
+              <a:rPr lang="en-US" dirty="0"/>
+              <a:t> </a:t>
+            </a:r>
+            <a:r>
+              <a:rPr lang="en-US" dirty="0" err="1"/>
+              <a:t>mümkün</a:t>
+            </a:r>
+            <a:r>
+              <a:rPr lang="en-US" dirty="0"/>
+              <a:t> </a:t>
+            </a:r>
+            <a:r>
+              <a:rPr lang="en-US" dirty="0" err="1"/>
+              <a:t>olacaktır</a:t>
+            </a:r>
+            <a:r>
+              <a:rPr lang="en-US" dirty="0"/>
+              <a:t>. </a:t>
+            </a:r>
+          </a:p>
+          <a:p>
+            <a:pPr>
+              <a:lnSpc>
+                <a:spcPct val="150000"/>
+              </a:lnSpc>
+            </a:pPr>
+            <a:r>
+              <a:rPr lang="en-US" dirty="0"/>
+              <a:t>Bu </a:t>
+            </a:r>
+            <a:r>
+              <a:rPr lang="en-US" dirty="0" err="1"/>
+              <a:t>optimizasyon</a:t>
+            </a:r>
+            <a:r>
+              <a:rPr lang="en-US" dirty="0"/>
+              <a:t> </a:t>
+            </a:r>
+            <a:r>
+              <a:rPr lang="en-US" dirty="0" err="1"/>
+              <a:t>ve</a:t>
+            </a:r>
+            <a:r>
+              <a:rPr lang="en-US" dirty="0"/>
+              <a:t> </a:t>
+            </a:r>
+            <a:r>
+              <a:rPr lang="en-US" dirty="0" err="1"/>
+              <a:t>kontrol</a:t>
+            </a:r>
+            <a:r>
+              <a:rPr lang="en-US" dirty="0"/>
+              <a:t> </a:t>
+            </a:r>
+            <a:r>
+              <a:rPr lang="en-US" dirty="0" err="1"/>
+              <a:t>senaryosu</a:t>
+            </a:r>
+            <a:r>
+              <a:rPr lang="en-US" dirty="0"/>
+              <a:t> hem </a:t>
+            </a:r>
+            <a:r>
+              <a:rPr lang="en-US" dirty="0" err="1"/>
+              <a:t>hammadde</a:t>
+            </a:r>
+            <a:r>
+              <a:rPr lang="en-US" dirty="0"/>
+              <a:t> </a:t>
+            </a:r>
+            <a:r>
+              <a:rPr lang="en-US" dirty="0" err="1"/>
+              <a:t>kalite</a:t>
+            </a:r>
+            <a:r>
+              <a:rPr lang="en-US" dirty="0"/>
+              <a:t> </a:t>
+            </a:r>
+            <a:r>
+              <a:rPr lang="en-US" dirty="0" err="1"/>
+              <a:t>kontrolü</a:t>
+            </a:r>
+            <a:r>
+              <a:rPr lang="en-US" dirty="0"/>
+              <a:t> hem de proses </a:t>
+            </a:r>
+            <a:r>
+              <a:rPr lang="en-US" dirty="0" err="1"/>
+              <a:t>verimliliğinin</a:t>
+            </a:r>
+            <a:r>
+              <a:rPr lang="en-US" dirty="0"/>
+              <a:t> </a:t>
+            </a:r>
+            <a:r>
+              <a:rPr lang="en-US" dirty="0" err="1"/>
+              <a:t>eşzamanlı</a:t>
+            </a:r>
+            <a:r>
+              <a:rPr lang="en-US" dirty="0"/>
+              <a:t> </a:t>
+            </a:r>
+            <a:r>
+              <a:rPr lang="en-US" dirty="0" err="1"/>
+              <a:t>olarak</a:t>
+            </a:r>
+            <a:r>
+              <a:rPr lang="en-US" dirty="0"/>
+              <a:t> </a:t>
+            </a:r>
+            <a:r>
+              <a:rPr lang="en-US" dirty="0" err="1"/>
+              <a:t>artırılmasına</a:t>
+            </a:r>
+            <a:r>
+              <a:rPr lang="en-US" dirty="0"/>
+              <a:t> </a:t>
+            </a:r>
+            <a:r>
+              <a:rPr lang="en-US" dirty="0" err="1"/>
+              <a:t>olanak</a:t>
+            </a:r>
+            <a:r>
+              <a:rPr lang="en-US" dirty="0"/>
+              <a:t> </a:t>
+            </a:r>
+            <a:r>
+              <a:rPr lang="en-US" dirty="0" err="1"/>
+              <a:t>tanıyacaktır</a:t>
+            </a:r>
+            <a:r>
+              <a:rPr lang="en-US" dirty="0"/>
+              <a:t>. </a:t>
+            </a:r>
           </a:p>
         </p:txBody>
       </p:sp>
     </p:spTree>
     <p:extLst>
       <p:ext uri="{BB962C8B-B14F-4D97-AF65-F5344CB8AC3E}">
-        <p14:creationId xmlns:p14="http://schemas.microsoft.com/office/powerpoint/2010/main" val="906206273"/>
+        <p14:creationId xmlns:p14="http://schemas.microsoft.com/office/powerpoint/2010/main" val="1369091543"/>
       </p:ext>
     </p:extLst>
   </p:cSld>
@@ -11627,1084 +16336,7 @@
 </p:sld>
 </file>
 
-<file path=ppt/slides/slide28.xml><?xml version="1.0" encoding="utf-8"?>
-<p:sld xmlns:a="http://schemas.openxmlformats.org/drawingml/2006/main" xmlns:r="http://schemas.openxmlformats.org/officeDocument/2006/relationships" xmlns:p="http://schemas.openxmlformats.org/presentationml/2006/main">
-  <p:cSld>
-    <p:spTree>
-      <p:nvGrpSpPr>
-        <p:cNvPr id="1" name="">
-          <a:extLst>
-            <a:ext uri="{FF2B5EF4-FFF2-40B4-BE49-F238E27FC236}">
-              <a16:creationId xmlns:a16="http://schemas.microsoft.com/office/drawing/2014/main" id="{5C1F064A-60E0-0282-02F8-7FB0416BBA59}"/>
-            </a:ext>
-          </a:extLst>
-        </p:cNvPr>
-        <p:cNvGrpSpPr/>
-        <p:nvPr/>
-      </p:nvGrpSpPr>
-      <p:grpSpPr>
-        <a:xfrm>
-          <a:off x="0" y="0"/>
-          <a:ext cx="0" cy="0"/>
-          <a:chOff x="0" y="0"/>
-          <a:chExt cx="0" cy="0"/>
-        </a:xfrm>
-      </p:grpSpPr>
-      <p:sp>
-        <p:nvSpPr>
-          <p:cNvPr id="2" name="Title 1">
-            <a:extLst>
-              <a:ext uri="{FF2B5EF4-FFF2-40B4-BE49-F238E27FC236}">
-                <a16:creationId xmlns:a16="http://schemas.microsoft.com/office/drawing/2014/main" id="{574C4033-91AF-294C-80CD-18AD5742B206}"/>
-              </a:ext>
-            </a:extLst>
-          </p:cNvPr>
-          <p:cNvSpPr>
-            <a:spLocks noGrp="1"/>
-          </p:cNvSpPr>
-          <p:nvPr>
-            <p:ph type="title"/>
-          </p:nvPr>
-        </p:nvSpPr>
-        <p:spPr>
-          <a:xfrm>
-            <a:off x="677333" y="609600"/>
-            <a:ext cx="9694832" cy="1320800"/>
-          </a:xfrm>
-        </p:spPr>
-        <p:txBody>
-          <a:bodyPr/>
-          <a:lstStyle/>
-          <a:p>
-            <a:r>
-              <a:rPr lang="en-US" dirty="0" err="1"/>
-              <a:t>Piroliz</a:t>
-            </a:r>
-            <a:r>
-              <a:rPr lang="en-US" dirty="0"/>
-              <a:t> </a:t>
-            </a:r>
-            <a:r>
-              <a:rPr lang="en-US" dirty="0" err="1"/>
-              <a:t>Verisi</a:t>
-            </a:r>
-            <a:r>
-              <a:rPr lang="en-US" dirty="0"/>
-              <a:t> </a:t>
-            </a:r>
-            <a:r>
-              <a:rPr lang="en-US" dirty="0" err="1"/>
-              <a:t>Toplama</a:t>
-            </a:r>
-            <a:endParaRPr lang="en-US" dirty="0"/>
-          </a:p>
-        </p:txBody>
-      </p:sp>
-      <p:sp>
-        <p:nvSpPr>
-          <p:cNvPr id="3" name="Content Placeholder 2">
-            <a:extLst>
-              <a:ext uri="{FF2B5EF4-FFF2-40B4-BE49-F238E27FC236}">
-                <a16:creationId xmlns:a16="http://schemas.microsoft.com/office/drawing/2014/main" id="{1C4E8FBD-66FE-483B-3B0F-4CDC8FDA871C}"/>
-              </a:ext>
-            </a:extLst>
-          </p:cNvPr>
-          <p:cNvSpPr>
-            <a:spLocks noGrp="1"/>
-          </p:cNvSpPr>
-          <p:nvPr>
-            <p:ph idx="1"/>
-          </p:nvPr>
-        </p:nvSpPr>
-        <p:spPr>
-          <a:xfrm>
-            <a:off x="677334" y="1676399"/>
-            <a:ext cx="8596668" cy="5072131"/>
-          </a:xfrm>
-        </p:spPr>
-        <p:txBody>
-          <a:bodyPr>
-            <a:normAutofit/>
-          </a:bodyPr>
-          <a:lstStyle/>
-          <a:p>
-            <a:pPr>
-              <a:lnSpc>
-                <a:spcPct val="150000"/>
-              </a:lnSpc>
-            </a:pPr>
-            <a:endParaRPr lang="tr-TR" dirty="0"/>
-          </a:p>
-        </p:txBody>
-      </p:sp>
-    </p:spTree>
-    <p:extLst>
-      <p:ext uri="{BB962C8B-B14F-4D97-AF65-F5344CB8AC3E}">
-        <p14:creationId xmlns:p14="http://schemas.microsoft.com/office/powerpoint/2010/main" val="2728481664"/>
-      </p:ext>
-    </p:extLst>
-  </p:cSld>
-  <p:clrMapOvr>
-    <a:masterClrMapping/>
-  </p:clrMapOvr>
-</p:sld>
-</file>
-
-<file path=ppt/slides/slide29.xml><?xml version="1.0" encoding="utf-8"?>
-<p:sld xmlns:a="http://schemas.openxmlformats.org/drawingml/2006/main" xmlns:r="http://schemas.openxmlformats.org/officeDocument/2006/relationships" xmlns:p="http://schemas.openxmlformats.org/presentationml/2006/main">
-  <p:cSld>
-    <p:spTree>
-      <p:nvGrpSpPr>
-        <p:cNvPr id="1" name="">
-          <a:extLst>
-            <a:ext uri="{FF2B5EF4-FFF2-40B4-BE49-F238E27FC236}">
-              <a16:creationId xmlns:a16="http://schemas.microsoft.com/office/drawing/2014/main" id="{58AD5996-F8BB-9719-1F28-3589A0BA6CAE}"/>
-            </a:ext>
-          </a:extLst>
-        </p:cNvPr>
-        <p:cNvGrpSpPr/>
-        <p:nvPr/>
-      </p:nvGrpSpPr>
-      <p:grpSpPr>
-        <a:xfrm>
-          <a:off x="0" y="0"/>
-          <a:ext cx="0" cy="0"/>
-          <a:chOff x="0" y="0"/>
-          <a:chExt cx="0" cy="0"/>
-        </a:xfrm>
-      </p:grpSpPr>
-      <p:sp>
-        <p:nvSpPr>
-          <p:cNvPr id="2" name="Title 1">
-            <a:extLst>
-              <a:ext uri="{FF2B5EF4-FFF2-40B4-BE49-F238E27FC236}">
-                <a16:creationId xmlns:a16="http://schemas.microsoft.com/office/drawing/2014/main" id="{910D4651-6B71-4EFF-A86D-A308901A6B22}"/>
-              </a:ext>
-            </a:extLst>
-          </p:cNvPr>
-          <p:cNvSpPr>
-            <a:spLocks noGrp="1"/>
-          </p:cNvSpPr>
-          <p:nvPr>
-            <p:ph type="title"/>
-          </p:nvPr>
-        </p:nvSpPr>
-        <p:spPr>
-          <a:xfrm>
-            <a:off x="677333" y="609600"/>
-            <a:ext cx="9694832" cy="1320800"/>
-          </a:xfrm>
-        </p:spPr>
-        <p:txBody>
-          <a:bodyPr/>
-          <a:lstStyle/>
-          <a:p>
-            <a:r>
-              <a:rPr lang="en-US" dirty="0" err="1"/>
-              <a:t>Piroliz</a:t>
-            </a:r>
-            <a:r>
-              <a:rPr lang="en-US" dirty="0"/>
-              <a:t> </a:t>
-            </a:r>
-            <a:r>
-              <a:rPr lang="en-US" dirty="0" err="1"/>
-              <a:t>Verisi</a:t>
-            </a:r>
-            <a:r>
-              <a:rPr lang="en-US" dirty="0"/>
-              <a:t> </a:t>
-            </a:r>
-            <a:r>
-              <a:rPr lang="en-US" dirty="0" err="1"/>
-              <a:t>Toplama</a:t>
-            </a:r>
-            <a:endParaRPr lang="en-US" dirty="0"/>
-          </a:p>
-        </p:txBody>
-      </p:sp>
-      <p:sp>
-        <p:nvSpPr>
-          <p:cNvPr id="3" name="Content Placeholder 2">
-            <a:extLst>
-              <a:ext uri="{FF2B5EF4-FFF2-40B4-BE49-F238E27FC236}">
-                <a16:creationId xmlns:a16="http://schemas.microsoft.com/office/drawing/2014/main" id="{872574BA-9045-AF60-3B28-50E708C41790}"/>
-              </a:ext>
-            </a:extLst>
-          </p:cNvPr>
-          <p:cNvSpPr>
-            <a:spLocks noGrp="1"/>
-          </p:cNvSpPr>
-          <p:nvPr>
-            <p:ph idx="1"/>
-          </p:nvPr>
-        </p:nvSpPr>
-        <p:spPr>
-          <a:xfrm>
-            <a:off x="677334" y="1676399"/>
-            <a:ext cx="8596668" cy="5072131"/>
-          </a:xfrm>
-        </p:spPr>
-        <p:txBody>
-          <a:bodyPr>
-            <a:normAutofit/>
-          </a:bodyPr>
-          <a:lstStyle/>
-          <a:p>
-            <a:pPr>
-              <a:lnSpc>
-                <a:spcPct val="150000"/>
-              </a:lnSpc>
-            </a:pPr>
-            <a:endParaRPr lang="tr-TR" dirty="0"/>
-          </a:p>
-        </p:txBody>
-      </p:sp>
-    </p:spTree>
-    <p:extLst>
-      <p:ext uri="{BB962C8B-B14F-4D97-AF65-F5344CB8AC3E}">
-        <p14:creationId xmlns:p14="http://schemas.microsoft.com/office/powerpoint/2010/main" val="1362098132"/>
-      </p:ext>
-    </p:extLst>
-  </p:cSld>
-  <p:clrMapOvr>
-    <a:masterClrMapping/>
-  </p:clrMapOvr>
-</p:sld>
-</file>
-
-<file path=ppt/slides/slide3.xml><?xml version="1.0" encoding="utf-8"?>
-<p:sld xmlns:a="http://schemas.openxmlformats.org/drawingml/2006/main" xmlns:r="http://schemas.openxmlformats.org/officeDocument/2006/relationships" xmlns:p="http://schemas.openxmlformats.org/presentationml/2006/main">
-  <p:cSld>
-    <p:spTree>
-      <p:nvGrpSpPr>
-        <p:cNvPr id="1" name="">
-          <a:extLst>
-            <a:ext uri="{FF2B5EF4-FFF2-40B4-BE49-F238E27FC236}">
-              <a16:creationId xmlns:a16="http://schemas.microsoft.com/office/drawing/2014/main" id="{33AA0CB0-F31B-F127-3659-7960E1FE20F6}"/>
-            </a:ext>
-          </a:extLst>
-        </p:cNvPr>
-        <p:cNvGrpSpPr/>
-        <p:nvPr/>
-      </p:nvGrpSpPr>
-      <p:grpSpPr>
-        <a:xfrm>
-          <a:off x="0" y="0"/>
-          <a:ext cx="0" cy="0"/>
-          <a:chOff x="0" y="0"/>
-          <a:chExt cx="0" cy="0"/>
-        </a:xfrm>
-      </p:grpSpPr>
-      <p:sp>
-        <p:nvSpPr>
-          <p:cNvPr id="2" name="Title 1">
-            <a:extLst>
-              <a:ext uri="{FF2B5EF4-FFF2-40B4-BE49-F238E27FC236}">
-                <a16:creationId xmlns:a16="http://schemas.microsoft.com/office/drawing/2014/main" id="{198854F4-E224-1FF5-0E6C-675A1C453031}"/>
-              </a:ext>
-            </a:extLst>
-          </p:cNvPr>
-          <p:cNvSpPr>
-            <a:spLocks noGrp="1"/>
-          </p:cNvSpPr>
-          <p:nvPr>
-            <p:ph type="title"/>
-          </p:nvPr>
-        </p:nvSpPr>
-        <p:spPr>
-          <a:xfrm>
-            <a:off x="677333" y="609600"/>
-            <a:ext cx="9694832" cy="1320800"/>
-          </a:xfrm>
-        </p:spPr>
-        <p:txBody>
-          <a:bodyPr/>
-          <a:lstStyle/>
-          <a:p>
-            <a:r>
-              <a:rPr lang="en-US" dirty="0" err="1"/>
-              <a:t>Tezin</a:t>
-            </a:r>
-            <a:r>
-              <a:rPr lang="en-US" dirty="0"/>
-              <a:t> </a:t>
-            </a:r>
-            <a:r>
-              <a:rPr lang="en-US" dirty="0" err="1"/>
-              <a:t>amacı</a:t>
-            </a:r>
-            <a:endParaRPr lang="en-US" dirty="0"/>
-          </a:p>
-        </p:txBody>
-      </p:sp>
-      <p:sp>
-        <p:nvSpPr>
-          <p:cNvPr id="3" name="Content Placeholder 2">
-            <a:extLst>
-              <a:ext uri="{FF2B5EF4-FFF2-40B4-BE49-F238E27FC236}">
-                <a16:creationId xmlns:a16="http://schemas.microsoft.com/office/drawing/2014/main" id="{17DDAEDE-3349-3791-2191-2F72762DF5CE}"/>
-              </a:ext>
-            </a:extLst>
-          </p:cNvPr>
-          <p:cNvSpPr>
-            <a:spLocks noGrp="1"/>
-          </p:cNvSpPr>
-          <p:nvPr>
-            <p:ph idx="1"/>
-          </p:nvPr>
-        </p:nvSpPr>
-        <p:spPr>
-          <a:xfrm>
-            <a:off x="677334" y="1676399"/>
-            <a:ext cx="8596668" cy="5072131"/>
-          </a:xfrm>
-        </p:spPr>
-        <p:txBody>
-          <a:bodyPr>
-            <a:normAutofit/>
-          </a:bodyPr>
-          <a:lstStyle/>
-          <a:p>
-            <a:pPr>
-              <a:lnSpc>
-                <a:spcPct val="150000"/>
-              </a:lnSpc>
-            </a:pPr>
-            <a:r>
-              <a:rPr lang="en-US" dirty="0" err="1"/>
-              <a:t>Biyoktüleden</a:t>
-            </a:r>
-            <a:r>
-              <a:rPr lang="en-US" dirty="0"/>
-              <a:t> </a:t>
-            </a:r>
-            <a:r>
-              <a:rPr lang="en-US" dirty="0" err="1"/>
-              <a:t>elde</a:t>
-            </a:r>
-            <a:r>
-              <a:rPr lang="en-US" dirty="0"/>
-              <a:t> </a:t>
-            </a:r>
-            <a:r>
-              <a:rPr lang="en-US" dirty="0" err="1"/>
-              <a:t>edilen</a:t>
-            </a:r>
-            <a:r>
-              <a:rPr lang="en-US" dirty="0"/>
-              <a:t> (</a:t>
-            </a:r>
-            <a:r>
-              <a:rPr lang="en-US" dirty="0" err="1"/>
-              <a:t>piroliz</a:t>
-            </a:r>
-            <a:r>
-              <a:rPr lang="en-US" dirty="0"/>
-              <a:t>) </a:t>
-            </a:r>
-            <a:r>
-              <a:rPr lang="en-US" dirty="0" err="1"/>
-              <a:t>biyoyağın</a:t>
-            </a:r>
-            <a:r>
-              <a:rPr lang="en-US" dirty="0"/>
-              <a:t> </a:t>
-            </a:r>
-            <a:r>
-              <a:rPr lang="en-US" dirty="0" err="1"/>
-              <a:t>değerlendirildiği</a:t>
-            </a:r>
-            <a:r>
-              <a:rPr lang="en-US" dirty="0"/>
-              <a:t> proses </a:t>
-            </a:r>
-            <a:r>
-              <a:rPr lang="en-US" dirty="0" err="1"/>
-              <a:t>parametrelerinin</a:t>
-            </a:r>
-            <a:r>
-              <a:rPr lang="en-US" dirty="0"/>
-              <a:t> </a:t>
-            </a:r>
-            <a:r>
-              <a:rPr lang="en-US" dirty="0" err="1"/>
-              <a:t>belirlenmesine</a:t>
-            </a:r>
-            <a:r>
-              <a:rPr lang="en-US" dirty="0"/>
-              <a:t> </a:t>
-            </a:r>
-            <a:r>
-              <a:rPr lang="en-US" dirty="0" err="1"/>
-              <a:t>yardımcı</a:t>
-            </a:r>
-            <a:r>
-              <a:rPr lang="en-US" dirty="0"/>
-              <a:t> </a:t>
-            </a:r>
-            <a:r>
-              <a:rPr lang="en-US" dirty="0" err="1"/>
-              <a:t>olacak</a:t>
-            </a:r>
-            <a:r>
-              <a:rPr lang="en-US" dirty="0"/>
-              <a:t> </a:t>
-            </a:r>
-            <a:r>
-              <a:rPr lang="en-US" dirty="0" err="1"/>
-              <a:t>bir</a:t>
-            </a:r>
-            <a:r>
-              <a:rPr lang="en-US" dirty="0"/>
-              <a:t> model </a:t>
-            </a:r>
-            <a:r>
-              <a:rPr lang="en-US" dirty="0" err="1"/>
-              <a:t>öngörülü</a:t>
-            </a:r>
-            <a:r>
-              <a:rPr lang="en-US" dirty="0"/>
-              <a:t> </a:t>
-            </a:r>
-            <a:r>
-              <a:rPr lang="en-US" dirty="0" err="1"/>
-              <a:t>kontrol</a:t>
-            </a:r>
-            <a:r>
-              <a:rPr lang="en-US" dirty="0"/>
-              <a:t> (MÖK) </a:t>
-            </a:r>
-            <a:r>
-              <a:rPr lang="en-US" dirty="0" err="1"/>
-              <a:t>senaryosu</a:t>
-            </a:r>
-            <a:r>
-              <a:rPr lang="en-US" dirty="0"/>
-              <a:t> </a:t>
-            </a:r>
-            <a:r>
-              <a:rPr lang="en-US" dirty="0" err="1"/>
-              <a:t>geliştirmektir</a:t>
-            </a:r>
-            <a:r>
-              <a:rPr lang="en-US" dirty="0"/>
-              <a:t>.</a:t>
-            </a:r>
-          </a:p>
-          <a:p>
-            <a:pPr>
-              <a:lnSpc>
-                <a:spcPct val="150000"/>
-              </a:lnSpc>
-            </a:pPr>
-            <a:r>
-              <a:rPr lang="en-US" dirty="0" err="1"/>
-              <a:t>Biyoyağın</a:t>
-            </a:r>
-            <a:r>
-              <a:rPr lang="en-US" dirty="0"/>
-              <a:t> </a:t>
-            </a:r>
-            <a:r>
-              <a:rPr lang="en-US" dirty="0" err="1"/>
-              <a:t>işlenmesi</a:t>
-            </a:r>
-            <a:r>
-              <a:rPr lang="en-US" dirty="0"/>
-              <a:t> </a:t>
-            </a:r>
-            <a:r>
-              <a:rPr lang="en-US" dirty="0" err="1"/>
-              <a:t>sonucu</a:t>
-            </a:r>
-            <a:r>
-              <a:rPr lang="en-US" dirty="0"/>
-              <a:t> </a:t>
-            </a:r>
-            <a:r>
-              <a:rPr lang="en-US" dirty="0" err="1"/>
-              <a:t>oluşan</a:t>
-            </a:r>
-            <a:r>
-              <a:rPr lang="en-US" dirty="0"/>
-              <a:t> </a:t>
-            </a:r>
-            <a:r>
-              <a:rPr lang="en-US" dirty="0" err="1"/>
-              <a:t>ürünün</a:t>
-            </a:r>
-            <a:r>
-              <a:rPr lang="en-US" dirty="0"/>
-              <a:t> </a:t>
-            </a:r>
-            <a:r>
-              <a:rPr lang="en-US" dirty="0" err="1"/>
-              <a:t>özelliklerin</a:t>
-            </a:r>
-            <a:r>
-              <a:rPr lang="en-US" dirty="0"/>
-              <a:t> </a:t>
-            </a:r>
-            <a:r>
-              <a:rPr lang="en-US" dirty="0" err="1"/>
-              <a:t>bakarak</a:t>
-            </a:r>
-            <a:r>
-              <a:rPr lang="en-US" dirty="0"/>
-              <a:t>, </a:t>
-            </a:r>
-            <a:r>
-              <a:rPr lang="en-US" dirty="0" err="1"/>
-              <a:t>girişte</a:t>
-            </a:r>
-            <a:r>
-              <a:rPr lang="en-US" dirty="0"/>
-              <a:t> </a:t>
-            </a:r>
-            <a:r>
-              <a:rPr lang="en-US" dirty="0" err="1"/>
-              <a:t>kullanılan</a:t>
-            </a:r>
-            <a:r>
-              <a:rPr lang="en-US" dirty="0"/>
-              <a:t> </a:t>
-            </a:r>
-            <a:r>
-              <a:rPr lang="en-US" dirty="0" err="1"/>
-              <a:t>biyoyağın</a:t>
-            </a:r>
-            <a:r>
-              <a:rPr lang="en-US" dirty="0"/>
-              <a:t> </a:t>
-            </a:r>
-            <a:r>
-              <a:rPr lang="en-US" dirty="0" err="1"/>
-              <a:t>içeriğini</a:t>
-            </a:r>
-            <a:r>
-              <a:rPr lang="en-US" dirty="0"/>
-              <a:t> </a:t>
-            </a:r>
-            <a:r>
-              <a:rPr lang="en-US" dirty="0" err="1"/>
-              <a:t>tahmin</a:t>
-            </a:r>
-            <a:r>
-              <a:rPr lang="en-US" dirty="0"/>
-              <a:t> </a:t>
-            </a:r>
-            <a:r>
-              <a:rPr lang="en-US" dirty="0" err="1"/>
-              <a:t>edebilen</a:t>
-            </a:r>
-            <a:r>
-              <a:rPr lang="en-US" dirty="0"/>
-              <a:t> </a:t>
-            </a:r>
-            <a:r>
-              <a:rPr lang="en-US" dirty="0" err="1"/>
-              <a:t>bir</a:t>
-            </a:r>
-            <a:r>
-              <a:rPr lang="en-US" dirty="0"/>
-              <a:t> </a:t>
-            </a:r>
-            <a:r>
-              <a:rPr lang="en-US" dirty="0" err="1"/>
-              <a:t>yapayzeka</a:t>
-            </a:r>
-            <a:r>
-              <a:rPr lang="en-US" dirty="0"/>
-              <a:t> </a:t>
-            </a:r>
-            <a:r>
-              <a:rPr lang="en-US" dirty="0" err="1"/>
-              <a:t>modeli</a:t>
-            </a:r>
-            <a:endParaRPr lang="en-US" dirty="0"/>
-          </a:p>
-          <a:p>
-            <a:pPr>
-              <a:lnSpc>
-                <a:spcPct val="150000"/>
-              </a:lnSpc>
-            </a:pPr>
-            <a:r>
-              <a:rPr lang="en-US" dirty="0" err="1"/>
-              <a:t>Piroliz</a:t>
-            </a:r>
-            <a:r>
-              <a:rPr lang="en-US" dirty="0"/>
-              <a:t> </a:t>
-            </a:r>
-            <a:r>
-              <a:rPr lang="en-US" dirty="0" err="1"/>
-              <a:t>biyoyağı</a:t>
-            </a:r>
-            <a:r>
-              <a:rPr lang="en-US" dirty="0"/>
-              <a:t> – proses </a:t>
-            </a:r>
-            <a:r>
-              <a:rPr lang="en-US" dirty="0" err="1"/>
-              <a:t>koşulları</a:t>
-            </a:r>
-            <a:r>
-              <a:rPr lang="en-US" dirty="0"/>
-              <a:t> – son </a:t>
-            </a:r>
-            <a:r>
-              <a:rPr lang="en-US" dirty="0" err="1"/>
-              <a:t>ürün</a:t>
-            </a:r>
-            <a:r>
-              <a:rPr lang="en-US" dirty="0"/>
-              <a:t> </a:t>
-            </a:r>
-            <a:r>
-              <a:rPr lang="en-US" dirty="0" err="1"/>
-              <a:t>verisi</a:t>
-            </a:r>
-            <a:endParaRPr lang="en-US" dirty="0"/>
-          </a:p>
-          <a:p>
-            <a:pPr lvl="1">
-              <a:lnSpc>
-                <a:spcPct val="150000"/>
-              </a:lnSpc>
-            </a:pPr>
-            <a:r>
-              <a:rPr lang="en-US" dirty="0" err="1"/>
-              <a:t>Simülasyon</a:t>
-            </a:r>
-            <a:endParaRPr lang="en-US" dirty="0"/>
-          </a:p>
-          <a:p>
-            <a:pPr>
-              <a:lnSpc>
-                <a:spcPct val="150000"/>
-              </a:lnSpc>
-            </a:pPr>
-            <a:r>
-              <a:rPr lang="en-US" dirty="0" err="1"/>
-              <a:t>Piroliz</a:t>
-            </a:r>
-            <a:r>
-              <a:rPr lang="en-US" dirty="0"/>
-              <a:t> </a:t>
-            </a:r>
-            <a:r>
-              <a:rPr lang="en-US" dirty="0" err="1"/>
-              <a:t>biyoyağı</a:t>
-            </a:r>
-            <a:r>
-              <a:rPr lang="en-US" dirty="0"/>
-              <a:t> </a:t>
-            </a:r>
-            <a:r>
-              <a:rPr lang="en-US" dirty="0" err="1"/>
-              <a:t>verisi</a:t>
-            </a:r>
-            <a:endParaRPr lang="en-US" dirty="0"/>
-          </a:p>
-          <a:p>
-            <a:pPr lvl="1">
-              <a:lnSpc>
-                <a:spcPct val="150000"/>
-              </a:lnSpc>
-            </a:pPr>
-            <a:r>
-              <a:rPr lang="en-US" dirty="0" err="1"/>
-              <a:t>Literatür</a:t>
-            </a:r>
-            <a:endParaRPr lang="en-US" dirty="0"/>
-          </a:p>
-        </p:txBody>
-      </p:sp>
-    </p:spTree>
-    <p:extLst>
-      <p:ext uri="{BB962C8B-B14F-4D97-AF65-F5344CB8AC3E}">
-        <p14:creationId xmlns:p14="http://schemas.microsoft.com/office/powerpoint/2010/main" val="3170775359"/>
-      </p:ext>
-    </p:extLst>
-  </p:cSld>
-  <p:clrMapOvr>
-    <a:masterClrMapping/>
-  </p:clrMapOvr>
-</p:sld>
-</file>
-
-<file path=ppt/slides/slide30.xml><?xml version="1.0" encoding="utf-8"?>
-<p:sld xmlns:a="http://schemas.openxmlformats.org/drawingml/2006/main" xmlns:r="http://schemas.openxmlformats.org/officeDocument/2006/relationships" xmlns:p="http://schemas.openxmlformats.org/presentationml/2006/main">
-  <p:cSld>
-    <p:spTree>
-      <p:nvGrpSpPr>
-        <p:cNvPr id="1" name="">
-          <a:extLst>
-            <a:ext uri="{FF2B5EF4-FFF2-40B4-BE49-F238E27FC236}">
-              <a16:creationId xmlns:a16="http://schemas.microsoft.com/office/drawing/2014/main" id="{37FBAD5A-2E22-F8B8-64E7-754EE818991A}"/>
-            </a:ext>
-          </a:extLst>
-        </p:cNvPr>
-        <p:cNvGrpSpPr/>
-        <p:nvPr/>
-      </p:nvGrpSpPr>
-      <p:grpSpPr>
-        <a:xfrm>
-          <a:off x="0" y="0"/>
-          <a:ext cx="0" cy="0"/>
-          <a:chOff x="0" y="0"/>
-          <a:chExt cx="0" cy="0"/>
-        </a:xfrm>
-      </p:grpSpPr>
-      <p:sp>
-        <p:nvSpPr>
-          <p:cNvPr id="2" name="Title 1">
-            <a:extLst>
-              <a:ext uri="{FF2B5EF4-FFF2-40B4-BE49-F238E27FC236}">
-                <a16:creationId xmlns:a16="http://schemas.microsoft.com/office/drawing/2014/main" id="{12C92248-DFE6-570E-D94C-3C33F519D75B}"/>
-              </a:ext>
-            </a:extLst>
-          </p:cNvPr>
-          <p:cNvSpPr>
-            <a:spLocks noGrp="1"/>
-          </p:cNvSpPr>
-          <p:nvPr>
-            <p:ph type="title"/>
-          </p:nvPr>
-        </p:nvSpPr>
-        <p:spPr>
-          <a:xfrm>
-            <a:off x="677333" y="609600"/>
-            <a:ext cx="9694832" cy="1320800"/>
-          </a:xfrm>
-        </p:spPr>
-        <p:txBody>
-          <a:bodyPr/>
-          <a:lstStyle/>
-          <a:p>
-            <a:r>
-              <a:rPr lang="en-US" dirty="0" err="1"/>
-              <a:t>Piroliz</a:t>
-            </a:r>
-            <a:r>
-              <a:rPr lang="en-US" dirty="0"/>
-              <a:t> </a:t>
-            </a:r>
-            <a:r>
-              <a:rPr lang="en-US" dirty="0" err="1"/>
-              <a:t>Verisi</a:t>
-            </a:r>
-            <a:r>
-              <a:rPr lang="en-US" dirty="0"/>
-              <a:t> </a:t>
-            </a:r>
-            <a:r>
-              <a:rPr lang="en-US" dirty="0" err="1"/>
-              <a:t>Toplama</a:t>
-            </a:r>
-            <a:endParaRPr lang="en-US" dirty="0"/>
-          </a:p>
-        </p:txBody>
-      </p:sp>
-      <p:sp>
-        <p:nvSpPr>
-          <p:cNvPr id="3" name="Content Placeholder 2">
-            <a:extLst>
-              <a:ext uri="{FF2B5EF4-FFF2-40B4-BE49-F238E27FC236}">
-                <a16:creationId xmlns:a16="http://schemas.microsoft.com/office/drawing/2014/main" id="{ED1DDC90-C0BD-A1E2-1884-28171D563B2C}"/>
-              </a:ext>
-            </a:extLst>
-          </p:cNvPr>
-          <p:cNvSpPr>
-            <a:spLocks noGrp="1"/>
-          </p:cNvSpPr>
-          <p:nvPr>
-            <p:ph idx="1"/>
-          </p:nvPr>
-        </p:nvSpPr>
-        <p:spPr>
-          <a:xfrm>
-            <a:off x="677334" y="1676399"/>
-            <a:ext cx="8596668" cy="5072131"/>
-          </a:xfrm>
-        </p:spPr>
-        <p:txBody>
-          <a:bodyPr>
-            <a:normAutofit/>
-          </a:bodyPr>
-          <a:lstStyle/>
-          <a:p>
-            <a:pPr>
-              <a:lnSpc>
-                <a:spcPct val="150000"/>
-              </a:lnSpc>
-            </a:pPr>
-            <a:endParaRPr lang="tr-TR" dirty="0"/>
-          </a:p>
-        </p:txBody>
-      </p:sp>
-    </p:spTree>
-    <p:extLst>
-      <p:ext uri="{BB962C8B-B14F-4D97-AF65-F5344CB8AC3E}">
-        <p14:creationId xmlns:p14="http://schemas.microsoft.com/office/powerpoint/2010/main" val="2871649868"/>
-      </p:ext>
-    </p:extLst>
-  </p:cSld>
-  <p:clrMapOvr>
-    <a:masterClrMapping/>
-  </p:clrMapOvr>
-</p:sld>
-</file>
-
-<file path=ppt/slides/slide31.xml><?xml version="1.0" encoding="utf-8"?>
-<p:sld xmlns:a="http://schemas.openxmlformats.org/drawingml/2006/main" xmlns:r="http://schemas.openxmlformats.org/officeDocument/2006/relationships" xmlns:p="http://schemas.openxmlformats.org/presentationml/2006/main">
-  <p:cSld>
-    <p:spTree>
-      <p:nvGrpSpPr>
-        <p:cNvPr id="1" name="">
-          <a:extLst>
-            <a:ext uri="{FF2B5EF4-FFF2-40B4-BE49-F238E27FC236}">
-              <a16:creationId xmlns:a16="http://schemas.microsoft.com/office/drawing/2014/main" id="{807374FA-A2B6-CF30-B5B9-F09FAD721AE0}"/>
-            </a:ext>
-          </a:extLst>
-        </p:cNvPr>
-        <p:cNvGrpSpPr/>
-        <p:nvPr/>
-      </p:nvGrpSpPr>
-      <p:grpSpPr>
-        <a:xfrm>
-          <a:off x="0" y="0"/>
-          <a:ext cx="0" cy="0"/>
-          <a:chOff x="0" y="0"/>
-          <a:chExt cx="0" cy="0"/>
-        </a:xfrm>
-      </p:grpSpPr>
-      <p:sp>
-        <p:nvSpPr>
-          <p:cNvPr id="2" name="Title 1">
-            <a:extLst>
-              <a:ext uri="{FF2B5EF4-FFF2-40B4-BE49-F238E27FC236}">
-                <a16:creationId xmlns:a16="http://schemas.microsoft.com/office/drawing/2014/main" id="{6A974B8A-19C3-5664-D47B-CF79A7ADD0DE}"/>
-              </a:ext>
-            </a:extLst>
-          </p:cNvPr>
-          <p:cNvSpPr>
-            <a:spLocks noGrp="1"/>
-          </p:cNvSpPr>
-          <p:nvPr>
-            <p:ph type="title"/>
-          </p:nvPr>
-        </p:nvSpPr>
-        <p:spPr>
-          <a:xfrm>
-            <a:off x="677333" y="609600"/>
-            <a:ext cx="9694832" cy="1320800"/>
-          </a:xfrm>
-        </p:spPr>
-        <p:txBody>
-          <a:bodyPr/>
-          <a:lstStyle/>
-          <a:p>
-            <a:r>
-              <a:rPr lang="en-US" dirty="0" err="1"/>
-              <a:t>Piroliz</a:t>
-            </a:r>
-            <a:r>
-              <a:rPr lang="en-US" dirty="0"/>
-              <a:t> </a:t>
-            </a:r>
-            <a:r>
-              <a:rPr lang="en-US" dirty="0" err="1"/>
-              <a:t>Verisi</a:t>
-            </a:r>
-            <a:r>
-              <a:rPr lang="en-US" dirty="0"/>
-              <a:t> </a:t>
-            </a:r>
-            <a:r>
-              <a:rPr lang="en-US" dirty="0" err="1"/>
-              <a:t>Toplama</a:t>
-            </a:r>
-            <a:endParaRPr lang="en-US" dirty="0"/>
-          </a:p>
-        </p:txBody>
-      </p:sp>
-      <p:sp>
-        <p:nvSpPr>
-          <p:cNvPr id="3" name="Content Placeholder 2">
-            <a:extLst>
-              <a:ext uri="{FF2B5EF4-FFF2-40B4-BE49-F238E27FC236}">
-                <a16:creationId xmlns:a16="http://schemas.microsoft.com/office/drawing/2014/main" id="{9EDC2D24-0126-2697-3C21-88F30C917662}"/>
-              </a:ext>
-            </a:extLst>
-          </p:cNvPr>
-          <p:cNvSpPr>
-            <a:spLocks noGrp="1"/>
-          </p:cNvSpPr>
-          <p:nvPr>
-            <p:ph idx="1"/>
-          </p:nvPr>
-        </p:nvSpPr>
-        <p:spPr>
-          <a:xfrm>
-            <a:off x="677334" y="1676399"/>
-            <a:ext cx="8596668" cy="5072131"/>
-          </a:xfrm>
-        </p:spPr>
-        <p:txBody>
-          <a:bodyPr>
-            <a:normAutofit/>
-          </a:bodyPr>
-          <a:lstStyle/>
-          <a:p>
-            <a:pPr>
-              <a:lnSpc>
-                <a:spcPct val="150000"/>
-              </a:lnSpc>
-            </a:pPr>
-            <a:endParaRPr lang="tr-TR" dirty="0"/>
-          </a:p>
-        </p:txBody>
-      </p:sp>
-    </p:spTree>
-    <p:extLst>
-      <p:ext uri="{BB962C8B-B14F-4D97-AF65-F5344CB8AC3E}">
-        <p14:creationId xmlns:p14="http://schemas.microsoft.com/office/powerpoint/2010/main" val="81319182"/>
-      </p:ext>
-    </p:extLst>
-  </p:cSld>
-  <p:clrMapOvr>
-    <a:masterClrMapping/>
-  </p:clrMapOvr>
-</p:sld>
-</file>
-
-<file path=ppt/slides/slide32.xml><?xml version="1.0" encoding="utf-8"?>
-<p:sld xmlns:a="http://schemas.openxmlformats.org/drawingml/2006/main" xmlns:r="http://schemas.openxmlformats.org/officeDocument/2006/relationships" xmlns:p="http://schemas.openxmlformats.org/presentationml/2006/main">
-  <p:cSld>
-    <p:spTree>
-      <p:nvGrpSpPr>
-        <p:cNvPr id="1" name="">
-          <a:extLst>
-            <a:ext uri="{FF2B5EF4-FFF2-40B4-BE49-F238E27FC236}">
-              <a16:creationId xmlns:a16="http://schemas.microsoft.com/office/drawing/2014/main" id="{EA018369-0EBE-94BB-629F-7CA8B4A65375}"/>
-            </a:ext>
-          </a:extLst>
-        </p:cNvPr>
-        <p:cNvGrpSpPr/>
-        <p:nvPr/>
-      </p:nvGrpSpPr>
-      <p:grpSpPr>
-        <a:xfrm>
-          <a:off x="0" y="0"/>
-          <a:ext cx="0" cy="0"/>
-          <a:chOff x="0" y="0"/>
-          <a:chExt cx="0" cy="0"/>
-        </a:xfrm>
-      </p:grpSpPr>
-      <p:sp>
-        <p:nvSpPr>
-          <p:cNvPr id="2" name="Title 1">
-            <a:extLst>
-              <a:ext uri="{FF2B5EF4-FFF2-40B4-BE49-F238E27FC236}">
-                <a16:creationId xmlns:a16="http://schemas.microsoft.com/office/drawing/2014/main" id="{0E5012EF-FD31-2AC3-F0C7-E63C244F7B91}"/>
-              </a:ext>
-            </a:extLst>
-          </p:cNvPr>
-          <p:cNvSpPr>
-            <a:spLocks noGrp="1"/>
-          </p:cNvSpPr>
-          <p:nvPr>
-            <p:ph type="title"/>
-          </p:nvPr>
-        </p:nvSpPr>
-        <p:spPr>
-          <a:xfrm>
-            <a:off x="677333" y="609600"/>
-            <a:ext cx="9694832" cy="1320800"/>
-          </a:xfrm>
-        </p:spPr>
-        <p:txBody>
-          <a:bodyPr/>
-          <a:lstStyle/>
-          <a:p>
-            <a:r>
-              <a:rPr lang="en-US" dirty="0" err="1"/>
-              <a:t>Piroliz</a:t>
-            </a:r>
-            <a:r>
-              <a:rPr lang="en-US" dirty="0"/>
-              <a:t> </a:t>
-            </a:r>
-            <a:r>
-              <a:rPr lang="en-US" dirty="0" err="1"/>
-              <a:t>Verisi</a:t>
-            </a:r>
-            <a:r>
-              <a:rPr lang="en-US" dirty="0"/>
-              <a:t> </a:t>
-            </a:r>
-            <a:r>
-              <a:rPr lang="en-US" dirty="0" err="1"/>
-              <a:t>Toplama</a:t>
-            </a:r>
-            <a:endParaRPr lang="en-US" dirty="0"/>
-          </a:p>
-        </p:txBody>
-      </p:sp>
-      <p:sp>
-        <p:nvSpPr>
-          <p:cNvPr id="3" name="Content Placeholder 2">
-            <a:extLst>
-              <a:ext uri="{FF2B5EF4-FFF2-40B4-BE49-F238E27FC236}">
-                <a16:creationId xmlns:a16="http://schemas.microsoft.com/office/drawing/2014/main" id="{0C345E5D-BE27-164B-7AB3-A9238D3B4D9C}"/>
-              </a:ext>
-            </a:extLst>
-          </p:cNvPr>
-          <p:cNvSpPr>
-            <a:spLocks noGrp="1"/>
-          </p:cNvSpPr>
-          <p:nvPr>
-            <p:ph idx="1"/>
-          </p:nvPr>
-        </p:nvSpPr>
-        <p:spPr>
-          <a:xfrm>
-            <a:off x="677334" y="1676399"/>
-            <a:ext cx="8596668" cy="5072131"/>
-          </a:xfrm>
-        </p:spPr>
-        <p:txBody>
-          <a:bodyPr>
-            <a:normAutofit/>
-          </a:bodyPr>
-          <a:lstStyle/>
-          <a:p>
-            <a:pPr>
-              <a:lnSpc>
-                <a:spcPct val="150000"/>
-              </a:lnSpc>
-            </a:pPr>
-            <a:endParaRPr lang="tr-TR" dirty="0"/>
-          </a:p>
-        </p:txBody>
-      </p:sp>
-    </p:spTree>
-    <p:extLst>
-      <p:ext uri="{BB962C8B-B14F-4D97-AF65-F5344CB8AC3E}">
-        <p14:creationId xmlns:p14="http://schemas.microsoft.com/office/powerpoint/2010/main" val="4080950603"/>
-      </p:ext>
-    </p:extLst>
-  </p:cSld>
-  <p:clrMapOvr>
-    <a:masterClrMapping/>
-  </p:clrMapOvr>
-</p:sld>
-</file>
-
-<file path=ppt/slides/slide33.xml><?xml version="1.0" encoding="utf-8"?>
+<file path=ppt/slides/slide38.xml><?xml version="1.0" encoding="utf-8"?>
 <p:sld xmlns:a="http://schemas.openxmlformats.org/drawingml/2006/main" xmlns:r="http://schemas.openxmlformats.org/officeDocument/2006/relationships" xmlns:p="http://schemas.openxmlformats.org/presentationml/2006/main">
   <p:cSld>
     <p:spTree>
@@ -14979,110 +18611,6 @@
         <p:cNvPr id="1" name="">
           <a:extLst>
             <a:ext uri="{FF2B5EF4-FFF2-40B4-BE49-F238E27FC236}">
-              <a16:creationId xmlns:a16="http://schemas.microsoft.com/office/drawing/2014/main" id="{47B8BBD9-82FC-640D-7A8D-1FBE8617E601}"/>
-            </a:ext>
-          </a:extLst>
-        </p:cNvPr>
-        <p:cNvGrpSpPr/>
-        <p:nvPr/>
-      </p:nvGrpSpPr>
-      <p:grpSpPr>
-        <a:xfrm>
-          <a:off x="0" y="0"/>
-          <a:ext cx="0" cy="0"/>
-          <a:chOff x="0" y="0"/>
-          <a:chExt cx="0" cy="0"/>
-        </a:xfrm>
-      </p:grpSpPr>
-      <p:sp>
-        <p:nvSpPr>
-          <p:cNvPr id="2" name="Title 1">
-            <a:extLst>
-              <a:ext uri="{FF2B5EF4-FFF2-40B4-BE49-F238E27FC236}">
-                <a16:creationId xmlns:a16="http://schemas.microsoft.com/office/drawing/2014/main" id="{FB8249D9-C5EA-696B-CC2F-DFA90750164E}"/>
-              </a:ext>
-            </a:extLst>
-          </p:cNvPr>
-          <p:cNvSpPr>
-            <a:spLocks noGrp="1"/>
-          </p:cNvSpPr>
-          <p:nvPr>
-            <p:ph type="title"/>
-          </p:nvPr>
-        </p:nvSpPr>
-        <p:spPr>
-          <a:xfrm>
-            <a:off x="677334" y="609599"/>
-            <a:ext cx="5042148" cy="4410635"/>
-          </a:xfrm>
-        </p:spPr>
-        <p:txBody>
-          <a:bodyPr>
-            <a:normAutofit/>
-          </a:bodyPr>
-          <a:lstStyle/>
-          <a:p>
-            <a:pPr>
-              <a:lnSpc>
-                <a:spcPct val="150000"/>
-              </a:lnSpc>
-            </a:pPr>
-            <a:r>
-              <a:rPr lang="en-US" sz="4000" dirty="0" err="1"/>
-              <a:t>Önceki</a:t>
-            </a:r>
-            <a:r>
-              <a:rPr lang="en-US" sz="4000" dirty="0"/>
-              <a:t> </a:t>
-            </a:r>
-            <a:r>
-              <a:rPr lang="en-US" sz="4000" dirty="0" err="1"/>
-              <a:t>Dönemlerde</a:t>
-            </a:r>
-            <a:r>
-              <a:rPr lang="en-US" sz="4000" dirty="0"/>
-              <a:t> </a:t>
-            </a:r>
-            <a:r>
-              <a:rPr lang="en-US" sz="4000" dirty="0" err="1"/>
-              <a:t>Yapılan</a:t>
-            </a:r>
-            <a:r>
-              <a:rPr lang="en-US" sz="4000" dirty="0"/>
-              <a:t> </a:t>
-            </a:r>
-            <a:br>
-              <a:rPr lang="en-US" sz="4000" dirty="0"/>
-            </a:br>
-            <a:r>
-              <a:rPr lang="en-US" sz="4000" dirty="0" err="1"/>
-              <a:t>Çalışmalar</a:t>
-            </a:r>
-            <a:endParaRPr lang="en-US" sz="4000" dirty="0"/>
-          </a:p>
-        </p:txBody>
-      </p:sp>
-    </p:spTree>
-    <p:extLst>
-      <p:ext uri="{BB962C8B-B14F-4D97-AF65-F5344CB8AC3E}">
-        <p14:creationId xmlns:p14="http://schemas.microsoft.com/office/powerpoint/2010/main" val="3984759758"/>
-      </p:ext>
-    </p:extLst>
-  </p:cSld>
-  <p:clrMapOvr>
-    <a:masterClrMapping/>
-  </p:clrMapOvr>
-</p:sld>
-</file>
-
-<file path=ppt/slides/slide5.xml><?xml version="1.0" encoding="utf-8"?>
-<p:sld xmlns:a="http://schemas.openxmlformats.org/drawingml/2006/main" xmlns:r="http://schemas.openxmlformats.org/officeDocument/2006/relationships" xmlns:p="http://schemas.openxmlformats.org/presentationml/2006/main">
-  <p:cSld>
-    <p:spTree>
-      <p:nvGrpSpPr>
-        <p:cNvPr id="1" name="">
-          <a:extLst>
-            <a:ext uri="{FF2B5EF4-FFF2-40B4-BE49-F238E27FC236}">
               <a16:creationId xmlns:a16="http://schemas.microsoft.com/office/drawing/2014/main" id="{66C0114C-EB7F-DA0D-55D3-095E2AE9F6E6}"/>
             </a:ext>
           </a:extLst>
@@ -15144,6 +18672,22 @@
               <a:rPr lang="en-US" dirty="0" err="1"/>
               <a:t>Toplama</a:t>
             </a:r>
+            <a:r>
+              <a:rPr lang="en-US" dirty="0"/>
+              <a:t> </a:t>
+            </a:r>
+            <a:r>
+              <a:rPr lang="en-US" dirty="0" err="1"/>
+              <a:t>ve</a:t>
+            </a:r>
+            <a:r>
+              <a:rPr lang="en-US" dirty="0"/>
+              <a:t> </a:t>
+            </a:r>
+            <a:r>
+              <a:rPr lang="en-US" dirty="0" err="1"/>
+              <a:t>Önişleme</a:t>
+            </a:r>
             <a:endParaRPr lang="en-US" dirty="0"/>
           </a:p>
         </p:txBody>
@@ -15426,7 +18970,7 @@
 </p:sld>
 </file>
 
-<file path=ppt/slides/slide6.xml><?xml version="1.0" encoding="utf-8"?>
+<file path=ppt/slides/slide5.xml><?xml version="1.0" encoding="utf-8"?>
 <p:sld xmlns:a="http://schemas.openxmlformats.org/drawingml/2006/main" xmlns:r="http://schemas.openxmlformats.org/officeDocument/2006/relationships" xmlns:p="http://schemas.openxmlformats.org/presentationml/2006/main">
   <p:cSld>
     <p:spTree>
@@ -15487,14 +19031,6 @@
               <a:rPr lang="en-US" dirty="0" err="1"/>
               <a:t>Verisi</a:t>
             </a:r>
-            <a:r>
-              <a:rPr lang="en-US" dirty="0"/>
-              <a:t> </a:t>
-            </a:r>
-            <a:r>
-              <a:rPr lang="en-US" dirty="0" err="1"/>
-              <a:t>Toplama</a:t>
-            </a:r>
             <a:endParaRPr lang="en-US" dirty="0"/>
           </a:p>
         </p:txBody>
@@ -15934,7 +19470,7 @@
 </p:sld>
 </file>
 
-<file path=ppt/slides/slide7.xml><?xml version="1.0" encoding="utf-8"?>
+<file path=ppt/slides/slide6.xml><?xml version="1.0" encoding="utf-8"?>
 <p:sld xmlns:a="http://schemas.openxmlformats.org/drawingml/2006/main" xmlns:r="http://schemas.openxmlformats.org/officeDocument/2006/relationships" xmlns:p="http://schemas.openxmlformats.org/presentationml/2006/main">
   <p:cSld>
     <p:spTree>
@@ -15972,7 +19508,19 @@
           <a:bodyPr/>
           <a:lstStyle/>
           <a:p>
-            <a:endParaRPr lang="en-US"/>
+            <a:r>
+              <a:rPr lang="en-US" dirty="0" err="1"/>
+              <a:t>Makine</a:t>
+            </a:r>
+            <a:r>
+              <a:rPr lang="en-US" dirty="0"/>
+              <a:t> </a:t>
+            </a:r>
+            <a:r>
+              <a:rPr lang="en-US" dirty="0" err="1"/>
+              <a:t>öğrenmesi</a:t>
+            </a:r>
+            <a:endParaRPr lang="en-US" dirty="0"/>
           </a:p>
         </p:txBody>
       </p:sp>
@@ -16000,7 +19548,7 @@
         </p:spPr>
         <p:txBody>
           <a:bodyPr>
-            <a:normAutofit fontScale="92500" lnSpcReduction="10000"/>
+            <a:normAutofit lnSpcReduction="10000"/>
           </a:bodyPr>
           <a:lstStyle/>
           <a:p>
@@ -16010,217 +19558,197 @@
               </a:lnSpc>
             </a:pPr>
             <a:r>
-              <a:rPr lang="en-US" dirty="0" err="1"/>
-              <a:t>Makine</a:t>
-            </a:r>
-            <a:r>
-              <a:rPr lang="en-US" dirty="0"/>
-              <a:t> </a:t>
-            </a:r>
-            <a:r>
-              <a:rPr lang="en-US" dirty="0" err="1"/>
-              <a:t>öğrenmesi</a:t>
-            </a:r>
-            <a:endParaRPr lang="en-US" dirty="0"/>
-          </a:p>
-          <a:p>
-            <a:pPr lvl="1">
+              <a:rPr lang="en-US" dirty="0"/>
+              <a:t>Destek </a:t>
+            </a:r>
+            <a:r>
+              <a:rPr lang="en-US" dirty="0" err="1"/>
+              <a:t>vektör</a:t>
+            </a:r>
+            <a:r>
+              <a:rPr lang="en-US" dirty="0"/>
+              <a:t> </a:t>
+            </a:r>
+            <a:r>
+              <a:rPr lang="en-US" dirty="0" err="1"/>
+              <a:t>regresyonu</a:t>
+            </a:r>
+            <a:r>
+              <a:rPr lang="en-US" dirty="0"/>
+              <a:t> (SVR)</a:t>
+            </a:r>
+          </a:p>
+          <a:p>
+            <a:pPr>
               <a:lnSpc>
                 <a:spcPct val="150000"/>
               </a:lnSpc>
             </a:pPr>
             <a:r>
-              <a:rPr lang="en-US" dirty="0"/>
-              <a:t>Destek </a:t>
-            </a:r>
-            <a:r>
-              <a:rPr lang="en-US" dirty="0" err="1"/>
-              <a:t>vektör</a:t>
-            </a:r>
-            <a:r>
-              <a:rPr lang="en-US" dirty="0"/>
-              <a:t> </a:t>
-            </a:r>
-            <a:r>
-              <a:rPr lang="en-US" dirty="0" err="1"/>
-              <a:t>regresyonu</a:t>
-            </a:r>
-            <a:r>
-              <a:rPr lang="en-US" dirty="0"/>
-              <a:t> (SVR)</a:t>
-            </a:r>
-          </a:p>
-          <a:p>
-            <a:pPr lvl="1">
+              <a:rPr lang="en-US" dirty="0" err="1"/>
+              <a:t>Çok</a:t>
+            </a:r>
+            <a:r>
+              <a:rPr lang="en-US" dirty="0"/>
+              <a:t> </a:t>
+            </a:r>
+            <a:r>
+              <a:rPr lang="en-US" dirty="0" err="1"/>
+              <a:t>değişkenli</a:t>
+            </a:r>
+            <a:r>
+              <a:rPr lang="en-US" dirty="0"/>
+              <a:t> </a:t>
+            </a:r>
+            <a:r>
+              <a:rPr lang="en-US" dirty="0" err="1"/>
+              <a:t>uyarlamalı</a:t>
+            </a:r>
+            <a:r>
+              <a:rPr lang="en-US" dirty="0"/>
+              <a:t> </a:t>
+            </a:r>
+            <a:r>
+              <a:rPr lang="en-US" dirty="0" err="1"/>
+              <a:t>regresyon</a:t>
+            </a:r>
+            <a:r>
+              <a:rPr lang="en-US" dirty="0"/>
+              <a:t> </a:t>
+            </a:r>
+            <a:r>
+              <a:rPr lang="en-US" dirty="0" err="1"/>
+              <a:t>spline’ları</a:t>
+            </a:r>
+            <a:r>
+              <a:rPr lang="en-US" dirty="0"/>
+              <a:t> (MARS)</a:t>
+            </a:r>
+          </a:p>
+          <a:p>
+            <a:pPr>
               <a:lnSpc>
                 <a:spcPct val="150000"/>
               </a:lnSpc>
             </a:pPr>
             <a:r>
               <a:rPr lang="en-US" dirty="0" err="1"/>
-              <a:t>Çok</a:t>
-            </a:r>
-            <a:r>
-              <a:rPr lang="en-US" dirty="0"/>
-              <a:t> </a:t>
-            </a:r>
-            <a:r>
-              <a:rPr lang="en-US" dirty="0" err="1"/>
-              <a:t>değişkenli</a:t>
-            </a:r>
-            <a:r>
-              <a:rPr lang="en-US" dirty="0"/>
-              <a:t> </a:t>
-            </a:r>
-            <a:r>
-              <a:rPr lang="en-US" dirty="0" err="1"/>
-              <a:t>uyarlamalı</a:t>
-            </a:r>
-            <a:r>
-              <a:rPr lang="en-US" dirty="0"/>
-              <a:t> </a:t>
-            </a:r>
-            <a:r>
-              <a:rPr lang="en-US" dirty="0" err="1"/>
-              <a:t>regresyon</a:t>
-            </a:r>
-            <a:r>
-              <a:rPr lang="en-US" dirty="0"/>
-              <a:t> </a:t>
-            </a:r>
-            <a:r>
-              <a:rPr lang="en-US" dirty="0" err="1"/>
-              <a:t>spline’ları</a:t>
-            </a:r>
-            <a:r>
-              <a:rPr lang="en-US" dirty="0"/>
-              <a:t> (MARS)</a:t>
-            </a:r>
-          </a:p>
-          <a:p>
-            <a:pPr lvl="1">
+              <a:t>Rastegele</a:t>
+            </a:r>
+            <a:r>
+              <a:rPr lang="en-US" dirty="0"/>
+              <a:t> </a:t>
+            </a:r>
+            <a:r>
+              <a:rPr lang="en-US" dirty="0" err="1"/>
+              <a:t>karar</a:t>
+            </a:r>
+            <a:r>
+              <a:rPr lang="en-US" dirty="0"/>
+              <a:t> </a:t>
+            </a:r>
+            <a:r>
+              <a:rPr lang="en-US" dirty="0" err="1"/>
+              <a:t>ormanları</a:t>
+            </a:r>
+            <a:r>
+              <a:rPr lang="en-US" dirty="0"/>
+              <a:t> (RF)</a:t>
+            </a:r>
+          </a:p>
+          <a:p>
+            <a:pPr>
               <a:lnSpc>
                 <a:spcPct val="150000"/>
               </a:lnSpc>
             </a:pPr>
             <a:r>
               <a:rPr lang="en-US" dirty="0" err="1"/>
-              <a:t>Rastegele</a:t>
-            </a:r>
-            <a:r>
-              <a:rPr lang="en-US" dirty="0"/>
-              <a:t> </a:t>
-            </a:r>
-            <a:r>
-              <a:rPr lang="en-US" dirty="0" err="1"/>
-              <a:t>karar</a:t>
-            </a:r>
-            <a:r>
-              <a:rPr lang="en-US" dirty="0"/>
-              <a:t> </a:t>
-            </a:r>
-            <a:r>
-              <a:rPr lang="en-US" dirty="0" err="1"/>
-              <a:t>ormanları</a:t>
-            </a:r>
-            <a:r>
-              <a:rPr lang="en-US" dirty="0"/>
-              <a:t> (RF)</a:t>
-            </a:r>
-          </a:p>
-          <a:p>
-            <a:pPr lvl="1">
+              <a:t>Gradyan</a:t>
+            </a:r>
+            <a:r>
+              <a:rPr lang="en-US" dirty="0"/>
+              <a:t> </a:t>
+            </a:r>
+            <a:r>
+              <a:rPr lang="en-US" dirty="0" err="1"/>
+              <a:t>Artırmalı</a:t>
+            </a:r>
+            <a:r>
+              <a:rPr lang="en-US" dirty="0"/>
+              <a:t> </a:t>
+            </a:r>
+            <a:r>
+              <a:rPr lang="en-US" dirty="0" err="1"/>
+              <a:t>Ağaçlar</a:t>
+            </a:r>
+            <a:r>
+              <a:rPr lang="en-US" dirty="0"/>
+              <a:t> (GTB)</a:t>
+            </a:r>
+          </a:p>
+          <a:p>
+            <a:pPr>
               <a:lnSpc>
                 <a:spcPct val="150000"/>
               </a:lnSpc>
             </a:pPr>
             <a:r>
               <a:rPr lang="en-US" dirty="0" err="1"/>
-              <a:t>Gradyan</a:t>
-            </a:r>
-            <a:r>
-              <a:rPr lang="en-US" dirty="0"/>
-              <a:t> </a:t>
-            </a:r>
-            <a:r>
-              <a:rPr lang="en-US" dirty="0" err="1"/>
-              <a:t>Artırmalı</a:t>
-            </a:r>
-            <a:r>
-              <a:rPr lang="en-US" dirty="0"/>
-              <a:t> </a:t>
-            </a:r>
-            <a:r>
-              <a:rPr lang="en-US" dirty="0" err="1"/>
-              <a:t>Ağaçlar</a:t>
-            </a:r>
-            <a:r>
-              <a:rPr lang="en-US" dirty="0"/>
-              <a:t> (GTB)</a:t>
-            </a:r>
-          </a:p>
-          <a:p>
-            <a:pPr lvl="1">
+              <a:t>Yapay</a:t>
+            </a:r>
+            <a:r>
+              <a:rPr lang="en-US" dirty="0"/>
+              <a:t> </a:t>
+            </a:r>
+            <a:r>
+              <a:rPr lang="en-US" dirty="0" err="1"/>
+              <a:t>sinir</a:t>
+            </a:r>
+            <a:r>
+              <a:rPr lang="en-US" dirty="0"/>
+              <a:t> </a:t>
+            </a:r>
+            <a:r>
+              <a:rPr lang="en-US" dirty="0" err="1"/>
+              <a:t>ağları</a:t>
+            </a:r>
+            <a:r>
+              <a:rPr lang="en-US" dirty="0"/>
+              <a:t> (ANN)</a:t>
+            </a:r>
+          </a:p>
+          <a:p>
+            <a:pPr>
               <a:lnSpc>
                 <a:spcPct val="150000"/>
               </a:lnSpc>
             </a:pPr>
             <a:r>
               <a:rPr lang="en-US" dirty="0" err="1"/>
-              <a:t>Yapay</a:t>
-            </a:r>
-            <a:r>
-              <a:rPr lang="en-US" dirty="0"/>
-              <a:t> </a:t>
-            </a:r>
-            <a:r>
-              <a:rPr lang="en-US" dirty="0" err="1"/>
-              <a:t>sinir</a:t>
-            </a:r>
-            <a:r>
-              <a:rPr lang="en-US" dirty="0"/>
-              <a:t> </a:t>
-            </a:r>
-            <a:r>
-              <a:rPr lang="en-US" dirty="0" err="1"/>
-              <a:t>ağları</a:t>
-            </a:r>
-            <a:r>
-              <a:rPr lang="en-US" dirty="0"/>
-              <a:t> (ANN)</a:t>
-            </a:r>
-          </a:p>
-          <a:p>
-            <a:pPr lvl="1">
+              <a:t>XGBoost</a:t>
+            </a:r>
+            <a:r>
+              <a:rPr lang="en-US" dirty="0"/>
+              <a:t> (</a:t>
+            </a:r>
+            <a:r>
+              <a:rPr lang="en-US" dirty="0" err="1"/>
+              <a:t>eXtreme</a:t>
+            </a:r>
+            <a:r>
+              <a:rPr lang="en-US" dirty="0"/>
+              <a:t> Gradient Boosting) </a:t>
+            </a:r>
+          </a:p>
+          <a:p>
+            <a:pPr>
               <a:lnSpc>
                 <a:spcPct val="150000"/>
               </a:lnSpc>
             </a:pPr>
             <a:r>
               <a:rPr lang="en-US" dirty="0" err="1"/>
-              <a:t>XGBoost</a:t>
-            </a:r>
-            <a:r>
-              <a:rPr lang="en-US" dirty="0"/>
-              <a:t> (</a:t>
-            </a:r>
-            <a:r>
-              <a:rPr lang="en-US" dirty="0" err="1"/>
-              <a:t>eXtreme</a:t>
-            </a:r>
-            <a:r>
-              <a:rPr lang="en-US" dirty="0"/>
-              <a:t> Gradient Boosting) </a:t>
-            </a:r>
-          </a:p>
-          <a:p>
-            <a:pPr lvl="1">
-              <a:lnSpc>
-                <a:spcPct val="150000"/>
-              </a:lnSpc>
-            </a:pPr>
-            <a:r>
-              <a:rPr lang="en-US" dirty="0" err="1"/>
               <a:t>LightGBM</a:t>
             </a:r>
             <a:r>
@@ -16229,7 +19757,7 @@
             </a:r>
           </a:p>
           <a:p>
-            <a:pPr lvl="1">
+            <a:pPr>
               <a:lnSpc>
                 <a:spcPct val="150000"/>
               </a:lnSpc>
@@ -16262,7 +19790,7 @@
 </p:sld>
 </file>
 
-<file path=ppt/slides/slide8.xml><?xml version="1.0" encoding="utf-8"?>
+<file path=ppt/slides/slide7.xml><?xml version="1.0" encoding="utf-8"?>
 <p:sld xmlns:a="http://schemas.openxmlformats.org/drawingml/2006/main" xmlns:r="http://schemas.openxmlformats.org/officeDocument/2006/relationships" xmlns:p="http://schemas.openxmlformats.org/presentationml/2006/main">
   <p:cSld>
     <p:spTree>
@@ -16394,7 +19922,7 @@
             </a:r>
             <a:r>
               <a:rPr lang="en-US" baseline="30000" dirty="0"/>
-              <a:t> [8]</a:t>
+              <a:t> [1]</a:t>
             </a:r>
             <a:r>
               <a:rPr lang="en-US" dirty="0"/>
@@ -16837,7 +20365,7 @@
           <a:p>
             <a:r>
               <a:rPr lang="en-US" sz="1200" dirty="0"/>
-              <a:t>[8]: Leng, E., He, B., Chen, J., Liao, G., Ma, Y., Zhang, F., Liu, S., &amp; E, J. </a:t>
+              <a:t>[1]: Leng, E., He, B., Chen, J., Liao, G., Ma, Y., Zhang, F., Liu, S., &amp; E, J. </a:t>
             </a:r>
             <a:r>
               <a:rPr lang="en-US" sz="1200" i="1" dirty="0"/>
@@ -16863,7 +20391,7 @@
 </p:sld>
 </file>
 
-<file path=ppt/slides/slide9.xml><?xml version="1.0" encoding="utf-8"?>
+<file path=ppt/slides/slide8.xml><?xml version="1.0" encoding="utf-8"?>
 <p:sld xmlns:a="http://schemas.openxmlformats.org/drawingml/2006/main" xmlns:r="http://schemas.openxmlformats.org/officeDocument/2006/relationships" xmlns:p="http://schemas.openxmlformats.org/presentationml/2006/main">
   <p:cSld>
     <p:spTree>
@@ -17066,6 +20594,107 @@
     <p:extLst>
       <p:ext uri="{BB962C8B-B14F-4D97-AF65-F5344CB8AC3E}">
         <p14:creationId xmlns:p14="http://schemas.microsoft.com/office/powerpoint/2010/main" val="3671067136"/>
+      </p:ext>
+    </p:extLst>
+  </p:cSld>
+  <p:clrMapOvr>
+    <a:masterClrMapping/>
+  </p:clrMapOvr>
+</p:sld>
+</file>
+
+<file path=ppt/slides/slide9.xml><?xml version="1.0" encoding="utf-8"?>
+<p:sld xmlns:a="http://schemas.openxmlformats.org/drawingml/2006/main" xmlns:r="http://schemas.openxmlformats.org/officeDocument/2006/relationships" xmlns:p="http://schemas.openxmlformats.org/presentationml/2006/main">
+  <p:cSld>
+    <p:spTree>
+      <p:nvGrpSpPr>
+        <p:cNvPr id="1" name="">
+          <a:extLst>
+            <a:ext uri="{FF2B5EF4-FFF2-40B4-BE49-F238E27FC236}">
+              <a16:creationId xmlns:a16="http://schemas.microsoft.com/office/drawing/2014/main" id="{F2349E41-300E-119D-6B49-64DB882FCABB}"/>
+            </a:ext>
+          </a:extLst>
+        </p:cNvPr>
+        <p:cNvGrpSpPr/>
+        <p:nvPr/>
+      </p:nvGrpSpPr>
+      <p:grpSpPr>
+        <a:xfrm>
+          <a:off x="0" y="0"/>
+          <a:ext cx="0" cy="0"/>
+          <a:chOff x="0" y="0"/>
+          <a:chExt cx="0" cy="0"/>
+        </a:xfrm>
+      </p:grpSpPr>
+      <p:sp>
+        <p:nvSpPr>
+          <p:cNvPr id="2" name="Title 1">
+            <a:extLst>
+              <a:ext uri="{FF2B5EF4-FFF2-40B4-BE49-F238E27FC236}">
+                <a16:creationId xmlns:a16="http://schemas.microsoft.com/office/drawing/2014/main" id="{50738DB7-786A-B9FF-10B9-D74C93C02EDB}"/>
+              </a:ext>
+            </a:extLst>
+          </p:cNvPr>
+          <p:cNvSpPr>
+            <a:spLocks noGrp="1"/>
+          </p:cNvSpPr>
+          <p:nvPr>
+            <p:ph type="title"/>
+          </p:nvPr>
+        </p:nvSpPr>
+        <p:spPr>
+          <a:xfrm>
+            <a:off x="677334" y="609599"/>
+            <a:ext cx="4333937" cy="4410635"/>
+          </a:xfrm>
+        </p:spPr>
+        <p:txBody>
+          <a:bodyPr>
+            <a:normAutofit/>
+          </a:bodyPr>
+          <a:lstStyle/>
+          <a:p>
+            <a:pPr>
+              <a:lnSpc>
+                <a:spcPct val="150000"/>
+              </a:lnSpc>
+            </a:pPr>
+            <a:r>
+              <a:rPr lang="en-US" sz="4000" dirty="0" err="1"/>
+              <a:t>Dönem</a:t>
+            </a:r>
+            <a:r>
+              <a:rPr lang="en-US" sz="4000" dirty="0"/>
+              <a:t> </a:t>
+            </a:r>
+            <a:r>
+              <a:rPr lang="en-US" sz="4000" dirty="0" err="1"/>
+              <a:t>İçinde</a:t>
+            </a:r>
+            <a:r>
+              <a:rPr lang="en-US" sz="4000" dirty="0"/>
+              <a:t> </a:t>
+            </a:r>
+            <a:r>
+              <a:rPr lang="en-US" sz="4000" dirty="0" err="1"/>
+              <a:t>Yapılan</a:t>
+            </a:r>
+            <a:r>
+              <a:rPr lang="en-US" sz="4000" dirty="0"/>
+              <a:t> </a:t>
+            </a:r>
+            <a:r>
+              <a:rPr lang="en-US" sz="4000" dirty="0" err="1"/>
+              <a:t>Çalışmalar</a:t>
+            </a:r>
+            <a:endParaRPr lang="en-US" sz="4000" dirty="0"/>
+          </a:p>
+        </p:txBody>
+      </p:sp>
+    </p:spTree>
+    <p:extLst>
+      <p:ext uri="{BB962C8B-B14F-4D97-AF65-F5344CB8AC3E}">
+        <p14:creationId xmlns:p14="http://schemas.microsoft.com/office/powerpoint/2010/main" val="1140966695"/>
       </p:ext>
     </p:extLst>
   </p:cSld>

--- a/tik4_sunum.pptx
+++ b/tik4_sunum.pptx
@@ -5,7 +5,7 @@
     <p:sldMasterId id="2147483672" r:id="rId1"/>
   </p:sldMasterIdLst>
   <p:notesMasterIdLst>
-    <p:notesMasterId r:id="rId40"/>
+    <p:notesMasterId r:id="rId39"/>
   </p:notesMasterIdLst>
   <p:sldIdLst>
     <p:sldId id="256" r:id="rId2"/>
@@ -40,12 +40,11 @@
     <p:sldId id="403" r:id="rId31"/>
     <p:sldId id="404" r:id="rId32"/>
     <p:sldId id="406" r:id="rId33"/>
-    <p:sldId id="405" r:id="rId34"/>
-    <p:sldId id="407" r:id="rId35"/>
-    <p:sldId id="408" r:id="rId36"/>
-    <p:sldId id="426" r:id="rId37"/>
-    <p:sldId id="427" r:id="rId38"/>
-    <p:sldId id="293" r:id="rId39"/>
+    <p:sldId id="407" r:id="rId34"/>
+    <p:sldId id="408" r:id="rId35"/>
+    <p:sldId id="426" r:id="rId36"/>
+    <p:sldId id="427" r:id="rId37"/>
+    <p:sldId id="293" r:id="rId38"/>
   </p:sldIdLst>
   <p:sldSz cx="12192000" cy="6858000"/>
   <p:notesSz cx="6858000" cy="9144000"/>
@@ -246,7 +245,7 @@
           <a:p>
             <a:fld id="{12806725-A5C6-4D97-BAB5-97495DA97B1D}" type="datetimeFigureOut">
               <a:rPr lang="en-US" smtClean="0"/>
-              <a:t>12/25/2025</a:t>
+              <a:t>12/26/2025</a:t>
             </a:fld>
             <a:endParaRPr lang="en-US"/>
           </a:p>
@@ -1235,7 +1234,7 @@
           <a:p>
             <a:fld id="{A96287EC-2D8B-4839-853F-448EC8EF3B82}" type="datetimeFigureOut">
               <a:rPr lang="en-US" smtClean="0"/>
-              <a:t>12/25/2025</a:t>
+              <a:t>12/26/2025</a:t>
             </a:fld>
             <a:endParaRPr lang="en-US"/>
           </a:p>
@@ -1486,7 +1485,7 @@
           <a:p>
             <a:fld id="{A96287EC-2D8B-4839-853F-448EC8EF3B82}" type="datetimeFigureOut">
               <a:rPr lang="en-US" smtClean="0"/>
-              <a:t>12/25/2025</a:t>
+              <a:t>12/26/2025</a:t>
             </a:fld>
             <a:endParaRPr lang="en-US"/>
           </a:p>
@@ -1800,7 +1799,7 @@
           <a:p>
             <a:fld id="{A96287EC-2D8B-4839-853F-448EC8EF3B82}" type="datetimeFigureOut">
               <a:rPr lang="en-US" smtClean="0"/>
-              <a:t>12/25/2025</a:t>
+              <a:t>12/26/2025</a:t>
             </a:fld>
             <a:endParaRPr lang="en-US"/>
           </a:p>
@@ -2141,7 +2140,7 @@
           <a:p>
             <a:fld id="{A96287EC-2D8B-4839-853F-448EC8EF3B82}" type="datetimeFigureOut">
               <a:rPr lang="en-US" smtClean="0"/>
-              <a:t>12/25/2025</a:t>
+              <a:t>12/26/2025</a:t>
             </a:fld>
             <a:endParaRPr lang="en-US"/>
           </a:p>
@@ -2455,7 +2454,7 @@
           <a:p>
             <a:fld id="{A96287EC-2D8B-4839-853F-448EC8EF3B82}" type="datetimeFigureOut">
               <a:rPr lang="en-US" smtClean="0"/>
-              <a:t>12/25/2025</a:t>
+              <a:t>12/26/2025</a:t>
             </a:fld>
             <a:endParaRPr lang="en-US"/>
           </a:p>
@@ -2848,7 +2847,7 @@
           <a:p>
             <a:fld id="{A96287EC-2D8B-4839-853F-448EC8EF3B82}" type="datetimeFigureOut">
               <a:rPr lang="en-US" smtClean="0"/>
-              <a:t>12/25/2025</a:t>
+              <a:t>12/26/2025</a:t>
             </a:fld>
             <a:endParaRPr lang="en-US"/>
           </a:p>
@@ -3018,7 +3017,7 @@
           <a:p>
             <a:fld id="{A96287EC-2D8B-4839-853F-448EC8EF3B82}" type="datetimeFigureOut">
               <a:rPr lang="en-US" smtClean="0"/>
-              <a:t>12/25/2025</a:t>
+              <a:t>12/26/2025</a:t>
             </a:fld>
             <a:endParaRPr lang="en-US"/>
           </a:p>
@@ -3198,7 +3197,7 @@
           <a:p>
             <a:fld id="{A96287EC-2D8B-4839-853F-448EC8EF3B82}" type="datetimeFigureOut">
               <a:rPr lang="en-US" smtClean="0"/>
-              <a:t>12/25/2025</a:t>
+              <a:t>12/26/2025</a:t>
             </a:fld>
             <a:endParaRPr lang="en-US"/>
           </a:p>
@@ -3374,7 +3373,7 @@
           <a:p>
             <a:fld id="{A96287EC-2D8B-4839-853F-448EC8EF3B82}" type="datetimeFigureOut">
               <a:rPr lang="en-US" smtClean="0"/>
-              <a:t>12/25/2025</a:t>
+              <a:t>12/26/2025</a:t>
             </a:fld>
             <a:endParaRPr lang="en-US"/>
           </a:p>
@@ -3621,7 +3620,7 @@
           <a:p>
             <a:fld id="{A96287EC-2D8B-4839-853F-448EC8EF3B82}" type="datetimeFigureOut">
               <a:rPr lang="en-US" smtClean="0"/>
-              <a:t>12/25/2025</a:t>
+              <a:t>12/26/2025</a:t>
             </a:fld>
             <a:endParaRPr lang="en-US"/>
           </a:p>
@@ -3853,7 +3852,7 @@
           <a:p>
             <a:fld id="{A96287EC-2D8B-4839-853F-448EC8EF3B82}" type="datetimeFigureOut">
               <a:rPr lang="en-US" smtClean="0"/>
-              <a:t>12/25/2025</a:t>
+              <a:t>12/26/2025</a:t>
             </a:fld>
             <a:endParaRPr lang="en-US"/>
           </a:p>
@@ -4227,7 +4226,7 @@
           <a:p>
             <a:fld id="{A96287EC-2D8B-4839-853F-448EC8EF3B82}" type="datetimeFigureOut">
               <a:rPr lang="en-US" smtClean="0"/>
-              <a:t>12/25/2025</a:t>
+              <a:t>12/26/2025</a:t>
             </a:fld>
             <a:endParaRPr lang="en-US"/>
           </a:p>
@@ -4350,7 +4349,7 @@
           <a:p>
             <a:fld id="{A96287EC-2D8B-4839-853F-448EC8EF3B82}" type="datetimeFigureOut">
               <a:rPr lang="en-US" smtClean="0"/>
-              <a:t>12/25/2025</a:t>
+              <a:t>12/26/2025</a:t>
             </a:fld>
             <a:endParaRPr lang="en-US"/>
           </a:p>
@@ -4445,7 +4444,7 @@
           <a:p>
             <a:fld id="{A96287EC-2D8B-4839-853F-448EC8EF3B82}" type="datetimeFigureOut">
               <a:rPr lang="en-US" smtClean="0"/>
-              <a:t>12/25/2025</a:t>
+              <a:t>12/26/2025</a:t>
             </a:fld>
             <a:endParaRPr lang="en-US"/>
           </a:p>
@@ -4700,7 +4699,7 @@
           <a:p>
             <a:fld id="{A96287EC-2D8B-4839-853F-448EC8EF3B82}" type="datetimeFigureOut">
               <a:rPr lang="en-US" smtClean="0"/>
-              <a:t>12/25/2025</a:t>
+              <a:t>12/26/2025</a:t>
             </a:fld>
             <a:endParaRPr lang="en-US"/>
           </a:p>
@@ -4963,7 +4962,7 @@
           <a:p>
             <a:fld id="{A96287EC-2D8B-4839-853F-448EC8EF3B82}" type="datetimeFigureOut">
               <a:rPr lang="en-US" smtClean="0"/>
-              <a:t>12/25/2025</a:t>
+              <a:t>12/26/2025</a:t>
             </a:fld>
             <a:endParaRPr lang="en-US"/>
           </a:p>
@@ -5706,7 +5705,7 @@
           <a:p>
             <a:fld id="{A96287EC-2D8B-4839-853F-448EC8EF3B82}" type="datetimeFigureOut">
               <a:rPr lang="en-US" smtClean="0"/>
-              <a:t>12/25/2025</a:t>
+              <a:t>12/26/2025</a:t>
             </a:fld>
             <a:endParaRPr lang="en-US"/>
           </a:p>
@@ -6735,7 +6734,7 @@
             </a:pPr>
             <a:r>
               <a:rPr lang="en-US" dirty="0" err="1"/>
-              <a:t>singaz</a:t>
+              <a:t>Biyoyağ</a:t>
             </a:r>
             <a:r>
               <a:rPr lang="en-US" dirty="0"/>
@@ -6786,7 +6785,7 @@
             </a:r>
             <a:r>
               <a:rPr lang="en-US" dirty="0" err="1"/>
-              <a:t>Biyoysğ</a:t>
+              <a:t>singaz</a:t>
             </a:r>
             <a:r>
               <a:rPr lang="en-US" dirty="0"/>
@@ -7846,6 +7845,30 @@
             </a:r>
             <a:r>
               <a:rPr lang="en-US" dirty="0" err="1"/>
+              <a:t>bir</a:t>
+            </a:r>
+            <a:r>
+              <a:rPr lang="en-US" dirty="0"/>
+              <a:t> </a:t>
+            </a:r>
+            <a:r>
+              <a:rPr lang="en-US" dirty="0" err="1"/>
+              <a:t>biyo-yağ</a:t>
+            </a:r>
+            <a:r>
+              <a:rPr lang="en-US" dirty="0"/>
+              <a:t> </a:t>
+            </a:r>
+            <a:r>
+              <a:rPr lang="en-US" dirty="0" err="1"/>
+              <a:t>karışımında</a:t>
+            </a:r>
+            <a:r>
+              <a:rPr lang="en-US" dirty="0"/>
+              <a:t> </a:t>
+            </a:r>
+            <a:r>
+              <a:rPr lang="en-US" dirty="0" err="1"/>
               <a:t>hedef</a:t>
             </a:r>
             <a:r>
@@ -7854,14 +7877,6 @@
             </a:r>
             <a:r>
               <a:rPr lang="en-US" dirty="0" err="1"/>
-              <a:t>olan</a:t>
-            </a:r>
-            <a:r>
-              <a:rPr lang="en-US" dirty="0"/>
-              <a:t> </a:t>
-            </a:r>
-            <a:r>
-              <a:rPr lang="en-US" dirty="0" err="1"/>
               <a:t>hidrojen</a:t>
             </a:r>
             <a:r>
@@ -7882,51 +7897,19 @@
             </a:r>
             <a:r>
               <a:rPr lang="en-US" dirty="0"/>
-              <a:t> </a:t>
-            </a:r>
-            <a:r>
-              <a:rPr lang="en-US" dirty="0" err="1"/>
-              <a:t>en</a:t>
-            </a:r>
-            <a:r>
-              <a:rPr lang="en-US" dirty="0"/>
-              <a:t> </a:t>
-            </a:r>
-            <a:r>
-              <a:rPr lang="en-US" dirty="0" err="1"/>
-              <a:t>uygun</a:t>
-            </a:r>
-            <a:r>
-              <a:rPr lang="en-US" dirty="0"/>
-              <a:t> </a:t>
-            </a:r>
-            <a:r>
-              <a:rPr lang="en-US" dirty="0" err="1"/>
-              <a:t>biyo-yağ</a:t>
-            </a:r>
-            <a:r>
-              <a:rPr lang="en-US" dirty="0"/>
-              <a:t> </a:t>
-            </a:r>
-            <a:r>
-              <a:rPr lang="en-US" dirty="0" err="1"/>
-              <a:t>karışımının</a:t>
-            </a:r>
-            <a:r>
-              <a:rPr lang="en-US" dirty="0"/>
-              <a:t> ne </a:t>
-            </a:r>
-            <a:r>
-              <a:rPr lang="en-US" dirty="0" err="1"/>
-              <a:t>olması</a:t>
-            </a:r>
-            <a:r>
-              <a:rPr lang="en-US" dirty="0"/>
-              <a:t> </a:t>
-            </a:r>
-            <a:r>
-              <a:rPr lang="en-US" dirty="0" err="1"/>
-              <a:t>gerektiğini</a:t>
+              <a:t> hangi proses </a:t>
+            </a:r>
+            <a:r>
+              <a:rPr lang="en-US" dirty="0" err="1"/>
+              <a:t>parametrelerinin</a:t>
+            </a:r>
+            <a:r>
+              <a:rPr lang="en-US" dirty="0"/>
+              <a:t> </a:t>
+            </a:r>
+            <a:r>
+              <a:rPr lang="en-US" dirty="0" err="1"/>
+              <a:t>gerektiği</a:t>
             </a:r>
             <a:r>
               <a:rPr lang="en-US" dirty="0"/>
@@ -8632,8 +8615,84 @@
               </a:lnSpc>
             </a:pPr>
             <a:r>
-              <a:rPr lang="en-US" dirty="0" err="1"/>
-              <a:t>Sistem</a:t>
+              <a:rPr lang="en-US" dirty="0"/>
+              <a:t>Bu </a:t>
+            </a:r>
+            <a:r>
+              <a:rPr lang="en-US" dirty="0" err="1"/>
+              <a:t>optimizasyon</a:t>
+            </a:r>
+            <a:r>
+              <a:rPr lang="en-US" dirty="0"/>
+              <a:t> </a:t>
+            </a:r>
+            <a:r>
+              <a:rPr lang="en-US" dirty="0" err="1"/>
+              <a:t>problemi</a:t>
+            </a:r>
+            <a:r>
+              <a:rPr lang="en-US" dirty="0"/>
+              <a:t> </a:t>
+            </a:r>
+            <a:r>
+              <a:rPr lang="en-US" dirty="0" err="1"/>
+              <a:t>doğrusal</a:t>
+            </a:r>
+            <a:r>
+              <a:rPr lang="en-US" dirty="0"/>
+              <a:t> </a:t>
+            </a:r>
+            <a:r>
+              <a:rPr lang="en-US" dirty="0" err="1"/>
+              <a:t>olmayan</a:t>
+            </a:r>
+            <a:r>
+              <a:rPr lang="en-US" dirty="0"/>
+              <a:t> </a:t>
+            </a:r>
+            <a:r>
+              <a:rPr lang="en-US" dirty="0" err="1"/>
+              <a:t>kısıtlı</a:t>
+            </a:r>
+            <a:r>
+              <a:rPr lang="en-US" dirty="0"/>
+              <a:t> </a:t>
+            </a:r>
+            <a:r>
+              <a:rPr lang="en-US" dirty="0" err="1"/>
+              <a:t>bir</a:t>
+            </a:r>
+            <a:r>
+              <a:rPr lang="en-US" dirty="0"/>
+              <a:t> </a:t>
+            </a:r>
+            <a:r>
+              <a:rPr lang="en-US" dirty="0" err="1"/>
+              <a:t>problemdir</a:t>
+            </a:r>
+            <a:r>
+              <a:rPr lang="en-US" dirty="0"/>
+              <a:t> </a:t>
+            </a:r>
+            <a:r>
+              <a:rPr lang="en-US" dirty="0" err="1"/>
+              <a:t>ve</a:t>
+            </a:r>
+            <a:r>
+              <a:rPr lang="en-US" dirty="0"/>
+              <a:t> Cantera </a:t>
+            </a:r>
+            <a:r>
+              <a:rPr lang="en-US" dirty="0" err="1"/>
+              <a:t>bunu</a:t>
+            </a:r>
+            <a:r>
+              <a:rPr lang="en-US" dirty="0"/>
+              <a:t> </a:t>
+            </a:r>
+            <a:r>
+              <a:rPr lang="en-US" dirty="0" err="1"/>
+              <a:t>çözmek</a:t>
             </a:r>
             <a:r>
               <a:rPr lang="en-US" dirty="0"/>
@@ -8645,303 +8704,40 @@
             </a:r>
             <a:r>
               <a:rPr lang="en-US" dirty="0"/>
-              <a:t> </a:t>
-            </a:r>
-            <a:r>
-              <a:rPr lang="en-US" dirty="0" err="1"/>
-              <a:t>olası</a:t>
-            </a:r>
-            <a:r>
-              <a:rPr lang="en-US" dirty="0"/>
-              <a:t> </a:t>
-            </a:r>
-            <a:r>
-              <a:rPr lang="en-US" dirty="0" err="1"/>
-              <a:t>tüm</a:t>
-            </a:r>
-            <a:r>
-              <a:rPr lang="en-US" dirty="0"/>
-              <a:t> </a:t>
-            </a:r>
-            <a:r>
-              <a:rPr lang="en-US" dirty="0" err="1"/>
-              <a:t>kimyasal</a:t>
-            </a:r>
-            <a:r>
-              <a:rPr lang="en-US" dirty="0"/>
-              <a:t> </a:t>
-            </a:r>
-            <a:r>
-              <a:rPr lang="en-US" dirty="0" err="1"/>
-              <a:t>türleri</a:t>
-            </a:r>
-            <a:r>
-              <a:rPr lang="en-US" dirty="0"/>
-              <a:t> </a:t>
-            </a:r>
-            <a:r>
-              <a:rPr lang="en-US" dirty="0" err="1"/>
-              <a:t>göz</a:t>
-            </a:r>
-            <a:r>
-              <a:rPr lang="en-US" dirty="0"/>
-              <a:t> </a:t>
-            </a:r>
-            <a:r>
-              <a:rPr lang="en-US" dirty="0" err="1"/>
-              <a:t>önünde</a:t>
-            </a:r>
-            <a:r>
-              <a:rPr lang="en-US" dirty="0"/>
-              <a:t> </a:t>
-            </a:r>
-            <a:r>
-              <a:rPr lang="en-US" dirty="0" err="1"/>
-              <a:t>bulundurarak</a:t>
-            </a:r>
-            <a:r>
-              <a:rPr lang="en-US" dirty="0"/>
-              <a:t>, Gibbs </a:t>
-            </a:r>
-            <a:r>
-              <a:rPr lang="en-US" dirty="0" err="1"/>
-              <a:t>serbest</a:t>
-            </a:r>
-            <a:r>
-              <a:rPr lang="en-US" dirty="0"/>
-              <a:t> </a:t>
-            </a:r>
-            <a:r>
-              <a:rPr lang="en-US" dirty="0" err="1"/>
-              <a:t>enerjisini</a:t>
-            </a:r>
-            <a:r>
-              <a:rPr lang="en-US" dirty="0"/>
-              <a:t> minimize </a:t>
-            </a:r>
-            <a:r>
-              <a:rPr lang="en-US" dirty="0" err="1"/>
-              <a:t>edecek</a:t>
-            </a:r>
-            <a:r>
-              <a:rPr lang="en-US" dirty="0"/>
-              <a:t> </a:t>
-            </a:r>
-            <a:r>
-              <a:rPr lang="en-US" dirty="0" err="1"/>
-              <a:t>kompozisyonu</a:t>
-            </a:r>
-            <a:r>
-              <a:rPr lang="en-US" dirty="0"/>
-              <a:t> </a:t>
-            </a:r>
-            <a:r>
-              <a:rPr lang="en-US" dirty="0" err="1"/>
-              <a:t>bulur</a:t>
+              <a:t> Newton-Raphson </a:t>
+            </a:r>
+            <a:r>
+              <a:rPr lang="en-US" dirty="0" err="1"/>
+              <a:t>gibi</a:t>
+            </a:r>
+            <a:r>
+              <a:rPr lang="en-US" dirty="0"/>
+              <a:t> </a:t>
+            </a:r>
+            <a:r>
+              <a:rPr lang="en-US" dirty="0" err="1"/>
+              <a:t>nümerik</a:t>
+            </a:r>
+            <a:r>
+              <a:rPr lang="en-US" dirty="0"/>
+              <a:t> </a:t>
+            </a:r>
+            <a:r>
+              <a:rPr lang="en-US" dirty="0" err="1"/>
+              <a:t>metodlar</a:t>
+            </a:r>
+            <a:r>
+              <a:rPr lang="en-US" dirty="0"/>
+              <a:t> </a:t>
+            </a:r>
+            <a:r>
+              <a:rPr lang="en-US" dirty="0" err="1"/>
+              <a:t>kullanır</a:t>
             </a:r>
             <a:r>
               <a:rPr lang="en-US" dirty="0"/>
               <a:t>. </a:t>
             </a:r>
-          </a:p>
-          <a:p>
-            <a:pPr>
-              <a:lnSpc>
-                <a:spcPct val="150000"/>
-              </a:lnSpc>
-            </a:pPr>
-            <a:r>
-              <a:rPr lang="en-US" dirty="0"/>
-              <a:t>Bu </a:t>
-            </a:r>
-            <a:r>
-              <a:rPr lang="en-US" dirty="0" err="1"/>
-              <a:t>optimizasyon</a:t>
-            </a:r>
-            <a:r>
-              <a:rPr lang="en-US" dirty="0"/>
-              <a:t> </a:t>
-            </a:r>
-            <a:r>
-              <a:rPr lang="en-US" dirty="0" err="1"/>
-              <a:t>problemi</a:t>
-            </a:r>
-            <a:r>
-              <a:rPr lang="en-US" dirty="0"/>
-              <a:t> </a:t>
-            </a:r>
-            <a:r>
-              <a:rPr lang="en-US" dirty="0" err="1"/>
-              <a:t>doğrusal</a:t>
-            </a:r>
-            <a:r>
-              <a:rPr lang="en-US" dirty="0"/>
-              <a:t> </a:t>
-            </a:r>
-            <a:r>
-              <a:rPr lang="en-US" dirty="0" err="1"/>
-              <a:t>olmayan</a:t>
-            </a:r>
-            <a:r>
-              <a:rPr lang="en-US" dirty="0"/>
-              <a:t> </a:t>
-            </a:r>
-            <a:r>
-              <a:rPr lang="en-US" dirty="0" err="1"/>
-              <a:t>kısıtlı</a:t>
-            </a:r>
-            <a:r>
-              <a:rPr lang="en-US" dirty="0"/>
-              <a:t> </a:t>
-            </a:r>
-            <a:r>
-              <a:rPr lang="en-US" dirty="0" err="1"/>
-              <a:t>bir</a:t>
-            </a:r>
-            <a:r>
-              <a:rPr lang="en-US" dirty="0"/>
-              <a:t> </a:t>
-            </a:r>
-            <a:r>
-              <a:rPr lang="en-US" dirty="0" err="1"/>
-              <a:t>problemdir</a:t>
-            </a:r>
-            <a:r>
-              <a:rPr lang="en-US" dirty="0"/>
-              <a:t> </a:t>
-            </a:r>
-            <a:r>
-              <a:rPr lang="en-US" dirty="0" err="1"/>
-              <a:t>ve</a:t>
-            </a:r>
-            <a:r>
-              <a:rPr lang="en-US" dirty="0"/>
-              <a:t> Cantera </a:t>
-            </a:r>
-            <a:r>
-              <a:rPr lang="en-US" dirty="0" err="1"/>
-              <a:t>bunu</a:t>
-            </a:r>
-            <a:r>
-              <a:rPr lang="en-US" dirty="0"/>
-              <a:t> </a:t>
-            </a:r>
-            <a:r>
-              <a:rPr lang="en-US" dirty="0" err="1"/>
-              <a:t>çözmek</a:t>
-            </a:r>
-            <a:r>
-              <a:rPr lang="en-US" dirty="0"/>
-              <a:t> </a:t>
-            </a:r>
-            <a:r>
-              <a:rPr lang="en-US" dirty="0" err="1"/>
-              <a:t>için</a:t>
-            </a:r>
-            <a:r>
-              <a:rPr lang="en-US" dirty="0"/>
-              <a:t> Newton-Raphson </a:t>
-            </a:r>
-            <a:r>
-              <a:rPr lang="en-US" dirty="0" err="1"/>
-              <a:t>gibi</a:t>
-            </a:r>
-            <a:r>
-              <a:rPr lang="en-US" dirty="0"/>
-              <a:t> </a:t>
-            </a:r>
-            <a:r>
-              <a:rPr lang="en-US" dirty="0" err="1"/>
-              <a:t>nümerik</a:t>
-            </a:r>
-            <a:r>
-              <a:rPr lang="en-US" dirty="0"/>
-              <a:t> </a:t>
-            </a:r>
-            <a:r>
-              <a:rPr lang="en-US" dirty="0" err="1"/>
-              <a:t>metodlar</a:t>
-            </a:r>
-            <a:r>
-              <a:rPr lang="en-US" dirty="0"/>
-              <a:t> </a:t>
-            </a:r>
-            <a:r>
-              <a:rPr lang="en-US" dirty="0" err="1"/>
-              <a:t>kullanır</a:t>
-            </a:r>
-            <a:r>
-              <a:rPr lang="en-US" dirty="0"/>
-              <a:t>. </a:t>
-            </a:r>
-          </a:p>
-          <a:p>
-            <a:pPr>
-              <a:lnSpc>
-                <a:spcPct val="150000"/>
-              </a:lnSpc>
-            </a:pPr>
-            <a:r>
-              <a:rPr lang="en-US" dirty="0"/>
-              <a:t>Cantera, Gibbs </a:t>
-            </a:r>
-            <a:r>
-              <a:rPr lang="en-US" dirty="0" err="1"/>
-              <a:t>serbest</a:t>
-            </a:r>
-            <a:r>
-              <a:rPr lang="en-US" dirty="0"/>
-              <a:t> </a:t>
-            </a:r>
-            <a:r>
-              <a:rPr lang="en-US" dirty="0" err="1"/>
-              <a:t>enerjisi</a:t>
-            </a:r>
-            <a:r>
-              <a:rPr lang="en-US" dirty="0"/>
-              <a:t> </a:t>
-            </a:r>
-            <a:r>
-              <a:rPr lang="en-US" dirty="0" err="1"/>
-              <a:t>minimizasyonu</a:t>
-            </a:r>
-            <a:r>
-              <a:rPr lang="en-US" dirty="0"/>
-              <a:t> </a:t>
-            </a:r>
-            <a:r>
-              <a:rPr lang="en-US" dirty="0" err="1"/>
-              <a:t>için</a:t>
-            </a:r>
-            <a:r>
-              <a:rPr lang="en-US" dirty="0"/>
-              <a:t> Newton-Raphson </a:t>
-            </a:r>
-            <a:r>
-              <a:rPr lang="en-US" dirty="0" err="1"/>
-              <a:t>iteratif</a:t>
-            </a:r>
-            <a:r>
-              <a:rPr lang="en-US" dirty="0"/>
-              <a:t> </a:t>
-            </a:r>
-            <a:r>
-              <a:rPr lang="en-US" dirty="0" err="1"/>
-              <a:t>yöntemini</a:t>
-            </a:r>
-            <a:r>
-              <a:rPr lang="en-US" dirty="0"/>
-              <a:t> </a:t>
-            </a:r>
-            <a:r>
-              <a:rPr lang="en-US" dirty="0" err="1"/>
-              <a:t>kullanır</a:t>
-            </a:r>
-            <a:r>
-              <a:rPr lang="en-US" dirty="0"/>
-              <a:t>.</a:t>
-            </a:r>
-            <a:endParaRPr lang="tr-TR" dirty="0"/>
           </a:p>
         </p:txBody>
       </p:sp>
@@ -14570,122 +14366,6 @@
         <p:cNvPr id="1" name="">
           <a:extLst>
             <a:ext uri="{FF2B5EF4-FFF2-40B4-BE49-F238E27FC236}">
-              <a16:creationId xmlns:a16="http://schemas.microsoft.com/office/drawing/2014/main" id="{4CCBFEBD-5C73-6E93-5BEA-7589E9454A7E}"/>
-            </a:ext>
-          </a:extLst>
-        </p:cNvPr>
-        <p:cNvGrpSpPr/>
-        <p:nvPr/>
-      </p:nvGrpSpPr>
-      <p:grpSpPr>
-        <a:xfrm>
-          <a:off x="0" y="0"/>
-          <a:ext cx="0" cy="0"/>
-          <a:chOff x="0" y="0"/>
-          <a:chExt cx="0" cy="0"/>
-        </a:xfrm>
-      </p:grpSpPr>
-      <p:sp>
-        <p:nvSpPr>
-          <p:cNvPr id="2" name="Title 1">
-            <a:extLst>
-              <a:ext uri="{FF2B5EF4-FFF2-40B4-BE49-F238E27FC236}">
-                <a16:creationId xmlns:a16="http://schemas.microsoft.com/office/drawing/2014/main" id="{69ED1418-F7A7-1D67-B525-816C8E80164C}"/>
-              </a:ext>
-            </a:extLst>
-          </p:cNvPr>
-          <p:cNvSpPr>
-            <a:spLocks noGrp="1"/>
-          </p:cNvSpPr>
-          <p:nvPr>
-            <p:ph type="title"/>
-          </p:nvPr>
-        </p:nvSpPr>
-        <p:spPr>
-          <a:xfrm>
-            <a:off x="677333" y="609600"/>
-            <a:ext cx="9694832" cy="1320800"/>
-          </a:xfrm>
-        </p:spPr>
-        <p:txBody>
-          <a:bodyPr/>
-          <a:lstStyle/>
-          <a:p>
-            <a:r>
-              <a:rPr lang="en-US" dirty="0" err="1"/>
-              <a:t>Özellik</a:t>
-            </a:r>
-            <a:r>
-              <a:rPr lang="en-US" dirty="0"/>
-              <a:t> </a:t>
-            </a:r>
-            <a:r>
-              <a:rPr lang="en-US" dirty="0" err="1"/>
-              <a:t>önem</a:t>
-            </a:r>
-            <a:r>
-              <a:rPr lang="en-US" dirty="0"/>
-              <a:t> </a:t>
-            </a:r>
-            <a:r>
-              <a:rPr lang="en-US" dirty="0" err="1"/>
-              <a:t>analizi</a:t>
-            </a:r>
-            <a:endParaRPr lang="en-US" dirty="0"/>
-          </a:p>
-        </p:txBody>
-      </p:sp>
-      <p:pic>
-        <p:nvPicPr>
-          <p:cNvPr id="5" name="Resim 4">
-            <a:extLst>
-              <a:ext uri="{FF2B5EF4-FFF2-40B4-BE49-F238E27FC236}">
-                <a16:creationId xmlns:a16="http://schemas.microsoft.com/office/drawing/2014/main" id="{E311453C-F422-564B-3220-CD952E9F3CFE}"/>
-              </a:ext>
-            </a:extLst>
-          </p:cNvPr>
-          <p:cNvPicPr>
-            <a:picLocks noChangeAspect="1"/>
-          </p:cNvPicPr>
-          <p:nvPr/>
-        </p:nvPicPr>
-        <p:blipFill>
-          <a:blip r:embed="rId2"/>
-          <a:stretch>
-            <a:fillRect/>
-          </a:stretch>
-        </p:blipFill>
-        <p:spPr>
-          <a:xfrm>
-            <a:off x="677333" y="1930400"/>
-            <a:ext cx="7651683" cy="4792017"/>
-          </a:xfrm>
-          <a:prstGeom prst="rect">
-            <a:avLst/>
-          </a:prstGeom>
-        </p:spPr>
-      </p:pic>
-    </p:spTree>
-    <p:extLst>
-      <p:ext uri="{BB962C8B-B14F-4D97-AF65-F5344CB8AC3E}">
-        <p14:creationId xmlns:p14="http://schemas.microsoft.com/office/powerpoint/2010/main" val="1632556385"/>
-      </p:ext>
-    </p:extLst>
-  </p:cSld>
-  <p:clrMapOvr>
-    <a:masterClrMapping/>
-  </p:clrMapOvr>
-</p:sld>
-</file>
-
-<file path=ppt/slides/slide34.xml><?xml version="1.0" encoding="utf-8"?>
-<p:sld xmlns:a="http://schemas.openxmlformats.org/drawingml/2006/main" xmlns:r="http://schemas.openxmlformats.org/officeDocument/2006/relationships" xmlns:p="http://schemas.openxmlformats.org/presentationml/2006/main">
-  <p:cSld>
-    <p:spTree>
-      <p:nvGrpSpPr>
-        <p:cNvPr id="1" name="">
-          <a:extLst>
-            <a:ext uri="{FF2B5EF4-FFF2-40B4-BE49-F238E27FC236}">
               <a16:creationId xmlns:a16="http://schemas.microsoft.com/office/drawing/2014/main" id="{9081EDB3-BB90-D82F-42B2-990EB96393BF}"/>
             </a:ext>
           </a:extLst>
@@ -14823,7 +14503,7 @@
 </p:sld>
 </file>
 
-<file path=ppt/slides/slide35.xml><?xml version="1.0" encoding="utf-8"?>
+<file path=ppt/slides/slide34.xml><?xml version="1.0" encoding="utf-8"?>
 <p:sld xmlns:a="http://schemas.openxmlformats.org/drawingml/2006/main" xmlns:r="http://schemas.openxmlformats.org/officeDocument/2006/relationships" xmlns:p="http://schemas.openxmlformats.org/presentationml/2006/main">
   <p:cSld>
     <p:spTree>
@@ -14931,7 +14611,7 @@
 </p:sld>
 </file>
 
-<file path=ppt/slides/slide36.xml><?xml version="1.0" encoding="utf-8"?>
+<file path=ppt/slides/slide35.xml><?xml version="1.0" encoding="utf-8"?>
 <p:sld xmlns:a="http://schemas.openxmlformats.org/drawingml/2006/main" xmlns:r="http://schemas.openxmlformats.org/officeDocument/2006/relationships" xmlns:p="http://schemas.openxmlformats.org/presentationml/2006/main">
   <p:cSld>
     <p:spTree>
@@ -15505,7 +15185,7 @@
 </p:sld>
 </file>
 
-<file path=ppt/slides/slide37.xml><?xml version="1.0" encoding="utf-8"?>
+<file path=ppt/slides/slide36.xml><?xml version="1.0" encoding="utf-8"?>
 <p:sld xmlns:a="http://schemas.openxmlformats.org/drawingml/2006/main" xmlns:r="http://schemas.openxmlformats.org/officeDocument/2006/relationships" xmlns:p="http://schemas.openxmlformats.org/presentationml/2006/main">
   <p:cSld>
     <p:spTree>
@@ -16336,7 +16016,7 @@
 </p:sld>
 </file>
 
-<file path=ppt/slides/slide38.xml><?xml version="1.0" encoding="utf-8"?>
+<file path=ppt/slides/slide37.xml><?xml version="1.0" encoding="utf-8"?>
 <p:sld xmlns:a="http://schemas.openxmlformats.org/drawingml/2006/main" xmlns:r="http://schemas.openxmlformats.org/officeDocument/2006/relationships" xmlns:p="http://schemas.openxmlformats.org/presentationml/2006/main">
   <p:cSld>
     <p:spTree>
